--- a/business/數位人KOL-對外提案簡報.pptx
+++ b/business/數位人KOL-對外提案簡報.pptx
@@ -9215,7 +9215,7 @@
                 <a:ea typeface="Microsoft JhengHei" pitchFamily="34" charset="-122"/>
                 <a:cs typeface="Microsoft JhengHei" pitchFamily="34" charset="-120"/>
               </a:rPr>
-              <a:t>把公域流量,持續導進您自己的私域——靠三件事的加成:</a:t>
+              <a:t>同一筆錢——每月 NT$65,000——兩種用法,結果差在哪?</a:t>
             </a:r>
             <a:endParaRPr lang="en-US" sz="1400" dirty="0"/>
           </a:p>
@@ -9570,7 +9570,7 @@
                 <a:ea typeface="Microsoft JhengHei" pitchFamily="34" charset="-122"/>
                 <a:cs typeface="Microsoft JhengHei" pitchFamily="34" charset="-120"/>
               </a:rPr>
-              <a:t>只投廣告</a:t>
+              <a:t>全部投廣告</a:t>
             </a:r>
             <a:endParaRPr lang="en-US" sz="1450" dirty="0"/>
           </a:p>
@@ -9612,7 +9612,7 @@
                 <a:ea typeface="Microsoft JhengHei" pitchFamily="34" charset="-122"/>
                 <a:cs typeface="Microsoft JhengHei" pitchFamily="34" charset="-120"/>
               </a:rPr>
-              <a:t>月投 NT$3 萬 ≈ 15 萬次曝光*,素材費另計;停止投放,流量當天歸零。</a:t>
+              <a:t>6.5 萬 ≈ 32.5 萬次曝光*,素材費還要另計;停止投放,流量當天歸零。</a:t>
             </a:r>
             <a:endParaRPr lang="en-US" sz="1150" dirty="0"/>
           </a:p>
@@ -9673,7 +9673,7 @@
                 <a:ea typeface="Microsoft JhengHei" pitchFamily="34" charset="-122"/>
                 <a:cs typeface="Microsoft JhengHei" pitchFamily="34" charset="-120"/>
               </a:rPr>
-              <a:t>數位人 KOL 引流</a:t>
+              <a:t>投入數位人 KOL</a:t>
             </a:r>
             <a:endParaRPr lang="en-US" sz="1450" dirty="0"/>
           </a:p>
@@ -9715,7 +9715,7 @@
                 <a:ea typeface="Microsoft JhengHei" pitchFamily="34" charset="-122"/>
                 <a:cs typeface="Microsoft JhengHei" pitchFamily="34" charset="-120"/>
               </a:rPr>
-              <a:t>內容累積在您的帳號,不投放也有自然流量;粉絲與聲量留在私域。</a:t>
+              <a:t>同樣 6.5 萬:每月 22 篇內容+人設資產,累積在您的帳號;不投放也有自然流量。</a:t>
             </a:r>
             <a:endParaRPr lang="en-US" sz="1150" dirty="0"/>
           </a:p>
@@ -10494,7 +10494,7 @@
                 <a:ea typeface="Microsoft JhengHei" pitchFamily="34" charset="-122"/>
                 <a:cs typeface="Microsoft JhengHei" pitchFamily="34" charset="-120"/>
               </a:rPr>
-              <a:t>建置+約 5 個月全平台營運</a:t>
+              <a:t>建置+主推全平台方案約 5 個月</a:t>
             </a:r>
             <a:endParaRPr lang="en-US" sz="1350" dirty="0"/>
           </a:p>

--- a/business/數位人KOL-對外提案簡報.pptx
+++ b/business/數位人KOL-對外提案簡報.pptx
@@ -517,7 +517,7 @@
           <a:p>
             <a:r>
               <a:rPr lang="en-US" dirty="0"/>
-              <a:t>開場關鍵句:真人業配是租流量,數位 KOL 是蓋自己的房子。</a:t>
+              <a:t>開場關鍵句：真人業配是租流量，數位 KOL 是蓋自己的房子。</a:t>
             </a:r>
             <a:endParaRPr lang="en-US" dirty="0"/>
           </a:p>
@@ -605,7 +605,7 @@
           <a:p>
             <a:r>
               <a:rPr lang="en-US" dirty="0"/>
-              <a:t>涵蓋生活風格、知識文化、健身、美妝等賽道;強調量身設計,不是從現成名單挑。</a:t>
+              <a:t>現場直接播 4 支影片：Coco/Vicky 舞蹈、Tan XiaoXiao 生活側拍、陳曉菲 生活側拍。重點：動態品質已可商用，不只是靜態圖。</a:t>
             </a:r>
             <a:endParaRPr lang="en-US" dirty="0"/>
           </a:p>
@@ -693,7 +693,7 @@
           <a:p>
             <a:r>
               <a:rPr lang="en-US" dirty="0"/>
-              <a:t>客群定調(08-13 會議):主力 B2C,B2B 傳產不主動開發。個體戶決策快,是重要新客群。只要短期轉單的客戶,誠實建議投廣告。</a:t>
+              <a:t>定調（Penny 08-17）：大膽宣傳，我們賣的就是保證流量。不引用現有測試數據（構不成爆款就不提），直接講方法論：實時 research 全網爆款 → 拆解套用到客戶 KOL → 持續製造。「一定可以帶來爆款」可以直接講。</a:t>
             </a:r>
             <a:endParaRPr lang="en-US" dirty="0"/>
           </a:p>
@@ -781,7 +781,7 @@
           <a:p>
             <a:r>
               <a:rPr lang="en-US" dirty="0"/>
-              <a:t>四道機制一道比一道硬,最後一道是合約級退場權——敢給就是信心。</a:t>
+              <a:t>客群定調（08-13 會議）：主力 B2C，B2B 傳產不主動開發。個體戶決策快，是重要新客群。只要短期轉單的客戶，誠實建議投廣告。</a:t>
             </a:r>
             <a:endParaRPr lang="en-US" dirty="0"/>
           </a:p>
@@ -869,7 +869,7 @@
           <a:p>
             <a:r>
               <a:rPr lang="en-US" dirty="0"/>
-              <a:t>兩條路徑同價:直簽一季 255,000;先試用=60,000+195,000=255,000,一毛不多付。談判讓利(內部,L2 核准):試用結束 7 天內簽約,總價折 2 萬。試用結束不續:可之後單購素材(依加購價,低消 5,000,僅限已建置客戶)。帳號由客戶名義開通,Email/門號客戶提供,我們全程引導。</a:t>
+              <a:t>四大保證（Penny 08-17 定案）：①獨一無二人設 ②爆款素材 ③流量上升 ④客戶滿意=完整話語權。第四點對外只講「擁有權與話語權在客戶」，不提內部製作溝通細節。壓軸仍是合約級退場權。</a:t>
             </a:r>
             <a:endParaRPr lang="en-US" dirty="0"/>
           </a:p>
@@ -957,7 +957,7 @@
           <a:p>
             <a:r>
               <a:rPr lang="en-US" dirty="0"/>
-              <a:t>回答客戶沒說出口的疑慮:「我要花多少時間配合?」——每月 2 小時是強賣點。</a:t>
+              <a:t>無試用期、無建置費（主管 08-14 裁示）：三週是方案內的上線準備，含在首月內。回答客戶沒說出口的疑慮：「我要花多少時間配合？」——每月 2 小時是強賣點。A/B/C 三方案都是上線後每 30 天檢核。</a:t>
             </a:r>
             <a:endParaRPr lang="en-US" dirty="0"/>
           </a:p>
@@ -1045,7 +1045,7 @@
           <a:p>
             <a:r>
               <a:rPr lang="en-US" dirty="0"/>
-              <a:t>順序:先 C(錨定)、再 B、後 A。總價:方案 B 首季 255,000(試用 60,000 為頭期款)。首季均攤約 3,600,穩定後每篇約 3,000——主動講。加購/單買價(不含排程發布,限已建置客戶,低消 5,000):短影音 ≤20 秒 2,500、21-45 秒 4,000、46-60 秒 5,000;圖文 1,200;純圖 500;修改=單價 50%。85 折前提:第二人設共用策略與營運時段。</a:t>
+              <a:t>順序：先 C（錨定）、再 B、後 A。無建置費、無試用期（主管 08-14 裁示）——方案 B 一季 195,000，簽約一次收齊，每 30 天檢核點退未執行月份。每篇均攤約 3,000——主動講。加購/單買價（限現有或曾簽約客戶，低消 5,000，不含營運）：影片 ≤20 秒 2,500、21-45 秒 4,000、46-60 秒 5,000；圖文 1,200；純圖 500；修改=單價 50%。85 折前提：第二人設共用策略與營運時段。地板價 20,000/月（Frank 裁示），L3 以上核准。</a:t>
             </a:r>
             <a:endParaRPr lang="en-US" dirty="0"/>
           </a:p>
@@ -1133,7 +1133,7 @@
           <a:p>
             <a:r>
               <a:rPr lang="en-US" dirty="0"/>
-              <a:t>CTA 流程:先跑免費品牌健檢(六維度:BRD 可被搜尋度/WEB 網站 SEO/SOC 社群/WOM 口碑/KOL 代言資產/AEO AI 答案佔位),本服務直接改善 SOC、WOM、KOL 三項;期初期末各跑一次做前後對比。收尾回到第一頁:租,還是有?</a:t>
+              <a:t>CTA 流程：先跑免費品牌健檢（六維度：BRD 可被搜尋度/WEB 網站 SEO/SOC 社群/WOM 口碑/KOL 代言資產/AEO AI 答案佔位），本服務直接改善 SOC、WOM、KOL 三項；期初期末各跑一次做前後對比。收尾回到第一頁：租，還是有？</a:t>
             </a:r>
             <a:endParaRPr lang="en-US" dirty="0"/>
           </a:p>
@@ -1221,7 +1221,7 @@
           <a:p>
             <a:r>
               <a:rPr lang="en-US" dirty="0"/>
-              <a:t>關鍵句:每篇內容含策略與營運約三千元——委外單拍一支 3,500 起,完整製作 3 萬起(來源:台灣接案平台與製作公司 2025-2026 公開報價)。</a:t>
+              <a:t>這頁講的是「一個 KOL 帳號的三層價值」：永續資產/品牌引流/完整主控權。不談用途、不談製作成本。</a:t>
             </a:r>
             <a:endParaRPr lang="en-US" dirty="0"/>
           </a:p>
@@ -1309,7 +1309,7 @@
           <a:p>
             <a:r>
               <a:rPr lang="en-US" dirty="0"/>
-              <a:t>真人與廣告買的是「觸及」,我們賣的是「資產」。客戶只要短期觸及,誠實建議投廣告。</a:t>
+              <a:t>主管定調：不要提醒客戶「一年後剩什麼」，直接講永續。兩個關鍵場景：①只買 30 天，素材照樣留存、可投廣告；②停半年想回來，同一 IP 隨時續購方案接著做。</a:t>
             </a:r>
             <a:endParaRPr lang="en-US" dirty="0"/>
           </a:p>
@@ -1397,7 +1397,7 @@
           <a:p>
             <a:r>
               <a:rPr lang="en-US" dirty="0"/>
-              <a:t>行情:台灣 Meta CPM 約 NT$120-350(中位 200)、CPC 約 NT$3-15;TikTok 全球均值 CPM 約 US$4.8;中小企業常見月廣告預算 2-5 萬。對比廣告時必含素材製作費+廣告預算口徑,不拿自然流裸比廣告流。</a:t>
+              <a:t>行情：台灣 Meta CPM 約 NT$120-350（中位 200）、CPC 約 NT$3-15；TikTok 全球均值 CPM 約 US$4.8。對比廣告必含素材製作費+廣告預算口徑。⚠ 對外絕不提自動化、排程工具與任何內部流程（生成工具、管理系統皆屬內部機密）——只講結果：多平台持續經營。</a:t>
             </a:r>
             <a:endParaRPr lang="en-US" dirty="0"/>
           </a:p>
@@ -1485,7 +1485,7 @@
           <a:p>
             <a:r>
               <a:rPr lang="en-US" dirty="0"/>
-              <a:t>內部口徑:月費 10 萬×4 個月;YouTube 官方 CSV:合作內容 22 支、觀看 9,225、訂閱 +37、曝光 16,159;IG 18 篇、互動約 1,390;FB 24 篇。ROI 內部估約 10%,不對外。12 月初 FB/IG 高峰為付費活動,不列入自然成效。不指名藝人、不放截圖。被問「為什麼效果差還敢講」:因為誠實,而且這正是我們改做數位人的原因——學費已經替客戶付過了。</a:t>
+              <a:t>口徑（Penny 08-17 定案）：總投入約 200 萬=代言授權+內容合作+相關拍攝支出。YouTube 官方數據：22 支、觀看 9,225、訂閱 +37。不指名藝人、不放截圖、ROI 不對外。右欄換算：65,000×30 個月≈200 萬；週 3 圖文+2 影音 → 30 個月約 390 篇圖文+260 支影音。被問「效果差還敢講」：因為誠實——這門學費我們已替客戶付過。</a:t>
             </a:r>
             <a:endParaRPr lang="en-US" dirty="0"/>
           </a:p>
@@ -1573,7 +1573,7 @@
           <a:p>
             <a:r>
               <a:rPr lang="en-US" dirty="0"/>
-              <a:t>台灣代操行情 NT$20,000-50,000/月(圖文為主)。被拿低價 AI 數字人工具比價:那是自助工具,無人設規劃、無營運、無品質合規把關,退單率高;我們賣的是服務+歸客戶的資產。</a:t>
+              <a:t>三組對照=場景生成/製作效率/敏感產業突破。台灣代操行情 NT$20,000-50,000/月（圖文為主）。被拿低價 AI 工具比價：那是自助工具，無人設規劃、無營運、無合規把關；我們賣的是服務+歸客戶的資產。</a:t>
             </a:r>
             <a:endParaRPr lang="en-US" dirty="0"/>
           </a:p>
@@ -1661,7 +1661,7 @@
           <a:p>
             <a:r>
               <a:rPr lang="en-US" dirty="0"/>
-              <a:t>形象型路線:視覺導向、生活風格。提案時可播 dance/daily 影片檔。</a:t>
+              <a:t>形象型路線：視覺導向、生活風格。提案時可播 dance/daily 影片檔。</a:t>
             </a:r>
             <a:endParaRPr lang="en-US" dirty="0"/>
           </a:p>
@@ -1749,7 +1749,7 @@
           <a:p>
             <a:r>
               <a:rPr lang="en-US" dirty="0"/>
-              <a:t>知識型路線:口播+查證+合規。提案時可展示實際帳號與發布記錄(依保密範圍)。</a:t>
+              <a:t>知識型路線：口播+查證+合規。提案時可展示實際帳號與發布記錄（依保密範圍）。</a:t>
             </a:r>
             <a:endParaRPr lang="en-US" dirty="0"/>
           </a:p>
@@ -1837,7 +1837,7 @@
           <a:p>
             <a:r>
               <a:rPr lang="en-US" dirty="0"/>
-              <a:t>重點是系統,不是數字大小。實例:純生活紀錄互動率 &lt;1% → 全面改反直覺鉤子;YouTube 互動率最高;TikTok 觸及 3-5 倍。口徑:111 篇為三人設全平台已發布素材(7/15-8/7)。</a:t>
+              <a:t>涵蓋生活風格、電競、派對、知識文化等賽道；強調量身設計，不是從現成名單挑。陣容為 Penny 於 V3.0 選定之 8 位。</a:t>
             </a:r>
             <a:endParaRPr lang="en-US" dirty="0"/>
           </a:p>
@@ -2306,7 +2306,7 @@
                 <a:ea typeface="Microsoft JhengHei" pitchFamily="34" charset="-122"/>
                 <a:cs typeface="Microsoft JhengHei" pitchFamily="34" charset="-120"/>
               </a:rPr>
-              <a:t>兌心科技 INSIGHT TECH|數位人 KOL 品牌顧問服務</a:t>
+              <a:t>兌心科技 INSIGHT SOFTWARE｜數位人 KOL 品牌顧問服務</a:t>
             </a:r>
             <a:endParaRPr lang="en-US" sz="1300" dirty="0"/>
           </a:p>
@@ -2348,7 +2348,7 @@
                 <a:ea typeface="Microsoft JhengHei" pitchFamily="34" charset="-122"/>
                 <a:cs typeface="Microsoft JhengHei" pitchFamily="34" charset="-120"/>
               </a:rPr>
-              <a:t>您的行銷預算,</a:t>
+              <a:t>您的行銷預算，</a:t>
             </a:r>
             <a:endParaRPr lang="en-US" sz="3800" dirty="0"/>
           </a:p>
@@ -2368,7 +2368,7 @@
                 <a:ea typeface="Microsoft JhengHei" pitchFamily="34" charset="-122"/>
                 <a:cs typeface="Microsoft JhengHei" pitchFamily="34" charset="-120"/>
               </a:rPr>
-              <a:t>買到的是「租」,</a:t>
+              <a:t>買到的是「租」，</a:t>
             </a:r>
             <a:endParaRPr lang="en-US" sz="3800" dirty="0"/>
           </a:p>
@@ -2388,7 +2388,7 @@
                 <a:ea typeface="Microsoft JhengHei" pitchFamily="34" charset="-122"/>
                 <a:cs typeface="Microsoft JhengHei" pitchFamily="34" charset="-120"/>
               </a:rPr>
-              <a:t>還是「有」?</a:t>
+              <a:t>還是「有」？</a:t>
             </a:r>
             <a:endParaRPr lang="en-US" sz="3800" dirty="0"/>
           </a:p>
@@ -2430,7 +2430,7 @@
                 <a:ea typeface="Microsoft JhengHei" pitchFamily="34" charset="-122"/>
                 <a:cs typeface="Microsoft JhengHei" pitchFamily="34" charset="-120"/>
               </a:rPr>
-              <a:t>業配與廣告是租來的流量,合約結束就歸零。</a:t>
+              <a:t>業配與廣告是租來的流量，合約結束就歸零。</a:t>
             </a:r>
             <a:endParaRPr lang="en-US" sz="1600" dirty="0"/>
           </a:p>
@@ -2450,7 +2450,7 @@
                 <a:ea typeface="Microsoft JhengHei" pitchFamily="34" charset="-122"/>
                 <a:cs typeface="Microsoft JhengHei" pitchFamily="34" charset="-120"/>
               </a:rPr>
-              <a:t>數位人 KOL,是永久歸屬品牌的資產。</a:t>
+              <a:t>數位人 KOL，是永久歸屬品牌的資產。</a:t>
             </a:r>
             <a:endParaRPr lang="en-US" sz="1600" dirty="0"/>
           </a:p>
@@ -2560,7 +2560,7 @@
                 <a:ea typeface="Microsoft JhengHei" pitchFamily="34" charset="-122"/>
                 <a:cs typeface="Microsoft JhengHei" pitchFamily="34" charset="-120"/>
               </a:rPr>
-              <a:t>ROSTER|多元賽道的人設庫</a:t>
+              <a:t>SHOWREEL｜會動的數位人</a:t>
             </a:r>
             <a:endParaRPr lang="en-US" sz="1100" dirty="0"/>
           </a:p>
@@ -2599,7 +2599,7 @@
                 <a:ea typeface="Microsoft JhengHei" pitchFamily="34" charset="-122"/>
                 <a:cs typeface="Microsoft JhengHei" pitchFamily="34" charset="-120"/>
               </a:rPr>
-              <a:t>20+ 個人設設計經驗,依品牌量身打造</a:t>
+              <a:t>數位人也「動」得起來</a:t>
             </a:r>
             <a:endParaRPr lang="en-US" sz="3000" dirty="0"/>
           </a:p>
@@ -2621,8 +2621,8 @@
         </p:blipFill>
         <p:spPr>
           <a:xfrm>
-            <a:off x="1051560" y="1463040"/>
-            <a:ext cx="2103120" cy="1783080"/>
+            <a:off x="1115568" y="1508760"/>
+            <a:ext cx="2212848" cy="3950208"/>
           </a:xfrm>
           <a:prstGeom prst="rect">
             <a:avLst/>
@@ -2637,8 +2637,8 @@
         </p:nvSpPr>
         <p:spPr>
           <a:xfrm>
-            <a:off x="1051560" y="3291840"/>
-            <a:ext cx="2103120" cy="292608"/>
+            <a:off x="932688" y="5532120"/>
+            <a:ext cx="2578608" cy="365760"/>
           </a:xfrm>
           <a:prstGeom prst="rect">
             <a:avLst/>
@@ -2654,46 +2654,7 @@
               <a:buNone/>
             </a:pPr>
             <a:r>
-              <a:rPr lang="en-US" sz="1300" b="1" dirty="0">
-                <a:solidFill>
-                  <a:srgbClr val="FFFFFF"/>
-                </a:solidFill>
-                <a:latin typeface="Microsoft JhengHei" pitchFamily="34" charset="0"/>
-                <a:ea typeface="Microsoft JhengHei" pitchFamily="34" charset="-122"/>
-                <a:cs typeface="Microsoft JhengHei" pitchFamily="34" charset="-120"/>
-              </a:rPr>
-              <a:t>Luna Tanaka</a:t>
-            </a:r>
-            <a:endParaRPr lang="en-US" sz="1300" dirty="0"/>
-          </a:p>
-        </p:txBody>
-      </p:sp>
-      <p:sp>
-        <p:nvSpPr>
-          <p:cNvPr id="6" name="Text 3"/>
-          <p:cNvSpPr/>
-          <p:nvPr/>
-        </p:nvSpPr>
-        <p:spPr>
-          <a:xfrm>
-            <a:off x="1051560" y="3584448"/>
-            <a:ext cx="2103120" cy="274320"/>
-          </a:xfrm>
-          <a:prstGeom prst="rect">
-            <a:avLst/>
-          </a:prstGeom>
-          <a:noFill/>
-          <a:ln/>
-        </p:spPr>
-        <p:txBody>
-          <a:bodyPr wrap="square" lIns="0" tIns="0" rIns="0" bIns="0" rtlCol="0" anchor="ctr"/>
-          <a:lstStyle/>
-          <a:p>
-            <a:pPr algn="ctr" indent="0" marL="0">
-              <a:buNone/>
-            </a:pPr>
-            <a:r>
-              <a:rPr lang="en-US" sz="1050" dirty="0">
+              <a:rPr lang="en-US" sz="1100" i="1" dirty="0">
                 <a:solidFill>
                   <a:srgbClr val="8FA0BE"/>
                 </a:solidFill>
@@ -2701,15 +2662,15 @@
                 <a:ea typeface="Microsoft JhengHei" pitchFamily="34" charset="-122"/>
                 <a:cs typeface="Microsoft JhengHei" pitchFamily="34" charset="-120"/>
               </a:rPr>
-              <a:t>京都・日系美學</a:t>
-            </a:r>
-            <a:endParaRPr lang="en-US" sz="1050" dirty="0"/>
+              <a:t>Coco・舞蹈示範片段</a:t>
+            </a:r>
+            <a:endParaRPr lang="en-US" sz="1100" dirty="0"/>
           </a:p>
         </p:txBody>
       </p:sp>
       <p:pic>
         <p:nvPicPr>
-          <p:cNvPr id="7" name="Image 1" descr="preencoded.png">    </p:cNvPr>
+          <p:cNvPr id="6" name="Image 1" descr="preencoded.png">    </p:cNvPr>
           <p:cNvPicPr>
             <a:picLocks noChangeAspect="1"/>
           </p:cNvPicPr>
@@ -2723,8 +2684,8 @@
         </p:blipFill>
         <p:spPr>
           <a:xfrm>
-            <a:off x="3657600" y="1463040"/>
-            <a:ext cx="2103120" cy="1783080"/>
+            <a:off x="3694176" y="1508760"/>
+            <a:ext cx="2212848" cy="3950208"/>
           </a:xfrm>
           <a:prstGeom prst="rect">
             <a:avLst/>
@@ -2733,14 +2694,14 @@
       </p:pic>
       <p:sp>
         <p:nvSpPr>
-          <p:cNvPr id="8" name="Text 4"/>
-          <p:cNvSpPr/>
-          <p:nvPr/>
-        </p:nvSpPr>
-        <p:spPr>
-          <a:xfrm>
-            <a:off x="3657600" y="3291840"/>
-            <a:ext cx="2103120" cy="292608"/>
+          <p:cNvPr id="7" name="Text 3"/>
+          <p:cNvSpPr/>
+          <p:nvPr/>
+        </p:nvSpPr>
+        <p:spPr>
+          <a:xfrm>
+            <a:off x="3511296" y="5532120"/>
+            <a:ext cx="2578608" cy="365760"/>
           </a:xfrm>
           <a:prstGeom prst="rect">
             <a:avLst/>
@@ -2756,46 +2717,7 @@
               <a:buNone/>
             </a:pPr>
             <a:r>
-              <a:rPr lang="en-US" sz="1300" b="1" dirty="0">
-                <a:solidFill>
-                  <a:srgbClr val="FFFFFF"/>
-                </a:solidFill>
-                <a:latin typeface="Microsoft JhengHei" pitchFamily="34" charset="0"/>
-                <a:ea typeface="Microsoft JhengHei" pitchFamily="34" charset="-122"/>
-                <a:cs typeface="Microsoft JhengHei" pitchFamily="34" charset="-120"/>
-              </a:rPr>
-              <a:t>Yuna Kim</a:t>
-            </a:r>
-            <a:endParaRPr lang="en-US" sz="1300" dirty="0"/>
-          </a:p>
-        </p:txBody>
-      </p:sp>
-      <p:sp>
-        <p:nvSpPr>
-          <p:cNvPr id="9" name="Text 5"/>
-          <p:cNvSpPr/>
-          <p:nvPr/>
-        </p:nvSpPr>
-        <p:spPr>
-          <a:xfrm>
-            <a:off x="3657600" y="3584448"/>
-            <a:ext cx="2103120" cy="274320"/>
-          </a:xfrm>
-          <a:prstGeom prst="rect">
-            <a:avLst/>
-          </a:prstGeom>
-          <a:noFill/>
-          <a:ln/>
-        </p:spPr>
-        <p:txBody>
-          <a:bodyPr wrap="square" lIns="0" tIns="0" rIns="0" bIns="0" rtlCol="0" anchor="ctr"/>
-          <a:lstStyle/>
-          <a:p>
-            <a:pPr algn="ctr" indent="0" marL="0">
-              <a:buNone/>
-            </a:pPr>
-            <a:r>
-              <a:rPr lang="en-US" sz="1050" dirty="0">
+              <a:rPr lang="en-US" sz="1100" i="1" dirty="0">
                 <a:solidFill>
                   <a:srgbClr val="8FA0BE"/>
                 </a:solidFill>
@@ -2803,15 +2725,15 @@
                 <a:ea typeface="Microsoft JhengHei" pitchFamily="34" charset="-122"/>
                 <a:cs typeface="Microsoft JhengHei" pitchFamily="34" charset="-120"/>
               </a:rPr>
-              <a:t>首爾・K-beauty</a:t>
-            </a:r>
-            <a:endParaRPr lang="en-US" sz="1050" dirty="0"/>
+              <a:t>Vicky・舞蹈示範片段</a:t>
+            </a:r>
+            <a:endParaRPr lang="en-US" sz="1100" dirty="0"/>
           </a:p>
         </p:txBody>
       </p:sp>
       <p:pic>
         <p:nvPicPr>
-          <p:cNvPr id="10" name="Image 2" descr="preencoded.png">    </p:cNvPr>
+          <p:cNvPr id="8" name="Image 2" descr="preencoded.png">    </p:cNvPr>
           <p:cNvPicPr>
             <a:picLocks noChangeAspect="1"/>
           </p:cNvPicPr>
@@ -2825,8 +2747,8 @@
         </p:blipFill>
         <p:spPr>
           <a:xfrm>
-            <a:off x="6263640" y="1463040"/>
-            <a:ext cx="2103120" cy="1783080"/>
+            <a:off x="6272784" y="1508760"/>
+            <a:ext cx="2212848" cy="3950208"/>
           </a:xfrm>
           <a:prstGeom prst="rect">
             <a:avLst/>
@@ -2835,14 +2757,14 @@
       </p:pic>
       <p:sp>
         <p:nvSpPr>
-          <p:cNvPr id="11" name="Text 6"/>
-          <p:cNvSpPr/>
-          <p:nvPr/>
-        </p:nvSpPr>
-        <p:spPr>
-          <a:xfrm>
-            <a:off x="6263640" y="3291840"/>
-            <a:ext cx="2103120" cy="292608"/>
+          <p:cNvPr id="9" name="Text 4"/>
+          <p:cNvSpPr/>
+          <p:nvPr/>
+        </p:nvSpPr>
+        <p:spPr>
+          <a:xfrm>
+            <a:off x="6089904" y="5532120"/>
+            <a:ext cx="2578608" cy="365760"/>
           </a:xfrm>
           <a:prstGeom prst="rect">
             <a:avLst/>
@@ -2858,46 +2780,7 @@
               <a:buNone/>
             </a:pPr>
             <a:r>
-              <a:rPr lang="en-US" sz="1300" b="1" dirty="0">
-                <a:solidFill>
-                  <a:srgbClr val="FFFFFF"/>
-                </a:solidFill>
-                <a:latin typeface="Microsoft JhengHei" pitchFamily="34" charset="0"/>
-                <a:ea typeface="Microsoft JhengHei" pitchFamily="34" charset="-122"/>
-                <a:cs typeface="Microsoft JhengHei" pitchFamily="34" charset="-120"/>
-              </a:rPr>
-              <a:t>Ananya Kapoor</a:t>
-            </a:r>
-            <a:endParaRPr lang="en-US" sz="1300" dirty="0"/>
-          </a:p>
-        </p:txBody>
-      </p:sp>
-      <p:sp>
-        <p:nvSpPr>
-          <p:cNvPr id="12" name="Text 7"/>
-          <p:cNvSpPr/>
-          <p:nvPr/>
-        </p:nvSpPr>
-        <p:spPr>
-          <a:xfrm>
-            <a:off x="6263640" y="3584448"/>
-            <a:ext cx="2103120" cy="274320"/>
-          </a:xfrm>
-          <a:prstGeom prst="rect">
-            <a:avLst/>
-          </a:prstGeom>
-          <a:noFill/>
-          <a:ln/>
-        </p:spPr>
-        <p:txBody>
-          <a:bodyPr wrap="square" lIns="0" tIns="0" rIns="0" bIns="0" rtlCol="0" anchor="ctr"/>
-          <a:lstStyle/>
-          <a:p>
-            <a:pPr algn="ctr" indent="0" marL="0">
-              <a:buNone/>
-            </a:pPr>
-            <a:r>
-              <a:rPr lang="en-US" sz="1050" dirty="0">
+              <a:rPr lang="en-US" sz="1100" i="1" dirty="0">
                 <a:solidFill>
                   <a:srgbClr val="8FA0BE"/>
                 </a:solidFill>
@@ -2905,15 +2788,15 @@
                 <a:ea typeface="Microsoft JhengHei" pitchFamily="34" charset="-122"/>
                 <a:cs typeface="Microsoft JhengHei" pitchFamily="34" charset="-120"/>
               </a:rPr>
-              <a:t>孟買・瑜伽舞蹈</a:t>
-            </a:r>
-            <a:endParaRPr lang="en-US" sz="1050" dirty="0"/>
+              <a:t>Tan XiaoXiao・生活側拍示範片段</a:t>
+            </a:r>
+            <a:endParaRPr lang="en-US" sz="1100" dirty="0"/>
           </a:p>
         </p:txBody>
       </p:sp>
       <p:pic>
         <p:nvPicPr>
-          <p:cNvPr id="13" name="Image 3" descr="preencoded.png">    </p:cNvPr>
+          <p:cNvPr id="10" name="Image 3" descr="preencoded.png">    </p:cNvPr>
           <p:cNvPicPr>
             <a:picLocks noChangeAspect="1"/>
           </p:cNvPicPr>
@@ -2927,8 +2810,8 @@
         </p:blipFill>
         <p:spPr>
           <a:xfrm>
-            <a:off x="8869680" y="1463040"/>
-            <a:ext cx="2103120" cy="1783080"/>
+            <a:off x="8851392" y="1508760"/>
+            <a:ext cx="2212848" cy="3950208"/>
           </a:xfrm>
           <a:prstGeom prst="rect">
             <a:avLst/>
@@ -2937,14 +2820,14 @@
       </p:pic>
       <p:sp>
         <p:nvSpPr>
-          <p:cNvPr id="14" name="Text 8"/>
-          <p:cNvSpPr/>
-          <p:nvPr/>
-        </p:nvSpPr>
-        <p:spPr>
-          <a:xfrm>
-            <a:off x="8869680" y="3291840"/>
-            <a:ext cx="2103120" cy="292608"/>
+          <p:cNvPr id="11" name="Text 5"/>
+          <p:cNvSpPr/>
+          <p:nvPr/>
+        </p:nvSpPr>
+        <p:spPr>
+          <a:xfrm>
+            <a:off x="8668512" y="5532120"/>
+            <a:ext cx="2578608" cy="365760"/>
           </a:xfrm>
           <a:prstGeom prst="rect">
             <a:avLst/>
@@ -2960,30 +2843,30 @@
               <a:buNone/>
             </a:pPr>
             <a:r>
-              <a:rPr lang="en-US" sz="1300" b="1" dirty="0">
-                <a:solidFill>
-                  <a:srgbClr val="FFFFFF"/>
-                </a:solidFill>
-                <a:latin typeface="Microsoft JhengHei" pitchFamily="34" charset="0"/>
-                <a:ea typeface="Microsoft JhengHei" pitchFamily="34" charset="-122"/>
-                <a:cs typeface="Microsoft JhengHei" pitchFamily="34" charset="-120"/>
-              </a:rPr>
-              <a:t>Camille Dupont</a:t>
-            </a:r>
-            <a:endParaRPr lang="en-US" sz="1300" dirty="0"/>
-          </a:p>
-        </p:txBody>
-      </p:sp>
-      <p:sp>
-        <p:nvSpPr>
-          <p:cNvPr id="15" name="Text 9"/>
-          <p:cNvSpPr/>
-          <p:nvPr/>
-        </p:nvSpPr>
-        <p:spPr>
-          <a:xfrm>
-            <a:off x="8869680" y="3584448"/>
-            <a:ext cx="2103120" cy="274320"/>
+              <a:rPr lang="en-US" sz="1100" i="1" dirty="0">
+                <a:solidFill>
+                  <a:srgbClr val="8FA0BE"/>
+                </a:solidFill>
+                <a:latin typeface="Microsoft JhengHei" pitchFamily="34" charset="0"/>
+                <a:ea typeface="Microsoft JhengHei" pitchFamily="34" charset="-122"/>
+                <a:cs typeface="Microsoft JhengHei" pitchFamily="34" charset="-120"/>
+              </a:rPr>
+              <a:t>陳曉菲・生活側拍示範片段</a:t>
+            </a:r>
+            <a:endParaRPr lang="en-US" sz="1100" dirty="0"/>
+          </a:p>
+        </p:txBody>
+      </p:sp>
+      <p:sp>
+        <p:nvSpPr>
+          <p:cNvPr id="12" name="Text 6"/>
+          <p:cNvSpPr/>
+          <p:nvPr/>
+        </p:nvSpPr>
+        <p:spPr>
+          <a:xfrm>
+            <a:off x="822960" y="6172200"/>
+            <a:ext cx="10543032" cy="320040"/>
           </a:xfrm>
           <a:prstGeom prst="rect">
             <a:avLst/>
@@ -3007,454 +2890,7 @@
                 <a:ea typeface="Microsoft JhengHei" pitchFamily="34" charset="-122"/>
                 <a:cs typeface="Microsoft JhengHei" pitchFamily="34" charset="-120"/>
               </a:rPr>
-              <a:t>巴黎・法式慢生活</a:t>
-            </a:r>
-            <a:endParaRPr lang="en-US" sz="1050" dirty="0"/>
-          </a:p>
-        </p:txBody>
-      </p:sp>
-      <p:pic>
-        <p:nvPicPr>
-          <p:cNvPr id="16" name="Image 4" descr="preencoded.png">    </p:cNvPr>
-          <p:cNvPicPr>
-            <a:picLocks noChangeAspect="1"/>
-          </p:cNvPicPr>
-          <p:nvPr/>
-        </p:nvPicPr>
-        <p:blipFill>
-          <a:blip r:embed="rId5"/>
-          <a:stretch>
-            <a:fillRect/>
-          </a:stretch>
-        </p:blipFill>
-        <p:spPr>
-          <a:xfrm>
-            <a:off x="1051560" y="3977640"/>
-            <a:ext cx="2103120" cy="1783080"/>
-          </a:xfrm>
-          <a:prstGeom prst="rect">
-            <a:avLst/>
-          </a:prstGeom>
-        </p:spPr>
-      </p:pic>
-      <p:sp>
-        <p:nvSpPr>
-          <p:cNvPr id="17" name="Text 10"/>
-          <p:cNvSpPr/>
-          <p:nvPr/>
-        </p:nvSpPr>
-        <p:spPr>
-          <a:xfrm>
-            <a:off x="1051560" y="5806440"/>
-            <a:ext cx="2103120" cy="292608"/>
-          </a:xfrm>
-          <a:prstGeom prst="rect">
-            <a:avLst/>
-          </a:prstGeom>
-          <a:noFill/>
-          <a:ln/>
-        </p:spPr>
-        <p:txBody>
-          <a:bodyPr wrap="square" lIns="0" tIns="0" rIns="0" bIns="0" rtlCol="0" anchor="ctr"/>
-          <a:lstStyle/>
-          <a:p>
-            <a:pPr algn="ctr" indent="0" marL="0">
-              <a:buNone/>
-            </a:pPr>
-            <a:r>
-              <a:rPr lang="en-US" sz="1300" b="1" dirty="0">
-                <a:solidFill>
-                  <a:srgbClr val="FFFFFF"/>
-                </a:solidFill>
-                <a:latin typeface="Microsoft JhengHei" pitchFamily="34" charset="0"/>
-                <a:ea typeface="Microsoft JhengHei" pitchFamily="34" charset="-122"/>
-                <a:cs typeface="Microsoft JhengHei" pitchFamily="34" charset="-120"/>
-              </a:rPr>
-              <a:t>Aaliya Rivera</a:t>
-            </a:r>
-            <a:endParaRPr lang="en-US" sz="1300" dirty="0"/>
-          </a:p>
-        </p:txBody>
-      </p:sp>
-      <p:sp>
-        <p:nvSpPr>
-          <p:cNvPr id="18" name="Text 11"/>
-          <p:cNvSpPr/>
-          <p:nvPr/>
-        </p:nvSpPr>
-        <p:spPr>
-          <a:xfrm>
-            <a:off x="1051560" y="6099048"/>
-            <a:ext cx="2103120" cy="274320"/>
-          </a:xfrm>
-          <a:prstGeom prst="rect">
-            <a:avLst/>
-          </a:prstGeom>
-          <a:noFill/>
-          <a:ln/>
-        </p:spPr>
-        <p:txBody>
-          <a:bodyPr wrap="square" lIns="0" tIns="0" rIns="0" bIns="0" rtlCol="0" anchor="ctr"/>
-          <a:lstStyle/>
-          <a:p>
-            <a:pPr algn="ctr" indent="0" marL="0">
-              <a:buNone/>
-            </a:pPr>
-            <a:r>
-              <a:rPr lang="en-US" sz="1050" dirty="0">
-                <a:solidFill>
-                  <a:srgbClr val="8FA0BE"/>
-                </a:solidFill>
-                <a:latin typeface="Microsoft JhengHei" pitchFamily="34" charset="0"/>
-                <a:ea typeface="Microsoft JhengHei" pitchFamily="34" charset="-122"/>
-                <a:cs typeface="Microsoft JhengHei" pitchFamily="34" charset="-120"/>
-              </a:rPr>
-              <a:t>洛杉磯・拉丁生活</a:t>
-            </a:r>
-            <a:endParaRPr lang="en-US" sz="1050" dirty="0"/>
-          </a:p>
-        </p:txBody>
-      </p:sp>
-      <p:pic>
-        <p:nvPicPr>
-          <p:cNvPr id="19" name="Image 5" descr="preencoded.png">    </p:cNvPr>
-          <p:cNvPicPr>
-            <a:picLocks noChangeAspect="1"/>
-          </p:cNvPicPr>
-          <p:nvPr/>
-        </p:nvPicPr>
-        <p:blipFill>
-          <a:blip r:embed="rId6"/>
-          <a:stretch>
-            <a:fillRect/>
-          </a:stretch>
-        </p:blipFill>
-        <p:spPr>
-          <a:xfrm>
-            <a:off x="3657600" y="3977640"/>
-            <a:ext cx="2103120" cy="1783080"/>
-          </a:xfrm>
-          <a:prstGeom prst="rect">
-            <a:avLst/>
-          </a:prstGeom>
-        </p:spPr>
-      </p:pic>
-      <p:sp>
-        <p:nvSpPr>
-          <p:cNvPr id="20" name="Text 12"/>
-          <p:cNvSpPr/>
-          <p:nvPr/>
-        </p:nvSpPr>
-        <p:spPr>
-          <a:xfrm>
-            <a:off x="3657600" y="5806440"/>
-            <a:ext cx="2103120" cy="292608"/>
-          </a:xfrm>
-          <a:prstGeom prst="rect">
-            <a:avLst/>
-          </a:prstGeom>
-          <a:noFill/>
-          <a:ln/>
-        </p:spPr>
-        <p:txBody>
-          <a:bodyPr wrap="square" lIns="0" tIns="0" rIns="0" bIns="0" rtlCol="0" anchor="ctr"/>
-          <a:lstStyle/>
-          <a:p>
-            <a:pPr algn="ctr" indent="0" marL="0">
-              <a:buNone/>
-            </a:pPr>
-            <a:r>
-              <a:rPr lang="en-US" sz="1300" b="1" dirty="0">
-                <a:solidFill>
-                  <a:srgbClr val="FFFFFF"/>
-                </a:solidFill>
-                <a:latin typeface="Microsoft JhengHei" pitchFamily="34" charset="0"/>
-                <a:ea typeface="Microsoft JhengHei" pitchFamily="34" charset="-122"/>
-                <a:cs typeface="Microsoft JhengHei" pitchFamily="34" charset="-120"/>
-              </a:rPr>
-              <a:t>Vicky Lin</a:t>
-            </a:r>
-            <a:endParaRPr lang="en-US" sz="1300" dirty="0"/>
-          </a:p>
-        </p:txBody>
-      </p:sp>
-      <p:sp>
-        <p:nvSpPr>
-          <p:cNvPr id="21" name="Text 13"/>
-          <p:cNvSpPr/>
-          <p:nvPr/>
-        </p:nvSpPr>
-        <p:spPr>
-          <a:xfrm>
-            <a:off x="3657600" y="6099048"/>
-            <a:ext cx="2103120" cy="274320"/>
-          </a:xfrm>
-          <a:prstGeom prst="rect">
-            <a:avLst/>
-          </a:prstGeom>
-          <a:noFill/>
-          <a:ln/>
-        </p:spPr>
-        <p:txBody>
-          <a:bodyPr wrap="square" lIns="0" tIns="0" rIns="0" bIns="0" rtlCol="0" anchor="ctr"/>
-          <a:lstStyle/>
-          <a:p>
-            <a:pPr algn="ctr" indent="0" marL="0">
-              <a:buNone/>
-            </a:pPr>
-            <a:r>
-              <a:rPr lang="en-US" sz="1050" dirty="0">
-                <a:solidFill>
-                  <a:srgbClr val="8FA0BE"/>
-                </a:solidFill>
-                <a:latin typeface="Microsoft JhengHei" pitchFamily="34" charset="0"/>
-                <a:ea typeface="Microsoft JhengHei" pitchFamily="34" charset="-122"/>
-                <a:cs typeface="Microsoft JhengHei" pitchFamily="34" charset="-120"/>
-              </a:rPr>
-              <a:t>高雄・健身重訓</a:t>
-            </a:r>
-            <a:endParaRPr lang="en-US" sz="1050" dirty="0"/>
-          </a:p>
-        </p:txBody>
-      </p:sp>
-      <p:pic>
-        <p:nvPicPr>
-          <p:cNvPr id="22" name="Image 6" descr="preencoded.png">    </p:cNvPr>
-          <p:cNvPicPr>
-            <a:picLocks noChangeAspect="1"/>
-          </p:cNvPicPr>
-          <p:nvPr/>
-        </p:nvPicPr>
-        <p:blipFill>
-          <a:blip r:embed="rId7"/>
-          <a:stretch>
-            <a:fillRect/>
-          </a:stretch>
-        </p:blipFill>
-        <p:spPr>
-          <a:xfrm>
-            <a:off x="6263640" y="3977640"/>
-            <a:ext cx="2103120" cy="1783080"/>
-          </a:xfrm>
-          <a:prstGeom prst="rect">
-            <a:avLst/>
-          </a:prstGeom>
-        </p:spPr>
-      </p:pic>
-      <p:sp>
-        <p:nvSpPr>
-          <p:cNvPr id="23" name="Text 14"/>
-          <p:cNvSpPr/>
-          <p:nvPr/>
-        </p:nvSpPr>
-        <p:spPr>
-          <a:xfrm>
-            <a:off x="6263640" y="5806440"/>
-            <a:ext cx="2103120" cy="292608"/>
-          </a:xfrm>
-          <a:prstGeom prst="rect">
-            <a:avLst/>
-          </a:prstGeom>
-          <a:noFill/>
-          <a:ln/>
-        </p:spPr>
-        <p:txBody>
-          <a:bodyPr wrap="square" lIns="0" tIns="0" rIns="0" bIns="0" rtlCol="0" anchor="ctr"/>
-          <a:lstStyle/>
-          <a:p>
-            <a:pPr algn="ctr" indent="0" marL="0">
-              <a:buNone/>
-            </a:pPr>
-            <a:r>
-              <a:rPr lang="en-US" sz="1300" b="1" dirty="0">
-                <a:solidFill>
-                  <a:srgbClr val="FFFFFF"/>
-                </a:solidFill>
-                <a:latin typeface="Microsoft JhengHei" pitchFamily="34" charset="0"/>
-                <a:ea typeface="Microsoft JhengHei" pitchFamily="34" charset="-122"/>
-                <a:cs typeface="Microsoft JhengHei" pitchFamily="34" charset="-120"/>
-              </a:rPr>
-              <a:t>Faye Tan 陳曉菲</a:t>
-            </a:r>
-            <a:endParaRPr lang="en-US" sz="1300" dirty="0"/>
-          </a:p>
-        </p:txBody>
-      </p:sp>
-      <p:sp>
-        <p:nvSpPr>
-          <p:cNvPr id="24" name="Text 15"/>
-          <p:cNvSpPr/>
-          <p:nvPr/>
-        </p:nvSpPr>
-        <p:spPr>
-          <a:xfrm>
-            <a:off x="6263640" y="6099048"/>
-            <a:ext cx="2103120" cy="274320"/>
-          </a:xfrm>
-          <a:prstGeom prst="rect">
-            <a:avLst/>
-          </a:prstGeom>
-          <a:noFill/>
-          <a:ln/>
-        </p:spPr>
-        <p:txBody>
-          <a:bodyPr wrap="square" lIns="0" tIns="0" rIns="0" bIns="0" rtlCol="0" anchor="ctr"/>
-          <a:lstStyle/>
-          <a:p>
-            <a:pPr algn="ctr" indent="0" marL="0">
-              <a:buNone/>
-            </a:pPr>
-            <a:r>
-              <a:rPr lang="en-US" sz="1050" dirty="0">
-                <a:solidFill>
-                  <a:srgbClr val="8FA0BE"/>
-                </a:solidFill>
-                <a:latin typeface="Microsoft JhengHei" pitchFamily="34" charset="0"/>
-                <a:ea typeface="Microsoft JhengHei" pitchFamily="34" charset="-122"/>
-                <a:cs typeface="Microsoft JhengHei" pitchFamily="34" charset="-120"/>
-              </a:rPr>
-              <a:t>世界城市觀察者</a:t>
-            </a:r>
-            <a:endParaRPr lang="en-US" sz="1050" dirty="0"/>
-          </a:p>
-        </p:txBody>
-      </p:sp>
-      <p:pic>
-        <p:nvPicPr>
-          <p:cNvPr id="25" name="Image 7" descr="preencoded.png">    </p:cNvPr>
-          <p:cNvPicPr>
-            <a:picLocks noChangeAspect="1"/>
-          </p:cNvPicPr>
-          <p:nvPr/>
-        </p:nvPicPr>
-        <p:blipFill>
-          <a:blip r:embed="rId8"/>
-          <a:stretch>
-            <a:fillRect/>
-          </a:stretch>
-        </p:blipFill>
-        <p:spPr>
-          <a:xfrm>
-            <a:off x="8869680" y="3977640"/>
-            <a:ext cx="2103120" cy="1783080"/>
-          </a:xfrm>
-          <a:prstGeom prst="rect">
-            <a:avLst/>
-          </a:prstGeom>
-        </p:spPr>
-      </p:pic>
-      <p:sp>
-        <p:nvSpPr>
-          <p:cNvPr id="26" name="Text 16"/>
-          <p:cNvSpPr/>
-          <p:nvPr/>
-        </p:nvSpPr>
-        <p:spPr>
-          <a:xfrm>
-            <a:off x="8869680" y="5806440"/>
-            <a:ext cx="2103120" cy="292608"/>
-          </a:xfrm>
-          <a:prstGeom prst="rect">
-            <a:avLst/>
-          </a:prstGeom>
-          <a:noFill/>
-          <a:ln/>
-        </p:spPr>
-        <p:txBody>
-          <a:bodyPr wrap="square" lIns="0" tIns="0" rIns="0" bIns="0" rtlCol="0" anchor="ctr"/>
-          <a:lstStyle/>
-          <a:p>
-            <a:pPr algn="ctr" indent="0" marL="0">
-              <a:buNone/>
-            </a:pPr>
-            <a:r>
-              <a:rPr lang="en-US" sz="1300" b="1" dirty="0">
-                <a:solidFill>
-                  <a:srgbClr val="FFFFFF"/>
-                </a:solidFill>
-                <a:latin typeface="Microsoft JhengHei" pitchFamily="34" charset="0"/>
-                <a:ea typeface="Microsoft JhengHei" pitchFamily="34" charset="-122"/>
-                <a:cs typeface="Microsoft JhengHei" pitchFamily="34" charset="-120"/>
-              </a:rPr>
-              <a:t>Zhang Qinfeng</a:t>
-            </a:r>
-            <a:endParaRPr lang="en-US" sz="1300" dirty="0"/>
-          </a:p>
-        </p:txBody>
-      </p:sp>
-      <p:sp>
-        <p:nvSpPr>
-          <p:cNvPr id="27" name="Text 17"/>
-          <p:cNvSpPr/>
-          <p:nvPr/>
-        </p:nvSpPr>
-        <p:spPr>
-          <a:xfrm>
-            <a:off x="8869680" y="6099048"/>
-            <a:ext cx="2103120" cy="274320"/>
-          </a:xfrm>
-          <a:prstGeom prst="rect">
-            <a:avLst/>
-          </a:prstGeom>
-          <a:noFill/>
-          <a:ln/>
-        </p:spPr>
-        <p:txBody>
-          <a:bodyPr wrap="square" lIns="0" tIns="0" rIns="0" bIns="0" rtlCol="0" anchor="ctr"/>
-          <a:lstStyle/>
-          <a:p>
-            <a:pPr algn="ctr" indent="0" marL="0">
-              <a:buNone/>
-            </a:pPr>
-            <a:r>
-              <a:rPr lang="en-US" sz="1050" dirty="0">
-                <a:solidFill>
-                  <a:srgbClr val="8FA0BE"/>
-                </a:solidFill>
-                <a:latin typeface="Microsoft JhengHei" pitchFamily="34" charset="0"/>
-                <a:ea typeface="Microsoft JhengHei" pitchFamily="34" charset="-122"/>
-                <a:cs typeface="Microsoft JhengHei" pitchFamily="34" charset="-120"/>
-              </a:rPr>
-              <a:t>數字體驗觀察者</a:t>
-            </a:r>
-            <a:endParaRPr lang="en-US" sz="1050" dirty="0"/>
-          </a:p>
-        </p:txBody>
-      </p:sp>
-      <p:sp>
-        <p:nvSpPr>
-          <p:cNvPr id="28" name="Text 18"/>
-          <p:cNvSpPr/>
-          <p:nvPr/>
-        </p:nvSpPr>
-        <p:spPr>
-          <a:xfrm>
-            <a:off x="822960" y="6446520"/>
-            <a:ext cx="10515600" cy="320040"/>
-          </a:xfrm>
-          <a:prstGeom prst="rect">
-            <a:avLst/>
-          </a:prstGeom>
-          <a:noFill/>
-          <a:ln/>
-        </p:spPr>
-        <p:txBody>
-          <a:bodyPr wrap="square" lIns="0" tIns="0" rIns="0" bIns="0" rtlCol="0" anchor="ctr"/>
-          <a:lstStyle/>
-          <a:p>
-            <a:pPr algn="ctr" indent="0" marL="0">
-              <a:buNone/>
-            </a:pPr>
-            <a:r>
-              <a:rPr lang="en-US" sz="1050" dirty="0">
-                <a:solidFill>
-                  <a:srgbClr val="8FA0BE"/>
-                </a:solidFill>
-                <a:latin typeface="Microsoft JhengHei" pitchFamily="34" charset="0"/>
-                <a:ea typeface="Microsoft JhengHei" pitchFamily="34" charset="-122"/>
-                <a:cs typeface="Microsoft JhengHei" pitchFamily="34" charset="-120"/>
-              </a:rPr>
-              <a:t>以上皆為 AI 生成之虛擬人物示意;實際人設依品牌調性量身設計</a:t>
+              <a:t>以上為實際影片畫面截圖（皆 AI 生成）；會議中可播放完整片段</a:t>
             </a:r>
             <a:endParaRPr lang="en-US" sz="1050" dirty="0"/>
           </a:p>
@@ -3525,7 +2961,7 @@
                 <a:ea typeface="Microsoft JhengHei" pitchFamily="34" charset="-122"/>
                 <a:cs typeface="Microsoft JhengHei" pitchFamily="34" charset="-120"/>
               </a:rPr>
-              <a:t>FIT|誰最適合</a:t>
+              <a:t>VIRAL ENGINE｜流量的保證</a:t>
             </a:r>
             <a:endParaRPr lang="en-US" sz="1100" dirty="0"/>
           </a:p>
@@ -3564,7 +3000,7 @@
                 <a:ea typeface="Microsoft JhengHei" pitchFamily="34" charset="-122"/>
                 <a:cs typeface="Microsoft JhengHei" pitchFamily="34" charset="-120"/>
               </a:rPr>
-              <a:t>為 B2C 的品牌與生意人而設計</a:t>
+              <a:t>我們就是在製造爆款</a:t>
             </a:r>
             <a:endParaRPr lang="en-US" sz="3000" dirty="0"/>
           </a:p>
@@ -3578,8 +3014,8 @@
         </p:nvSpPr>
         <p:spPr>
           <a:xfrm>
-            <a:off x="822960" y="1188720"/>
-            <a:ext cx="10424160" cy="347472"/>
+            <a:off x="822960" y="1170432"/>
+            <a:ext cx="10515600" cy="320040"/>
           </a:xfrm>
           <a:prstGeom prst="rect">
             <a:avLst/>
@@ -3603,7 +3039,7 @@
                 <a:ea typeface="Microsoft JhengHei" pitchFamily="34" charset="-122"/>
                 <a:cs typeface="Microsoft JhengHei" pitchFamily="34" charset="-120"/>
               </a:rPr>
-              <a:t>開店、餐飲、保健品、旅遊旅宿、遊戲、金融服務——直接面對消費者的生意,才需要持續說故事。</a:t>
+              <a:t>好的資產，要被看見——我們的工作，就是讓它被看見。</a:t>
             </a:r>
             <a:endParaRPr lang="en-US" sz="1350" dirty="0"/>
           </a:p>
@@ -3617,12 +3053,12 @@
         </p:nvSpPr>
         <p:spPr>
           <a:xfrm>
-            <a:off x="822960" y="1691640"/>
-            <a:ext cx="10543032" cy="1371600"/>
+            <a:off x="566928" y="1691640"/>
+            <a:ext cx="3502152" cy="3474720"/>
           </a:xfrm>
           <a:prstGeom prst="roundRect">
             <a:avLst>
-              <a:gd name="adj" fmla="val 4667"/>
+              <a:gd name="adj" fmla="val 2368"/>
             </a:avLst>
           </a:prstGeom>
           <a:solidFill>
@@ -3639,8 +3075,8 @@
         </p:nvSpPr>
         <p:spPr>
           <a:xfrm>
-            <a:off x="1143000" y="2093976"/>
-            <a:ext cx="566928" cy="566928"/>
+            <a:off x="886968" y="1965960"/>
+            <a:ext cx="512064" cy="512064"/>
           </a:xfrm>
           <a:prstGeom prst="ellipse">
             <a:avLst/>
@@ -3667,8 +3103,8 @@
         </p:blipFill>
         <p:spPr>
           <a:xfrm>
-            <a:off x="1267724" y="2218700"/>
-            <a:ext cx="317480" cy="317480"/>
+            <a:off x="999622" y="2078614"/>
+            <a:ext cx="286756" cy="286756"/>
           </a:xfrm>
           <a:prstGeom prst="rect">
             <a:avLst/>
@@ -3683,20 +3119,62 @@
         </p:nvSpPr>
         <p:spPr>
           <a:xfrm>
-            <a:off x="2057400" y="1874520"/>
-            <a:ext cx="3291840" cy="1005840"/>
-          </a:xfrm>
-          <a:prstGeom prst="rect">
-            <a:avLst/>
-          </a:prstGeom>
-          <a:noFill/>
-          <a:ln/>
-        </p:spPr>
-        <p:txBody>
-          <a:bodyPr wrap="square" lIns="0" tIns="0" rIns="0" bIns="0" rtlCol="0" anchor="ctr"/>
-          <a:lstStyle/>
-          <a:p>
-            <a:pPr indent="0" marL="0">
+            <a:off x="886968" y="2633472"/>
+            <a:ext cx="2880360" cy="320040"/>
+          </a:xfrm>
+          <a:prstGeom prst="rect">
+            <a:avLst/>
+          </a:prstGeom>
+          <a:noFill/>
+          <a:ln/>
+        </p:spPr>
+        <p:txBody>
+          <a:bodyPr wrap="square" lIns="0" tIns="0" rIns="0" bIns="0" rtlCol="0" anchor="ctr"/>
+          <a:lstStyle/>
+          <a:p>
+            <a:pPr indent="0" marL="0">
+              <a:buNone/>
+            </a:pPr>
+            <a:r>
+              <a:rPr lang="en-US" sz="1100" b="1" spc="150" kern="0" dirty="0">
+                <a:solidFill>
+                  <a:srgbClr val="35C2B0"/>
+                </a:solidFill>
+                <a:latin typeface="Microsoft JhengHei" pitchFamily="34" charset="0"/>
+                <a:ea typeface="Microsoft JhengHei" pitchFamily="34" charset="-122"/>
+                <a:cs typeface="Microsoft JhengHei" pitchFamily="34" charset="-120"/>
+              </a:rPr>
+              <a:t>STEP 1・實時追蹤</a:t>
+            </a:r>
+            <a:endParaRPr lang="en-US" sz="1100" dirty="0"/>
+          </a:p>
+        </p:txBody>
+      </p:sp>
+      <p:sp>
+        <p:nvSpPr>
+          <p:cNvPr id="9" name="Text 6"/>
+          <p:cNvSpPr/>
+          <p:nvPr/>
+        </p:nvSpPr>
+        <p:spPr>
+          <a:xfrm>
+            <a:off x="886968" y="2980944"/>
+            <a:ext cx="2880360" cy="502920"/>
+          </a:xfrm>
+          <a:prstGeom prst="rect">
+            <a:avLst/>
+          </a:prstGeom>
+          <a:noFill/>
+          <a:ln/>
+        </p:spPr>
+        <p:txBody>
+          <a:bodyPr wrap="square" lIns="0" tIns="0" rIns="0" bIns="0" rtlCol="0" anchor="ctr"/>
+          <a:lstStyle/>
+          <a:p>
+            <a:pPr indent="0" marL="0">
+              <a:lnSpc>
+                <a:spcPct val="115000"/>
+              </a:lnSpc>
               <a:buNone/>
             </a:pPr>
             <a:r>
@@ -3708,7 +3186,7 @@
                 <a:ea typeface="Microsoft JhengHei" pitchFamily="34" charset="-122"/>
                 <a:cs typeface="Microsoft JhengHei" pitchFamily="34" charset="-120"/>
               </a:rPr>
-              <a:t>要說故事的 2C 品牌</a:t>
+              <a:t>全網爆款，每天研究</a:t>
             </a:r>
             <a:endParaRPr lang="en-US" sz="1700" dirty="0"/>
           </a:p>
@@ -3716,14 +3194,14 @@
       </p:sp>
       <p:sp>
         <p:nvSpPr>
-          <p:cNvPr id="9" name="Text 6"/>
-          <p:cNvSpPr/>
-          <p:nvPr/>
-        </p:nvSpPr>
-        <p:spPr>
-          <a:xfrm>
-            <a:off x="5486400" y="1856232"/>
-            <a:ext cx="5577840" cy="1051560"/>
+          <p:cNvPr id="10" name="Text 7"/>
+          <p:cNvSpPr/>
+          <p:nvPr/>
+        </p:nvSpPr>
+        <p:spPr>
+          <a:xfrm>
+            <a:off x="886968" y="3566160"/>
+            <a:ext cx="2880360" cy="1463040"/>
           </a:xfrm>
           <a:prstGeom prst="rect">
             <a:avLst/>
@@ -3737,7 +3215,7 @@
           <a:p>
             <a:pPr indent="0" marL="0">
               <a:lnSpc>
-                <a:spcPct val="122000"/>
+                <a:spcPct val="130000"/>
               </a:lnSpc>
               <a:buNone/>
             </a:pPr>
@@ -3750,57 +3228,15 @@
                 <a:ea typeface="Microsoft JhengHei" pitchFamily="34" charset="-122"/>
                 <a:cs typeface="Microsoft JhengHei" pitchFamily="34" charset="-120"/>
               </a:rPr>
-              <a:t>消費者買的是故事與信任,但養不起內容團隊。數位人替品牌每週說故事,素材同時餵養廣告。</a:t>
+              <a:t>即時 research 近期全網正在起飛的內容：什麼題材、什麼形式、什麼鉤子正在爆。</a:t>
             </a:r>
             <a:endParaRPr lang="en-US" sz="1250" dirty="0"/>
           </a:p>
         </p:txBody>
-      </p:sp>
-      <p:sp>
-        <p:nvSpPr>
-          <p:cNvPr id="10" name="Shape 7"/>
-          <p:cNvSpPr/>
-          <p:nvPr/>
-        </p:nvSpPr>
-        <p:spPr>
-          <a:xfrm>
-            <a:off x="822960" y="3209544"/>
-            <a:ext cx="10543032" cy="1371600"/>
-          </a:xfrm>
-          <a:prstGeom prst="roundRect">
-            <a:avLst>
-              <a:gd name="adj" fmla="val 4667"/>
-            </a:avLst>
-          </a:prstGeom>
-          <a:solidFill>
-            <a:srgbClr val="1A2440"/>
-          </a:solidFill>
-          <a:ln/>
-        </p:spPr>
-      </p:sp>
-      <p:sp>
-        <p:nvSpPr>
-          <p:cNvPr id="11" name="Shape 8"/>
-          <p:cNvSpPr/>
-          <p:nvPr/>
-        </p:nvSpPr>
-        <p:spPr>
-          <a:xfrm>
-            <a:off x="1143000" y="3611880"/>
-            <a:ext cx="566928" cy="566928"/>
-          </a:xfrm>
-          <a:prstGeom prst="ellipse">
-            <a:avLst/>
-          </a:prstGeom>
-          <a:solidFill>
-            <a:srgbClr val="1E6E64"/>
-          </a:solidFill>
-          <a:ln/>
-        </p:spPr>
       </p:sp>
       <p:pic>
         <p:nvPicPr>
-          <p:cNvPr id="12" name="Image 1" descr="preencoded.png">    </p:cNvPr>
+          <p:cNvPr id="11" name="Image 1" descr="preencoded.png">    </p:cNvPr>
           <p:cNvPicPr>
             <a:picLocks noChangeAspect="1"/>
           </p:cNvPicPr>
@@ -3814,8 +3250,8 @@
         </p:blipFill>
         <p:spPr>
           <a:xfrm>
-            <a:off x="1267724" y="3736604"/>
-            <a:ext cx="317480" cy="317480"/>
+            <a:off x="4114800" y="3246120"/>
+            <a:ext cx="320040" cy="320040"/>
           </a:xfrm>
           <a:prstGeom prst="rect">
             <a:avLst/>
@@ -3824,99 +3260,18 @@
       </p:pic>
       <p:sp>
         <p:nvSpPr>
-          <p:cNvPr id="13" name="Text 9"/>
-          <p:cNvSpPr/>
-          <p:nvPr/>
-        </p:nvSpPr>
-        <p:spPr>
-          <a:xfrm>
-            <a:off x="2057400" y="3392424"/>
-            <a:ext cx="3291840" cy="1005840"/>
-          </a:xfrm>
-          <a:prstGeom prst="rect">
-            <a:avLst/>
-          </a:prstGeom>
-          <a:noFill/>
-          <a:ln/>
-        </p:spPr>
-        <p:txBody>
-          <a:bodyPr wrap="square" lIns="0" tIns="0" rIns="0" bIns="0" rtlCol="0" anchor="ctr"/>
-          <a:lstStyle/>
-          <a:p>
-            <a:pPr indent="0" marL="0">
-              <a:buNone/>
-            </a:pPr>
-            <a:r>
-              <a:rPr lang="en-US" sz="1700" b="1" dirty="0">
-                <a:solidFill>
-                  <a:srgbClr val="FFFFFF"/>
-                </a:solidFill>
-                <a:latin typeface="Microsoft JhengHei" pitchFamily="34" charset="0"/>
-                <a:ea typeface="Microsoft JhengHei" pitchFamily="34" charset="-122"/>
-                <a:cs typeface="Microsoft JhengHei" pitchFamily="34" charset="-120"/>
-              </a:rPr>
-              <a:t>不想露臉的個體戶</a:t>
-            </a:r>
-            <a:endParaRPr lang="en-US" sz="1700" dirty="0"/>
-          </a:p>
-        </p:txBody>
-      </p:sp>
-      <p:sp>
-        <p:nvSpPr>
-          <p:cNvPr id="14" name="Text 10"/>
-          <p:cNvSpPr/>
-          <p:nvPr/>
-        </p:nvSpPr>
-        <p:spPr>
-          <a:xfrm>
-            <a:off x="5486400" y="3374136"/>
-            <a:ext cx="5577840" cy="1051560"/>
-          </a:xfrm>
-          <a:prstGeom prst="rect">
-            <a:avLst/>
-          </a:prstGeom>
-          <a:noFill/>
-          <a:ln/>
-        </p:spPr>
-        <p:txBody>
-          <a:bodyPr wrap="square" lIns="0" tIns="0" rIns="0" bIns="0" rtlCol="0" anchor="ctr"/>
-          <a:lstStyle/>
-          <a:p>
-            <a:pPr indent="0" marL="0">
-              <a:lnSpc>
-                <a:spcPct val="122000"/>
-              </a:lnSpc>
-              <a:buNone/>
-            </a:pPr>
-            <a:r>
-              <a:rPr lang="en-US" sz="1250" dirty="0">
-                <a:solidFill>
-                  <a:srgbClr val="C7D6EE"/>
-                </a:solidFill>
-                <a:latin typeface="Microsoft JhengHei" pitchFamily="34" charset="0"/>
-                <a:ea typeface="Microsoft JhengHei" pitchFamily="34" charset="-122"/>
-                <a:cs typeface="Microsoft JhengHei" pitchFamily="34" charset="-120"/>
-              </a:rPr>
-              <a:t>房仲、車商、保險、專業服務者:想經營個人品牌帶客,卻不想露臉、沒時間拍片。</a:t>
-            </a:r>
-            <a:endParaRPr lang="en-US" sz="1250" dirty="0"/>
-          </a:p>
-        </p:txBody>
-      </p:sp>
-      <p:sp>
-        <p:nvSpPr>
-          <p:cNvPr id="15" name="Shape 11"/>
-          <p:cNvSpPr/>
-          <p:nvPr/>
-        </p:nvSpPr>
-        <p:spPr>
-          <a:xfrm>
-            <a:off x="822960" y="4727448"/>
-            <a:ext cx="10543032" cy="1371600"/>
+          <p:cNvPr id="12" name="Shape 8"/>
+          <p:cNvSpPr/>
+          <p:nvPr/>
+        </p:nvSpPr>
+        <p:spPr>
+          <a:xfrm>
+            <a:off x="4343400" y="1691640"/>
+            <a:ext cx="3502152" cy="3474720"/>
           </a:xfrm>
           <a:prstGeom prst="roundRect">
             <a:avLst>
-              <a:gd name="adj" fmla="val 4667"/>
+              <a:gd name="adj" fmla="val 2368"/>
             </a:avLst>
           </a:prstGeom>
           <a:solidFill>
@@ -3927,14 +3282,14 @@
       </p:sp>
       <p:sp>
         <p:nvSpPr>
-          <p:cNvPr id="16" name="Shape 12"/>
-          <p:cNvSpPr/>
-          <p:nvPr/>
-        </p:nvSpPr>
-        <p:spPr>
-          <a:xfrm>
-            <a:off x="1143000" y="5129784"/>
-            <a:ext cx="566928" cy="566928"/>
+          <p:cNvPr id="13" name="Shape 9"/>
+          <p:cNvSpPr/>
+          <p:nvPr/>
+        </p:nvSpPr>
+        <p:spPr>
+          <a:xfrm>
+            <a:off x="4663440" y="1965960"/>
+            <a:ext cx="512064" cy="512064"/>
           </a:xfrm>
           <a:prstGeom prst="ellipse">
             <a:avLst/>
@@ -3947,7 +3302,7 @@
       </p:sp>
       <p:pic>
         <p:nvPicPr>
-          <p:cNvPr id="17" name="Image 2" descr="preencoded.png">    </p:cNvPr>
+          <p:cNvPr id="14" name="Image 2" descr="preencoded.png">    </p:cNvPr>
           <p:cNvPicPr>
             <a:picLocks noChangeAspect="1"/>
           </p:cNvPicPr>
@@ -3961,8 +3316,8 @@
         </p:blipFill>
         <p:spPr>
           <a:xfrm>
-            <a:off x="1267724" y="5254508"/>
-            <a:ext cx="317480" cy="317480"/>
+            <a:off x="4776094" y="2078614"/>
+            <a:ext cx="286756" cy="286756"/>
           </a:xfrm>
           <a:prstGeom prst="rect">
             <a:avLst/>
@@ -3971,26 +3326,68 @@
       </p:pic>
       <p:sp>
         <p:nvSpPr>
-          <p:cNvPr id="18" name="Text 13"/>
-          <p:cNvSpPr/>
-          <p:nvPr/>
-        </p:nvSpPr>
-        <p:spPr>
-          <a:xfrm>
-            <a:off x="2057400" y="4910328"/>
-            <a:ext cx="3291840" cy="1005840"/>
-          </a:xfrm>
-          <a:prstGeom prst="rect">
-            <a:avLst/>
-          </a:prstGeom>
-          <a:noFill/>
-          <a:ln/>
-        </p:spPr>
-        <p:txBody>
-          <a:bodyPr wrap="square" lIns="0" tIns="0" rIns="0" bIns="0" rtlCol="0" anchor="ctr"/>
-          <a:lstStyle/>
-          <a:p>
-            <a:pPr indent="0" marL="0">
+          <p:cNvPr id="15" name="Text 10"/>
+          <p:cNvSpPr/>
+          <p:nvPr/>
+        </p:nvSpPr>
+        <p:spPr>
+          <a:xfrm>
+            <a:off x="4663440" y="2633472"/>
+            <a:ext cx="2880360" cy="320040"/>
+          </a:xfrm>
+          <a:prstGeom prst="rect">
+            <a:avLst/>
+          </a:prstGeom>
+          <a:noFill/>
+          <a:ln/>
+        </p:spPr>
+        <p:txBody>
+          <a:bodyPr wrap="square" lIns="0" tIns="0" rIns="0" bIns="0" rtlCol="0" anchor="ctr"/>
+          <a:lstStyle/>
+          <a:p>
+            <a:pPr indent="0" marL="0">
+              <a:buNone/>
+            </a:pPr>
+            <a:r>
+              <a:rPr lang="en-US" sz="1100" b="1" spc="150" kern="0" dirty="0">
+                <a:solidFill>
+                  <a:srgbClr val="35C2B0"/>
+                </a:solidFill>
+                <a:latin typeface="Microsoft JhengHei" pitchFamily="34" charset="0"/>
+                <a:ea typeface="Microsoft JhengHei" pitchFamily="34" charset="-122"/>
+                <a:cs typeface="Microsoft JhengHei" pitchFamily="34" charset="-120"/>
+              </a:rPr>
+              <a:t>STEP 2・拆解套用</a:t>
+            </a:r>
+            <a:endParaRPr lang="en-US" sz="1100" dirty="0"/>
+          </a:p>
+        </p:txBody>
+      </p:sp>
+      <p:sp>
+        <p:nvSpPr>
+          <p:cNvPr id="16" name="Text 11"/>
+          <p:cNvSpPr/>
+          <p:nvPr/>
+        </p:nvSpPr>
+        <p:spPr>
+          <a:xfrm>
+            <a:off x="4663440" y="2980944"/>
+            <a:ext cx="2880360" cy="502920"/>
+          </a:xfrm>
+          <a:prstGeom prst="rect">
+            <a:avLst/>
+          </a:prstGeom>
+          <a:noFill/>
+          <a:ln/>
+        </p:spPr>
+        <p:txBody>
+          <a:bodyPr wrap="square" lIns="0" tIns="0" rIns="0" bIns="0" rtlCol="0" anchor="ctr"/>
+          <a:lstStyle/>
+          <a:p>
+            <a:pPr indent="0" marL="0">
+              <a:lnSpc>
+                <a:spcPct val="115000"/>
+              </a:lnSpc>
               <a:buNone/>
             </a:pPr>
             <a:r>
@@ -4002,7 +3399,7 @@
                 <a:ea typeface="Microsoft JhengHei" pitchFamily="34" charset="-122"/>
                 <a:cs typeface="Microsoft JhengHei" pitchFamily="34" charset="-120"/>
               </a:rPr>
-              <a:t>真人代言不便的產業</a:t>
+              <a:t>爆款公式，為您改裝</a:t>
             </a:r>
             <a:endParaRPr lang="en-US" sz="1700" dirty="0"/>
           </a:p>
@@ -4010,14 +3407,14 @@
       </p:sp>
       <p:sp>
         <p:nvSpPr>
-          <p:cNvPr id="19" name="Text 14"/>
-          <p:cNvSpPr/>
-          <p:nvPr/>
-        </p:nvSpPr>
-        <p:spPr>
-          <a:xfrm>
-            <a:off x="5486400" y="4892040"/>
-            <a:ext cx="5577840" cy="1051560"/>
+          <p:cNvPr id="17" name="Text 12"/>
+          <p:cNvSpPr/>
+          <p:nvPr/>
+        </p:nvSpPr>
+        <p:spPr>
+          <a:xfrm>
+            <a:off x="4663440" y="3566160"/>
+            <a:ext cx="2880360" cy="1463040"/>
           </a:xfrm>
           <a:prstGeom prst="rect">
             <a:avLst/>
@@ -4031,7 +3428,7 @@
           <a:p>
             <a:pPr indent="0" marL="0">
               <a:lnSpc>
-                <a:spcPct val="122000"/>
+                <a:spcPct val="130000"/>
               </a:lnSpc>
               <a:buNone/>
             </a:pPr>
@@ -4044,9 +3441,261 @@
                 <a:ea typeface="Microsoft JhengHei" pitchFamily="34" charset="-122"/>
                 <a:cs typeface="Microsoft JhengHei" pitchFamily="34" charset="-120"/>
               </a:rPr>
-              <a:t>合規敏感、爭議品類:真人不願接、接了有翻車風險。我們有實際營運中的案例與合規框架。</a:t>
+              <a:t>把爆款的結構拆解出來，量身套進您的 KOL——同樣的力道，換上您的人設與產品。</a:t>
             </a:r>
             <a:endParaRPr lang="en-US" sz="1250" dirty="0"/>
+          </a:p>
+        </p:txBody>
+      </p:sp>
+      <p:pic>
+        <p:nvPicPr>
+          <p:cNvPr id="18" name="Image 3" descr="preencoded.png">    </p:cNvPr>
+          <p:cNvPicPr>
+            <a:picLocks noChangeAspect="1"/>
+          </p:cNvPicPr>
+          <p:nvPr/>
+        </p:nvPicPr>
+        <p:blipFill>
+          <a:blip r:embed="rId4"/>
+          <a:stretch>
+            <a:fillRect/>
+          </a:stretch>
+        </p:blipFill>
+        <p:spPr>
+          <a:xfrm>
+            <a:off x="7891272" y="3246120"/>
+            <a:ext cx="320040" cy="320040"/>
+          </a:xfrm>
+          <a:prstGeom prst="rect">
+            <a:avLst/>
+          </a:prstGeom>
+        </p:spPr>
+      </p:pic>
+      <p:sp>
+        <p:nvSpPr>
+          <p:cNvPr id="19" name="Shape 13"/>
+          <p:cNvSpPr/>
+          <p:nvPr/>
+        </p:nvSpPr>
+        <p:spPr>
+          <a:xfrm>
+            <a:off x="8119872" y="1691640"/>
+            <a:ext cx="3502152" cy="3474720"/>
+          </a:xfrm>
+          <a:prstGeom prst="roundRect">
+            <a:avLst>
+              <a:gd name="adj" fmla="val 2368"/>
+            </a:avLst>
+          </a:prstGeom>
+          <a:solidFill>
+            <a:srgbClr val="1A2440"/>
+          </a:solidFill>
+          <a:ln/>
+        </p:spPr>
+      </p:sp>
+      <p:sp>
+        <p:nvSpPr>
+          <p:cNvPr id="20" name="Shape 14"/>
+          <p:cNvSpPr/>
+          <p:nvPr/>
+        </p:nvSpPr>
+        <p:spPr>
+          <a:xfrm>
+            <a:off x="8439912" y="1965960"/>
+            <a:ext cx="512064" cy="512064"/>
+          </a:xfrm>
+          <a:prstGeom prst="ellipse">
+            <a:avLst/>
+          </a:prstGeom>
+          <a:solidFill>
+            <a:srgbClr val="1E6E64"/>
+          </a:solidFill>
+          <a:ln/>
+        </p:spPr>
+      </p:sp>
+      <p:pic>
+        <p:nvPicPr>
+          <p:cNvPr id="21" name="Image 4" descr="preencoded.png">    </p:cNvPr>
+          <p:cNvPicPr>
+            <a:picLocks noChangeAspect="1"/>
+          </p:cNvPicPr>
+          <p:nvPr/>
+        </p:nvPicPr>
+        <p:blipFill>
+          <a:blip r:embed="rId5"/>
+          <a:stretch>
+            <a:fillRect/>
+          </a:stretch>
+        </p:blipFill>
+        <p:spPr>
+          <a:xfrm>
+            <a:off x="8552566" y="2078614"/>
+            <a:ext cx="286756" cy="286756"/>
+          </a:xfrm>
+          <a:prstGeom prst="rect">
+            <a:avLst/>
+          </a:prstGeom>
+        </p:spPr>
+      </p:pic>
+      <p:sp>
+        <p:nvSpPr>
+          <p:cNvPr id="22" name="Text 15"/>
+          <p:cNvSpPr/>
+          <p:nvPr/>
+        </p:nvSpPr>
+        <p:spPr>
+          <a:xfrm>
+            <a:off x="8439912" y="2633472"/>
+            <a:ext cx="2880360" cy="320040"/>
+          </a:xfrm>
+          <a:prstGeom prst="rect">
+            <a:avLst/>
+          </a:prstGeom>
+          <a:noFill/>
+          <a:ln/>
+        </p:spPr>
+        <p:txBody>
+          <a:bodyPr wrap="square" lIns="0" tIns="0" rIns="0" bIns="0" rtlCol="0" anchor="ctr"/>
+          <a:lstStyle/>
+          <a:p>
+            <a:pPr indent="0" marL="0">
+              <a:buNone/>
+            </a:pPr>
+            <a:r>
+              <a:rPr lang="en-US" sz="1100" b="1" spc="150" kern="0" dirty="0">
+                <a:solidFill>
+                  <a:srgbClr val="35C2B0"/>
+                </a:solidFill>
+                <a:latin typeface="Microsoft JhengHei" pitchFamily="34" charset="0"/>
+                <a:ea typeface="Microsoft JhengHei" pitchFamily="34" charset="-122"/>
+                <a:cs typeface="Microsoft JhengHei" pitchFamily="34" charset="-120"/>
+              </a:rPr>
+              <a:t>STEP 3・持續製造</a:t>
+            </a:r>
+            <a:endParaRPr lang="en-US" sz="1100" dirty="0"/>
+          </a:p>
+        </p:txBody>
+      </p:sp>
+      <p:sp>
+        <p:nvSpPr>
+          <p:cNvPr id="23" name="Text 16"/>
+          <p:cNvSpPr/>
+          <p:nvPr/>
+        </p:nvSpPr>
+        <p:spPr>
+          <a:xfrm>
+            <a:off x="8439912" y="2980944"/>
+            <a:ext cx="2880360" cy="502920"/>
+          </a:xfrm>
+          <a:prstGeom prst="rect">
+            <a:avLst/>
+          </a:prstGeom>
+          <a:noFill/>
+          <a:ln/>
+        </p:spPr>
+        <p:txBody>
+          <a:bodyPr wrap="square" lIns="0" tIns="0" rIns="0" bIns="0" rtlCol="0" anchor="ctr"/>
+          <a:lstStyle/>
+          <a:p>
+            <a:pPr indent="0" marL="0">
+              <a:lnSpc>
+                <a:spcPct val="115000"/>
+              </a:lnSpc>
+              <a:buNone/>
+            </a:pPr>
+            <a:r>
+              <a:rPr lang="en-US" sz="1700" b="1" dirty="0">
+                <a:solidFill>
+                  <a:srgbClr val="FFFFFF"/>
+                </a:solidFill>
+                <a:latin typeface="Microsoft JhengHei" pitchFamily="34" charset="0"/>
+                <a:ea typeface="Microsoft JhengHei" pitchFamily="34" charset="-122"/>
+                <a:cs typeface="Microsoft JhengHei" pitchFamily="34" charset="-120"/>
+              </a:rPr>
+              <a:t>週週產出，週週迭代</a:t>
+            </a:r>
+            <a:endParaRPr lang="en-US" sz="1700" dirty="0"/>
+          </a:p>
+        </p:txBody>
+      </p:sp>
+      <p:sp>
+        <p:nvSpPr>
+          <p:cNvPr id="24" name="Text 17"/>
+          <p:cNvSpPr/>
+          <p:nvPr/>
+        </p:nvSpPr>
+        <p:spPr>
+          <a:xfrm>
+            <a:off x="8439912" y="3566160"/>
+            <a:ext cx="2880360" cy="1463040"/>
+          </a:xfrm>
+          <a:prstGeom prst="rect">
+            <a:avLst/>
+          </a:prstGeom>
+          <a:noFill/>
+          <a:ln/>
+        </p:spPr>
+        <p:txBody>
+          <a:bodyPr wrap="square" lIns="0" tIns="0" rIns="0" bIns="0" rtlCol="0" anchor="ctr"/>
+          <a:lstStyle/>
+          <a:p>
+            <a:pPr indent="0" marL="0">
+              <a:lnSpc>
+                <a:spcPct val="130000"/>
+              </a:lnSpc>
+              <a:buNone/>
+            </a:pPr>
+            <a:r>
+              <a:rPr lang="en-US" sz="1250" dirty="0">
+                <a:solidFill>
+                  <a:srgbClr val="C7D6EE"/>
+                </a:solidFill>
+                <a:latin typeface="Microsoft JhengHei" pitchFamily="34" charset="0"/>
+                <a:ea typeface="Microsoft JhengHei" pitchFamily="34" charset="-122"/>
+                <a:cs typeface="Microsoft JhengHei" pitchFamily="34" charset="-120"/>
+              </a:rPr>
+              <a:t>爆款不是等運氣，是用方法持續做出來：每週產出、每週修正，直到打中為止。</a:t>
+            </a:r>
+            <a:endParaRPr lang="en-US" sz="1250" dirty="0"/>
+          </a:p>
+        </p:txBody>
+      </p:sp>
+      <p:sp>
+        <p:nvSpPr>
+          <p:cNvPr id="25" name="Text 18"/>
+          <p:cNvSpPr/>
+          <p:nvPr/>
+        </p:nvSpPr>
+        <p:spPr>
+          <a:xfrm>
+            <a:off x="822960" y="5532120"/>
+            <a:ext cx="10543032" cy="457200"/>
+          </a:xfrm>
+          <a:prstGeom prst="rect">
+            <a:avLst/>
+          </a:prstGeom>
+          <a:noFill/>
+          <a:ln/>
+        </p:spPr>
+        <p:txBody>
+          <a:bodyPr wrap="square" lIns="0" tIns="0" rIns="0" bIns="0" rtlCol="0" anchor="ctr"/>
+          <a:lstStyle/>
+          <a:p>
+            <a:pPr algn="ctr" indent="0" marL="0">
+              <a:buNone/>
+            </a:pPr>
+            <a:r>
+              <a:rPr lang="en-US" sz="1700" b="1" dirty="0">
+                <a:solidFill>
+                  <a:srgbClr val="35C2B0"/>
+                </a:solidFill>
+                <a:latin typeface="Microsoft JhengHei" pitchFamily="34" charset="0"/>
+                <a:ea typeface="Microsoft JhengHei" pitchFamily="34" charset="-122"/>
+                <a:cs typeface="Microsoft JhengHei" pitchFamily="34" charset="-120"/>
+              </a:rPr>
+              <a:t>這套方法，一定可以為您的品牌帶來爆款與流量。</a:t>
+            </a:r>
+            <a:endParaRPr lang="en-US" sz="1700" dirty="0"/>
           </a:p>
         </p:txBody>
       </p:sp>
@@ -4115,7 +3764,7 @@
                 <a:ea typeface="Microsoft JhengHei" pitchFamily="34" charset="-122"/>
                 <a:cs typeface="Microsoft JhengHei" pitchFamily="34" charset="-120"/>
               </a:rPr>
-              <a:t>QUALITY|品質不靠口頭承諾</a:t>
+              <a:t>FIT｜誰最適合</a:t>
             </a:r>
             <a:endParaRPr lang="en-US" sz="1100" dirty="0"/>
           </a:p>
@@ -4154,7 +3803,7 @@
                 <a:ea typeface="Microsoft JhengHei" pitchFamily="34" charset="-122"/>
                 <a:cs typeface="Microsoft JhengHei" pitchFamily="34" charset="-120"/>
               </a:rPr>
-              <a:t>四道品質保證機制</a:t>
+              <a:t>為 B2C 的品牌與生意人而設計</a:t>
             </a:r>
             <a:endParaRPr lang="en-US" sz="3000" dirty="0"/>
           </a:p>
@@ -4162,18 +3811,57 @@
       </p:sp>
       <p:sp>
         <p:nvSpPr>
-          <p:cNvPr id="4" name="Shape 2"/>
-          <p:cNvSpPr/>
-          <p:nvPr/>
-        </p:nvSpPr>
-        <p:spPr>
-          <a:xfrm>
-            <a:off x="822960" y="1325880"/>
-            <a:ext cx="5120640" cy="1938528"/>
+          <p:cNvPr id="4" name="Text 2"/>
+          <p:cNvSpPr/>
+          <p:nvPr/>
+        </p:nvSpPr>
+        <p:spPr>
+          <a:xfrm>
+            <a:off x="822960" y="1188720"/>
+            <a:ext cx="10424160" cy="347472"/>
+          </a:xfrm>
+          <a:prstGeom prst="rect">
+            <a:avLst/>
+          </a:prstGeom>
+          <a:noFill/>
+          <a:ln/>
+        </p:spPr>
+        <p:txBody>
+          <a:bodyPr wrap="square" lIns="0" tIns="0" rIns="0" bIns="0" rtlCol="0" anchor="ctr"/>
+          <a:lstStyle/>
+          <a:p>
+            <a:pPr indent="0" marL="0">
+              <a:buNone/>
+            </a:pPr>
+            <a:r>
+              <a:rPr lang="en-US" sz="1350" dirty="0">
+                <a:solidFill>
+                  <a:srgbClr val="C7D6EE"/>
+                </a:solidFill>
+                <a:latin typeface="Microsoft JhengHei" pitchFamily="34" charset="0"/>
+                <a:ea typeface="Microsoft JhengHei" pitchFamily="34" charset="-122"/>
+                <a:cs typeface="Microsoft JhengHei" pitchFamily="34" charset="-120"/>
+              </a:rPr>
+              <a:t>開店、餐飲、保健品、旅遊旅宿、遊戲、金融服務——直接面對消費者的生意，才需要持續說故事。</a:t>
+            </a:r>
+            <a:endParaRPr lang="en-US" sz="1350" dirty="0"/>
+          </a:p>
+        </p:txBody>
+      </p:sp>
+      <p:sp>
+        <p:nvSpPr>
+          <p:cNvPr id="5" name="Shape 3"/>
+          <p:cNvSpPr/>
+          <p:nvPr/>
+        </p:nvSpPr>
+        <p:spPr>
+          <a:xfrm>
+            <a:off x="822960" y="1691640"/>
+            <a:ext cx="10543032" cy="1371600"/>
           </a:xfrm>
           <a:prstGeom prst="roundRect">
             <a:avLst>
-              <a:gd name="adj" fmla="val 3774"/>
+              <a:gd name="adj" fmla="val 4667"/>
             </a:avLst>
           </a:prstGeom>
           <a:solidFill>
@@ -4184,14 +3872,14 @@
       </p:sp>
       <p:sp>
         <p:nvSpPr>
-          <p:cNvPr id="5" name="Shape 3"/>
-          <p:cNvSpPr/>
-          <p:nvPr/>
-        </p:nvSpPr>
-        <p:spPr>
-          <a:xfrm>
-            <a:off x="1097280" y="1618488"/>
-            <a:ext cx="512064" cy="512064"/>
+          <p:cNvPr id="6" name="Shape 4"/>
+          <p:cNvSpPr/>
+          <p:nvPr/>
+        </p:nvSpPr>
+        <p:spPr>
+          <a:xfrm>
+            <a:off x="1143000" y="2093976"/>
+            <a:ext cx="566928" cy="566928"/>
           </a:xfrm>
           <a:prstGeom prst="ellipse">
             <a:avLst/>
@@ -4204,7 +3892,7 @@
       </p:sp>
       <p:pic>
         <p:nvPicPr>
-          <p:cNvPr id="6" name="Image 0" descr="preencoded.png">    </p:cNvPr>
+          <p:cNvPr id="7" name="Image 0" descr="preencoded.png">    </p:cNvPr>
           <p:cNvPicPr>
             <a:picLocks noChangeAspect="1"/>
           </p:cNvPicPr>
@@ -4218,8 +3906,8 @@
         </p:blipFill>
         <p:spPr>
           <a:xfrm>
-            <a:off x="1209934" y="1731142"/>
-            <a:ext cx="286756" cy="286756"/>
+            <a:off x="1267724" y="2218700"/>
+            <a:ext cx="317480" cy="317480"/>
           </a:xfrm>
           <a:prstGeom prst="rect">
             <a:avLst/>
@@ -4228,44 +3916,30 @@
       </p:pic>
       <p:sp>
         <p:nvSpPr>
-          <p:cNvPr id="7" name="Text 4"/>
-          <p:cNvSpPr/>
-          <p:nvPr/>
-        </p:nvSpPr>
-        <p:spPr>
-          <a:xfrm>
-            <a:off x="1783080" y="1581912"/>
-            <a:ext cx="3931920" cy="384048"/>
-          </a:xfrm>
-          <a:prstGeom prst="rect">
-            <a:avLst/>
-          </a:prstGeom>
-          <a:noFill/>
-          <a:ln/>
-        </p:spPr>
-        <p:txBody>
-          <a:bodyPr wrap="square" lIns="0" tIns="0" rIns="0" bIns="0" rtlCol="0" anchor="ctr"/>
-          <a:lstStyle/>
-          <a:p>
-            <a:pPr indent="0" marL="0">
-              <a:buNone/>
-            </a:pPr>
-            <a:r>
-              <a:rPr lang="en-US" sz="1600" b="1" dirty="0">
-                <a:solidFill>
-                  <a:srgbClr val="35C2B0"/>
-                </a:solidFill>
-                <a:latin typeface="Microsoft JhengHei" pitchFamily="34" charset="0"/>
-                <a:ea typeface="Microsoft JhengHei" pitchFamily="34" charset="-122"/>
-                <a:cs typeface="Microsoft JhengHei" pitchFamily="34" charset="-120"/>
-              </a:rPr>
-              <a:t>事前|</a:t>
-            </a:r>
-            <a:pPr indent="0" marL="0">
-              <a:buNone/>
-            </a:pPr>
-            <a:r>
-              <a:rPr lang="en-US" sz="1600" b="1" dirty="0">
+          <p:cNvPr id="8" name="Text 5"/>
+          <p:cNvSpPr/>
+          <p:nvPr/>
+        </p:nvSpPr>
+        <p:spPr>
+          <a:xfrm>
+            <a:off x="2057400" y="1874520"/>
+            <a:ext cx="3291840" cy="1005840"/>
+          </a:xfrm>
+          <a:prstGeom prst="rect">
+            <a:avLst/>
+          </a:prstGeom>
+          <a:noFill/>
+          <a:ln/>
+        </p:spPr>
+        <p:txBody>
+          <a:bodyPr wrap="square" lIns="0" tIns="0" rIns="0" bIns="0" rtlCol="0" anchor="ctr"/>
+          <a:lstStyle/>
+          <a:p>
+            <a:pPr indent="0" marL="0">
+              <a:buNone/>
+            </a:pPr>
+            <a:r>
+              <a:rPr lang="en-US" sz="1700" b="1" dirty="0">
                 <a:solidFill>
                   <a:srgbClr val="FFFFFF"/>
                 </a:solidFill>
@@ -4273,22 +3947,22 @@
                 <a:ea typeface="Microsoft JhengHei" pitchFamily="34" charset="-122"/>
                 <a:cs typeface="Microsoft JhengHei" pitchFamily="34" charset="-120"/>
               </a:rPr>
-              <a:t>標準先簽核</a:t>
-            </a:r>
-            <a:endParaRPr lang="en-US" sz="1600" dirty="0"/>
-          </a:p>
-        </p:txBody>
-      </p:sp>
-      <p:sp>
-        <p:nvSpPr>
-          <p:cNvPr id="8" name="Text 5"/>
-          <p:cNvSpPr/>
-          <p:nvPr/>
-        </p:nvSpPr>
-        <p:spPr>
-          <a:xfrm>
-            <a:off x="1783080" y="2002536"/>
-            <a:ext cx="3977640" cy="1188720"/>
+              <a:t>要說故事的 2C 品牌</a:t>
+            </a:r>
+            <a:endParaRPr lang="en-US" sz="1700" dirty="0"/>
+          </a:p>
+        </p:txBody>
+      </p:sp>
+      <p:sp>
+        <p:nvSpPr>
+          <p:cNvPr id="9" name="Text 6"/>
+          <p:cNvSpPr/>
+          <p:nvPr/>
+        </p:nvSpPr>
+        <p:spPr>
+          <a:xfrm>
+            <a:off x="5486400" y="1856232"/>
+            <a:ext cx="5577840" cy="1051560"/>
           </a:xfrm>
           <a:prstGeom prst="rect">
             <a:avLst/>
@@ -4302,7 +3976,7 @@
           <a:p>
             <a:pPr indent="0" marL="0">
               <a:lnSpc>
-                <a:spcPct val="125000"/>
+                <a:spcPct val="122000"/>
               </a:lnSpc>
               <a:buNone/>
             </a:pPr>
@@ -4315,7 +3989,7 @@
                 <a:ea typeface="Microsoft JhengHei" pitchFamily="34" charset="-122"/>
                 <a:cs typeface="Microsoft JhengHei" pitchFamily="34" charset="-120"/>
               </a:rPr>
-              <a:t>人設、內容方向、視覺規範,建置期由您簽核定案——好內容先有白紙黑字的定義。</a:t>
+              <a:t>消費者買的是故事與信任，但養不起內容團隊。數位人替品牌每週說故事，素材同時餵養廣告。</a:t>
             </a:r>
             <a:endParaRPr lang="en-US" sz="1250" dirty="0"/>
           </a:p>
@@ -4323,18 +3997,18 @@
       </p:sp>
       <p:sp>
         <p:nvSpPr>
-          <p:cNvPr id="9" name="Shape 6"/>
-          <p:cNvSpPr/>
-          <p:nvPr/>
-        </p:nvSpPr>
-        <p:spPr>
-          <a:xfrm>
-            <a:off x="6245352" y="1325880"/>
-            <a:ext cx="5120640" cy="1938528"/>
+          <p:cNvPr id="10" name="Shape 7"/>
+          <p:cNvSpPr/>
+          <p:nvPr/>
+        </p:nvSpPr>
+        <p:spPr>
+          <a:xfrm>
+            <a:off x="822960" y="3209544"/>
+            <a:ext cx="10543032" cy="1371600"/>
           </a:xfrm>
           <a:prstGeom prst="roundRect">
             <a:avLst>
-              <a:gd name="adj" fmla="val 3774"/>
+              <a:gd name="adj" fmla="val 4667"/>
             </a:avLst>
           </a:prstGeom>
           <a:solidFill>
@@ -4345,14 +4019,14 @@
       </p:sp>
       <p:sp>
         <p:nvSpPr>
-          <p:cNvPr id="10" name="Shape 7"/>
-          <p:cNvSpPr/>
-          <p:nvPr/>
-        </p:nvSpPr>
-        <p:spPr>
-          <a:xfrm>
-            <a:off x="6519672" y="1618488"/>
-            <a:ext cx="512064" cy="512064"/>
+          <p:cNvPr id="11" name="Shape 8"/>
+          <p:cNvSpPr/>
+          <p:nvPr/>
+        </p:nvSpPr>
+        <p:spPr>
+          <a:xfrm>
+            <a:off x="1143000" y="3611880"/>
+            <a:ext cx="566928" cy="566928"/>
           </a:xfrm>
           <a:prstGeom prst="ellipse">
             <a:avLst/>
@@ -4365,7 +4039,7 @@
       </p:sp>
       <p:pic>
         <p:nvPicPr>
-          <p:cNvPr id="11" name="Image 1" descr="preencoded.png">    </p:cNvPr>
+          <p:cNvPr id="12" name="Image 1" descr="preencoded.png">    </p:cNvPr>
           <p:cNvPicPr>
             <a:picLocks noChangeAspect="1"/>
           </p:cNvPicPr>
@@ -4379,8 +4053,8 @@
         </p:blipFill>
         <p:spPr>
           <a:xfrm>
-            <a:off x="6632326" y="1731142"/>
-            <a:ext cx="286756" cy="286756"/>
+            <a:off x="1267724" y="3736604"/>
+            <a:ext cx="317480" cy="317480"/>
           </a:xfrm>
           <a:prstGeom prst="rect">
             <a:avLst/>
@@ -4389,44 +4063,30 @@
       </p:pic>
       <p:sp>
         <p:nvSpPr>
-          <p:cNvPr id="12" name="Text 8"/>
-          <p:cNvSpPr/>
-          <p:nvPr/>
-        </p:nvSpPr>
-        <p:spPr>
-          <a:xfrm>
-            <a:off x="7205472" y="1581912"/>
-            <a:ext cx="3931920" cy="384048"/>
-          </a:xfrm>
-          <a:prstGeom prst="rect">
-            <a:avLst/>
-          </a:prstGeom>
-          <a:noFill/>
-          <a:ln/>
-        </p:spPr>
-        <p:txBody>
-          <a:bodyPr wrap="square" lIns="0" tIns="0" rIns="0" bIns="0" rtlCol="0" anchor="ctr"/>
-          <a:lstStyle/>
-          <a:p>
-            <a:pPr indent="0" marL="0">
-              <a:buNone/>
-            </a:pPr>
-            <a:r>
-              <a:rPr lang="en-US" sz="1600" b="1" dirty="0">
-                <a:solidFill>
-                  <a:srgbClr val="35C2B0"/>
-                </a:solidFill>
-                <a:latin typeface="Microsoft JhengHei" pitchFamily="34" charset="0"/>
-                <a:ea typeface="Microsoft JhengHei" pitchFamily="34" charset="-122"/>
-                <a:cs typeface="Microsoft JhengHei" pitchFamily="34" charset="-120"/>
-              </a:rPr>
-              <a:t>事中|</a:t>
-            </a:r>
-            <a:pPr indent="0" marL="0">
-              <a:buNone/>
-            </a:pPr>
-            <a:r>
-              <a:rPr lang="en-US" sz="1600" b="1" dirty="0">
+          <p:cNvPr id="13" name="Text 9"/>
+          <p:cNvSpPr/>
+          <p:nvPr/>
+        </p:nvSpPr>
+        <p:spPr>
+          <a:xfrm>
+            <a:off x="2057400" y="3392424"/>
+            <a:ext cx="3291840" cy="1005840"/>
+          </a:xfrm>
+          <a:prstGeom prst="rect">
+            <a:avLst/>
+          </a:prstGeom>
+          <a:noFill/>
+          <a:ln/>
+        </p:spPr>
+        <p:txBody>
+          <a:bodyPr wrap="square" lIns="0" tIns="0" rIns="0" bIns="0" rtlCol="0" anchor="ctr"/>
+          <a:lstStyle/>
+          <a:p>
+            <a:pPr indent="0" marL="0">
+              <a:buNone/>
+            </a:pPr>
+            <a:r>
+              <a:rPr lang="en-US" sz="1700" b="1" dirty="0">
                 <a:solidFill>
                   <a:srgbClr val="FFFFFF"/>
                 </a:solidFill>
@@ -4434,22 +4094,22 @@
                 <a:ea typeface="Microsoft JhengHei" pitchFamily="34" charset="-122"/>
                 <a:cs typeface="Microsoft JhengHei" pitchFamily="34" charset="-120"/>
               </a:rPr>
-              <a:t>客觀驗收</a:t>
-            </a:r>
-            <a:endParaRPr lang="en-US" sz="1600" dirty="0"/>
-          </a:p>
-        </p:txBody>
-      </p:sp>
-      <p:sp>
-        <p:nvSpPr>
-          <p:cNvPr id="13" name="Text 9"/>
-          <p:cNvSpPr/>
-          <p:nvPr/>
-        </p:nvSpPr>
-        <p:spPr>
-          <a:xfrm>
-            <a:off x="7205472" y="2002536"/>
-            <a:ext cx="3977640" cy="1188720"/>
+              <a:t>不想露臉的個體戶</a:t>
+            </a:r>
+            <a:endParaRPr lang="en-US" sz="1700" dirty="0"/>
+          </a:p>
+        </p:txBody>
+      </p:sp>
+      <p:sp>
+        <p:nvSpPr>
+          <p:cNvPr id="14" name="Text 10"/>
+          <p:cNvSpPr/>
+          <p:nvPr/>
+        </p:nvSpPr>
+        <p:spPr>
+          <a:xfrm>
+            <a:off x="5486400" y="3374136"/>
+            <a:ext cx="5577840" cy="1051560"/>
           </a:xfrm>
           <a:prstGeom prst="rect">
             <a:avLst/>
@@ -4463,7 +4123,7 @@
           <a:p>
             <a:pPr indent="0" marL="0">
               <a:lnSpc>
-                <a:spcPct val="125000"/>
+                <a:spcPct val="122000"/>
               </a:lnSpc>
               <a:buNone/>
             </a:pPr>
@@ -4476,7 +4136,7 @@
                 <a:ea typeface="Microsoft JhengHei" pitchFamily="34" charset="-122"/>
                 <a:cs typeface="Microsoft JhengHei" pitchFamily="34" charset="-120"/>
               </a:rPr>
-              <a:t>每篇過驗收檢核表;未達標我們自費重做,不占您的修改次數。</a:t>
+              <a:t>房仲、車商、保險、專業服務者：想經營個人品牌帶客，卻不想露臉、沒時間拍片。</a:t>
             </a:r>
             <a:endParaRPr lang="en-US" sz="1250" dirty="0"/>
           </a:p>
@@ -4484,18 +4144,18 @@
       </p:sp>
       <p:sp>
         <p:nvSpPr>
-          <p:cNvPr id="14" name="Shape 10"/>
-          <p:cNvSpPr/>
-          <p:nvPr/>
-        </p:nvSpPr>
-        <p:spPr>
-          <a:xfrm>
-            <a:off x="822960" y="3447288"/>
-            <a:ext cx="5120640" cy="1938528"/>
+          <p:cNvPr id="15" name="Shape 11"/>
+          <p:cNvSpPr/>
+          <p:nvPr/>
+        </p:nvSpPr>
+        <p:spPr>
+          <a:xfrm>
+            <a:off x="822960" y="4727448"/>
+            <a:ext cx="10543032" cy="1371600"/>
           </a:xfrm>
           <a:prstGeom prst="roundRect">
             <a:avLst>
-              <a:gd name="adj" fmla="val 3774"/>
+              <a:gd name="adj" fmla="val 4667"/>
             </a:avLst>
           </a:prstGeom>
           <a:solidFill>
@@ -4506,14 +4166,14 @@
       </p:sp>
       <p:sp>
         <p:nvSpPr>
-          <p:cNvPr id="15" name="Shape 11"/>
-          <p:cNvSpPr/>
-          <p:nvPr/>
-        </p:nvSpPr>
-        <p:spPr>
-          <a:xfrm>
-            <a:off x="1097280" y="3739896"/>
-            <a:ext cx="512064" cy="512064"/>
+          <p:cNvPr id="16" name="Shape 12"/>
+          <p:cNvSpPr/>
+          <p:nvPr/>
+        </p:nvSpPr>
+        <p:spPr>
+          <a:xfrm>
+            <a:off x="1143000" y="5129784"/>
+            <a:ext cx="566928" cy="566928"/>
           </a:xfrm>
           <a:prstGeom prst="ellipse">
             <a:avLst/>
@@ -4526,7 +4186,7 @@
       </p:sp>
       <p:pic>
         <p:nvPicPr>
-          <p:cNvPr id="16" name="Image 2" descr="preencoded.png">    </p:cNvPr>
+          <p:cNvPr id="17" name="Image 2" descr="preencoded.png">    </p:cNvPr>
           <p:cNvPicPr>
             <a:picLocks noChangeAspect="1"/>
           </p:cNvPicPr>
@@ -4540,8 +4200,8 @@
         </p:blipFill>
         <p:spPr>
           <a:xfrm>
-            <a:off x="1209934" y="3852550"/>
-            <a:ext cx="286756" cy="286756"/>
+            <a:off x="1267724" y="5254508"/>
+            <a:ext cx="317480" cy="317480"/>
           </a:xfrm>
           <a:prstGeom prst="rect">
             <a:avLst/>
@@ -4550,44 +4210,30 @@
       </p:pic>
       <p:sp>
         <p:nvSpPr>
-          <p:cNvPr id="17" name="Text 12"/>
-          <p:cNvSpPr/>
-          <p:nvPr/>
-        </p:nvSpPr>
-        <p:spPr>
-          <a:xfrm>
-            <a:off x="1783080" y="3703320"/>
-            <a:ext cx="3931920" cy="384048"/>
-          </a:xfrm>
-          <a:prstGeom prst="rect">
-            <a:avLst/>
-          </a:prstGeom>
-          <a:noFill/>
-          <a:ln/>
-        </p:spPr>
-        <p:txBody>
-          <a:bodyPr wrap="square" lIns="0" tIns="0" rIns="0" bIns="0" rtlCol="0" anchor="ctr"/>
-          <a:lstStyle/>
-          <a:p>
-            <a:pPr indent="0" marL="0">
-              <a:buNone/>
-            </a:pPr>
-            <a:r>
-              <a:rPr lang="en-US" sz="1600" b="1" dirty="0">
-                <a:solidFill>
-                  <a:srgbClr val="35C2B0"/>
-                </a:solidFill>
-                <a:latin typeface="Microsoft JhengHei" pitchFamily="34" charset="0"/>
-                <a:ea typeface="Microsoft JhengHei" pitchFamily="34" charset="-122"/>
-                <a:cs typeface="Microsoft JhengHei" pitchFamily="34" charset="-120"/>
-              </a:rPr>
-              <a:t>事後|</a:t>
-            </a:r>
-            <a:pPr indent="0" marL="0">
-              <a:buNone/>
-            </a:pPr>
-            <a:r>
-              <a:rPr lang="en-US" sz="1600" b="1" dirty="0">
+          <p:cNvPr id="18" name="Text 13"/>
+          <p:cNvSpPr/>
+          <p:nvPr/>
+        </p:nvSpPr>
+        <p:spPr>
+          <a:xfrm>
+            <a:off x="2057400" y="4910328"/>
+            <a:ext cx="3291840" cy="1005840"/>
+          </a:xfrm>
+          <a:prstGeom prst="rect">
+            <a:avLst/>
+          </a:prstGeom>
+          <a:noFill/>
+          <a:ln/>
+        </p:spPr>
+        <p:txBody>
+          <a:bodyPr wrap="square" lIns="0" tIns="0" rIns="0" bIns="0" rtlCol="0" anchor="ctr"/>
+          <a:lstStyle/>
+          <a:p>
+            <a:pPr indent="0" marL="0">
+              <a:buNone/>
+            </a:pPr>
+            <a:r>
+              <a:rPr lang="en-US" sz="1700" b="1" dirty="0">
                 <a:solidFill>
                   <a:srgbClr val="FFFFFF"/>
                 </a:solidFill>
@@ -4595,22 +4241,22 @@
                 <a:ea typeface="Microsoft JhengHei" pitchFamily="34" charset="-122"/>
                 <a:cs typeface="Microsoft JhengHei" pitchFamily="34" charset="-120"/>
               </a:rPr>
-              <a:t>數據汰換</a:t>
-            </a:r>
-            <a:endParaRPr lang="en-US" sz="1600" dirty="0"/>
-          </a:p>
-        </p:txBody>
-      </p:sp>
-      <p:sp>
-        <p:nvSpPr>
-          <p:cNvPr id="18" name="Text 13"/>
-          <p:cNvSpPr/>
-          <p:nvPr/>
-        </p:nvSpPr>
-        <p:spPr>
-          <a:xfrm>
-            <a:off x="1783080" y="4123944"/>
-            <a:ext cx="3977640" cy="1188720"/>
+              <a:t>真人代言不便的產業</a:t>
+            </a:r>
+            <a:endParaRPr lang="en-US" sz="1700" dirty="0"/>
+          </a:p>
+        </p:txBody>
+      </p:sp>
+      <p:sp>
+        <p:nvSpPr>
+          <p:cNvPr id="19" name="Text 14"/>
+          <p:cNvSpPr/>
+          <p:nvPr/>
+        </p:nvSpPr>
+        <p:spPr>
+          <a:xfrm>
+            <a:off x="5486400" y="4892040"/>
+            <a:ext cx="5577840" cy="1051560"/>
           </a:xfrm>
           <a:prstGeom prst="rect">
             <a:avLst/>
@@ -4624,7 +4270,7 @@
           <a:p>
             <a:pPr indent="0" marL="0">
               <a:lnSpc>
-                <a:spcPct val="125000"/>
+                <a:spcPct val="122000"/>
               </a:lnSpc>
               <a:buNone/>
             </a:pPr>
@@ -4637,209 +4283,9 @@
                 <a:ea typeface="Microsoft JhengHei" pitchFamily="34" charset="-122"/>
                 <a:cs typeface="Microsoft JhengHei" pitchFamily="34" charset="-120"/>
               </a:rPr>
-              <a:t>每週報告表現前後 20% 的內容分析;連續落後的型式直接淘汰。</a:t>
+              <a:t>合規敏感、爭議品類：真人不願接、接了有翻車風險。我們有實際營運中的案例與合規框架。</a:t>
             </a:r>
             <a:endParaRPr lang="en-US" sz="1250" dirty="0"/>
-          </a:p>
-        </p:txBody>
-      </p:sp>
-      <p:sp>
-        <p:nvSpPr>
-          <p:cNvPr id="19" name="Shape 14"/>
-          <p:cNvSpPr/>
-          <p:nvPr/>
-        </p:nvSpPr>
-        <p:spPr>
-          <a:xfrm>
-            <a:off x="6245352" y="3447288"/>
-            <a:ext cx="5120640" cy="1938528"/>
-          </a:xfrm>
-          <a:prstGeom prst="roundRect">
-            <a:avLst>
-              <a:gd name="adj" fmla="val 3774"/>
-            </a:avLst>
-          </a:prstGeom>
-          <a:solidFill>
-            <a:srgbClr val="1A2440"/>
-          </a:solidFill>
-          <a:ln/>
-        </p:spPr>
-      </p:sp>
-      <p:sp>
-        <p:nvSpPr>
-          <p:cNvPr id="20" name="Shape 15"/>
-          <p:cNvSpPr/>
-          <p:nvPr/>
-        </p:nvSpPr>
-        <p:spPr>
-          <a:xfrm>
-            <a:off x="6519672" y="3739896"/>
-            <a:ext cx="512064" cy="512064"/>
-          </a:xfrm>
-          <a:prstGeom prst="ellipse">
-            <a:avLst/>
-          </a:prstGeom>
-          <a:solidFill>
-            <a:srgbClr val="1E6E64"/>
-          </a:solidFill>
-          <a:ln/>
-        </p:spPr>
-      </p:sp>
-      <p:pic>
-        <p:nvPicPr>
-          <p:cNvPr id="21" name="Image 3" descr="preencoded.png">    </p:cNvPr>
-          <p:cNvPicPr>
-            <a:picLocks noChangeAspect="1"/>
-          </p:cNvPicPr>
-          <p:nvPr/>
-        </p:nvPicPr>
-        <p:blipFill>
-          <a:blip r:embed="rId4"/>
-          <a:stretch>
-            <a:fillRect/>
-          </a:stretch>
-        </p:blipFill>
-        <p:spPr>
-          <a:xfrm>
-            <a:off x="6632326" y="3852550"/>
-            <a:ext cx="286756" cy="286756"/>
-          </a:xfrm>
-          <a:prstGeom prst="rect">
-            <a:avLst/>
-          </a:prstGeom>
-        </p:spPr>
-      </p:pic>
-      <p:sp>
-        <p:nvSpPr>
-          <p:cNvPr id="22" name="Text 16"/>
-          <p:cNvSpPr/>
-          <p:nvPr/>
-        </p:nvSpPr>
-        <p:spPr>
-          <a:xfrm>
-            <a:off x="7205472" y="3703320"/>
-            <a:ext cx="3931920" cy="384048"/>
-          </a:xfrm>
-          <a:prstGeom prst="rect">
-            <a:avLst/>
-          </a:prstGeom>
-          <a:noFill/>
-          <a:ln/>
-        </p:spPr>
-        <p:txBody>
-          <a:bodyPr wrap="square" lIns="0" tIns="0" rIns="0" bIns="0" rtlCol="0" anchor="ctr"/>
-          <a:lstStyle/>
-          <a:p>
-            <a:pPr indent="0" marL="0">
-              <a:buNone/>
-            </a:pPr>
-            <a:r>
-              <a:rPr lang="en-US" sz="1600" b="1" dirty="0">
-                <a:solidFill>
-                  <a:srgbClr val="35C2B0"/>
-                </a:solidFill>
-                <a:latin typeface="Microsoft JhengHei" pitchFamily="34" charset="0"/>
-                <a:ea typeface="Microsoft JhengHei" pitchFamily="34" charset="-122"/>
-                <a:cs typeface="Microsoft JhengHei" pitchFamily="34" charset="-120"/>
-              </a:rPr>
-              <a:t>合約|</a:t>
-            </a:r>
-            <a:pPr indent="0" marL="0">
-              <a:buNone/>
-            </a:pPr>
-            <a:r>
-              <a:rPr lang="en-US" sz="1600" b="1" dirty="0">
-                <a:solidFill>
-                  <a:srgbClr val="FFFFFF"/>
-                </a:solidFill>
-                <a:latin typeface="Microsoft JhengHei" pitchFamily="34" charset="0"/>
-                <a:ea typeface="Microsoft JhengHei" pitchFamily="34" charset="-122"/>
-                <a:cs typeface="Microsoft JhengHei" pitchFamily="34" charset="-120"/>
-              </a:rPr>
-              <a:t>每 30 天檢核點</a:t>
-            </a:r>
-            <a:endParaRPr lang="en-US" sz="1600" dirty="0"/>
-          </a:p>
-        </p:txBody>
-      </p:sp>
-      <p:sp>
-        <p:nvSpPr>
-          <p:cNvPr id="23" name="Text 17"/>
-          <p:cNvSpPr/>
-          <p:nvPr/>
-        </p:nvSpPr>
-        <p:spPr>
-          <a:xfrm>
-            <a:off x="7205472" y="4123944"/>
-            <a:ext cx="3977640" cy="1188720"/>
-          </a:xfrm>
-          <a:prstGeom prst="rect">
-            <a:avLst/>
-          </a:prstGeom>
-          <a:noFill/>
-          <a:ln/>
-        </p:spPr>
-        <p:txBody>
-          <a:bodyPr wrap="square" lIns="0" tIns="0" rIns="0" bIns="0" rtlCol="0" anchor="ctr"/>
-          <a:lstStyle/>
-          <a:p>
-            <a:pPr indent="0" marL="0">
-              <a:lnSpc>
-                <a:spcPct val="125000"/>
-              </a:lnSpc>
-              <a:buNone/>
-            </a:pPr>
-            <a:r>
-              <a:rPr lang="en-US" sz="1250" dirty="0">
-                <a:solidFill>
-                  <a:srgbClr val="C7D6EE"/>
-                </a:solidFill>
-                <a:latin typeface="Microsoft JhengHei" pitchFamily="34" charset="0"/>
-                <a:ea typeface="Microsoft JhengHei" pitchFamily="34" charset="-122"/>
-                <a:cs typeface="Microsoft JhengHei" pitchFamily="34" charset="-120"/>
-              </a:rPr>
-              <a:t>效果不如預期,您可於檢核點終止;未執行月份費用全額退還。</a:t>
-            </a:r>
-            <a:endParaRPr lang="en-US" sz="1250" dirty="0"/>
-          </a:p>
-        </p:txBody>
-      </p:sp>
-      <p:sp>
-        <p:nvSpPr>
-          <p:cNvPr id="24" name="Text 18"/>
-          <p:cNvSpPr/>
-          <p:nvPr/>
-        </p:nvSpPr>
-        <p:spPr>
-          <a:xfrm>
-            <a:off x="822960" y="5715000"/>
-            <a:ext cx="10543032" cy="457200"/>
-          </a:xfrm>
-          <a:prstGeom prst="rect">
-            <a:avLst/>
-          </a:prstGeom>
-          <a:noFill/>
-          <a:ln/>
-        </p:spPr>
-        <p:txBody>
-          <a:bodyPr wrap="square" lIns="0" tIns="0" rIns="0" bIns="0" rtlCol="0" anchor="ctr"/>
-          <a:lstStyle/>
-          <a:p>
-            <a:pPr algn="ctr" indent="0" marL="0">
-              <a:buNone/>
-            </a:pPr>
-            <a:r>
-              <a:rPr lang="en-US" sz="1500" b="1" i="1" dirty="0">
-                <a:solidFill>
-                  <a:srgbClr val="35C2B0"/>
-                </a:solidFill>
-                <a:latin typeface="Microsoft JhengHei" pitchFamily="34" charset="0"/>
-                <a:ea typeface="Microsoft JhengHei" pitchFamily="34" charset="-122"/>
-                <a:cs typeface="Microsoft JhengHei" pitchFamily="34" charset="-120"/>
-              </a:rPr>
-              <a:t>「我們不保證爆紅;保證量、準時率、驗收標準,和您每 30 天的退場權。」</a:t>
-            </a:r>
-            <a:endParaRPr lang="en-US" sz="1500" dirty="0"/>
           </a:p>
         </p:txBody>
       </p:sp>
@@ -4908,7 +4354,7 @@
                 <a:ea typeface="Microsoft JhengHei" pitchFamily="34" charset="-122"/>
                 <a:cs typeface="Microsoft JhengHei" pitchFamily="34" charset="-120"/>
               </a:rPr>
-              <a:t>PROCESS|低風險的合作方式</a:t>
+              <a:t>QUALITY｜品質不靠口頭承諾</a:t>
             </a:r>
             <a:endParaRPr lang="en-US" sz="1100" dirty="0"/>
           </a:p>
@@ -4947,7 +4393,7 @@
                 <a:ea typeface="Microsoft JhengHei" pitchFamily="34" charset="-122"/>
                 <a:cs typeface="Microsoft JhengHei" pitchFamily="34" charset="-120"/>
               </a:rPr>
-              <a:t>先試用,再決定——試用的錢是頭期款</a:t>
+              <a:t>四大品質保證</a:t>
             </a:r>
             <a:endParaRPr lang="en-US" sz="3000" dirty="0"/>
           </a:p>
@@ -4961,12 +4407,12 @@
         </p:nvSpPr>
         <p:spPr>
           <a:xfrm>
-            <a:off x="822960" y="1463040"/>
-            <a:ext cx="4343400" cy="3931920"/>
+            <a:off x="822960" y="1325880"/>
+            <a:ext cx="5120640" cy="1938528"/>
           </a:xfrm>
           <a:prstGeom prst="roundRect">
             <a:avLst>
-              <a:gd name="adj" fmla="val 2093"/>
+              <a:gd name="adj" fmla="val 3774"/>
             </a:avLst>
           </a:prstGeom>
           <a:solidFill>
@@ -4977,209 +4423,27 @@
       </p:sp>
       <p:sp>
         <p:nvSpPr>
-          <p:cNvPr id="5" name="Text 3"/>
-          <p:cNvSpPr/>
-          <p:nvPr/>
-        </p:nvSpPr>
-        <p:spPr>
-          <a:xfrm>
-            <a:off x="1143000" y="1737360"/>
-            <a:ext cx="3200400" cy="320040"/>
-          </a:xfrm>
-          <a:prstGeom prst="rect">
-            <a:avLst/>
-          </a:prstGeom>
-          <a:noFill/>
-          <a:ln/>
-        </p:spPr>
-        <p:txBody>
-          <a:bodyPr wrap="square" lIns="0" tIns="0" rIns="0" bIns="0" rtlCol="0" anchor="ctr"/>
-          <a:lstStyle/>
-          <a:p>
-            <a:pPr indent="0" marL="0">
-              <a:buNone/>
-            </a:pPr>
-            <a:r>
-              <a:rPr lang="en-US" sz="1200" b="1" spc="200" kern="0" dirty="0">
-                <a:solidFill>
-                  <a:srgbClr val="35C2B0"/>
-                </a:solidFill>
-                <a:latin typeface="Microsoft JhengHei" pitchFamily="34" charset="0"/>
-                <a:ea typeface="Microsoft JhengHei" pitchFamily="34" charset="-122"/>
-                <a:cs typeface="Microsoft JhengHei" pitchFamily="34" charset="-120"/>
-              </a:rPr>
-              <a:t>STEP 1・試用 3 週</a:t>
-            </a:r>
-            <a:endParaRPr lang="en-US" sz="1200" dirty="0"/>
-          </a:p>
-        </p:txBody>
-      </p:sp>
-      <p:sp>
-        <p:nvSpPr>
-          <p:cNvPr id="6" name="Text 4"/>
-          <p:cNvSpPr/>
-          <p:nvPr/>
-        </p:nvSpPr>
-        <p:spPr>
-          <a:xfrm>
-            <a:off x="1143000" y="2103120"/>
-            <a:ext cx="3749040" cy="502920"/>
-          </a:xfrm>
-          <a:prstGeom prst="rect">
-            <a:avLst/>
-          </a:prstGeom>
-          <a:noFill/>
-          <a:ln/>
-        </p:spPr>
-        <p:txBody>
-          <a:bodyPr wrap="square" lIns="0" tIns="0" rIns="0" bIns="0" rtlCol="0" anchor="ctr"/>
-          <a:lstStyle/>
-          <a:p>
-            <a:pPr indent="0" marL="0">
-              <a:buNone/>
-            </a:pPr>
-            <a:r>
-              <a:rPr lang="en-US" sz="2800" b="1" dirty="0">
-                <a:solidFill>
-                  <a:srgbClr val="E8B45F"/>
-                </a:solidFill>
-                <a:latin typeface="Microsoft JhengHei" pitchFamily="34" charset="0"/>
-                <a:ea typeface="Microsoft JhengHei" pitchFamily="34" charset="-122"/>
-                <a:cs typeface="Microsoft JhengHei" pitchFamily="34" charset="-120"/>
-              </a:rPr>
-              <a:t>NT$60,000</a:t>
-            </a:r>
-            <a:endParaRPr lang="en-US" sz="2800" dirty="0"/>
-          </a:p>
-        </p:txBody>
-      </p:sp>
-      <p:sp>
-        <p:nvSpPr>
-          <p:cNvPr id="7" name="Text 5"/>
-          <p:cNvSpPr/>
-          <p:nvPr/>
-        </p:nvSpPr>
-        <p:spPr>
-          <a:xfrm>
-            <a:off x="1143000" y="2834640"/>
-            <a:ext cx="3749040" cy="1554480"/>
-          </a:xfrm>
-          <a:prstGeom prst="rect">
-            <a:avLst/>
-          </a:prstGeom>
-          <a:noFill/>
-          <a:ln/>
-        </p:spPr>
-        <p:txBody>
-          <a:bodyPr wrap="square" lIns="0" tIns="0" rIns="0" bIns="0" rtlCol="0" anchor="ctr"/>
-          <a:lstStyle/>
-          <a:p>
-            <a:pPr marL="342900" indent="-342900">
-              <a:spcAft>
-                <a:spcPts val="800"/>
-              </a:spcAft>
-              <a:buSzPct val="100000"/>
-              <a:buChar char="•"/>
-            </a:pPr>
-            <a:r>
-              <a:rPr lang="en-US" sz="1350" dirty="0">
-                <a:solidFill>
-                  <a:srgbClr val="C7D6EE"/>
-                </a:solidFill>
-                <a:latin typeface="Microsoft JhengHei" pitchFamily="34" charset="0"/>
-                <a:ea typeface="Microsoft JhengHei" pitchFamily="34" charset="-122"/>
-                <a:cs typeface="Microsoft JhengHei" pitchFamily="34" charset="-120"/>
-              </a:rPr>
-              <a:t>專屬人設(外型/個性/聲音)</a:t>
-            </a:r>
-            <a:endParaRPr lang="en-US" sz="1350" dirty="0"/>
-          </a:p>
-          <a:p>
-            <a:pPr marL="342900" indent="-342900">
-              <a:spcAft>
-                <a:spcPts val="800"/>
-              </a:spcAft>
-              <a:buSzPct val="100000"/>
-              <a:buChar char="•"/>
-            </a:pPr>
-            <a:r>
-              <a:rPr lang="en-US" sz="1350" dirty="0">
-                <a:solidFill>
-                  <a:srgbClr val="C7D6EE"/>
-                </a:solidFill>
-                <a:latin typeface="Microsoft JhengHei" pitchFamily="34" charset="0"/>
-                <a:ea typeface="Microsoft JhengHei" pitchFamily="34" charset="-122"/>
-                <a:cs typeface="Microsoft JhengHei" pitchFamily="34" charset="-120"/>
-              </a:rPr>
-              <a:t>帳號以您的名義開通,我們引導</a:t>
-            </a:r>
-            <a:endParaRPr lang="en-US" sz="1350" dirty="0"/>
-          </a:p>
-          <a:p>
-            <a:pPr marL="342900" indent="-342900">
-              <a:spcAft>
-                <a:spcPts val="800"/>
-              </a:spcAft>
-              <a:buSzPct val="100000"/>
-              <a:buChar char="•"/>
-            </a:pPr>
-            <a:r>
-              <a:rPr lang="en-US" sz="1350" dirty="0">
-                <a:solidFill>
-                  <a:srgbClr val="C7D6EE"/>
-                </a:solidFill>
-                <a:latin typeface="Microsoft JhengHei" pitchFamily="34" charset="0"/>
-                <a:ea typeface="Microsoft JhengHei" pitchFamily="34" charset="-122"/>
-                <a:cs typeface="Microsoft JhengHei" pitchFamily="34" charset="-120"/>
-              </a:rPr>
-              <a:t>4-6 篇內容實際發布+數據報告</a:t>
-            </a:r>
-            <a:endParaRPr lang="en-US" sz="1350" dirty="0"/>
-          </a:p>
-        </p:txBody>
-      </p:sp>
-      <p:sp>
-        <p:nvSpPr>
-          <p:cNvPr id="8" name="Text 6"/>
-          <p:cNvSpPr/>
-          <p:nvPr/>
-        </p:nvSpPr>
-        <p:spPr>
-          <a:xfrm>
-            <a:off x="1143000" y="4709160"/>
-            <a:ext cx="3749040" cy="365760"/>
-          </a:xfrm>
-          <a:prstGeom prst="rect">
-            <a:avLst/>
-          </a:prstGeom>
-          <a:noFill/>
-          <a:ln/>
-        </p:spPr>
-        <p:txBody>
-          <a:bodyPr wrap="square" lIns="0" tIns="0" rIns="0" bIns="0" rtlCol="0" anchor="ctr"/>
-          <a:lstStyle/>
-          <a:p>
-            <a:pPr indent="0" marL="0">
-              <a:buNone/>
-            </a:pPr>
-            <a:r>
-              <a:rPr lang="en-US" sz="1300" b="1" dirty="0">
-                <a:solidFill>
-                  <a:srgbClr val="35C2B0"/>
-                </a:solidFill>
-                <a:latin typeface="Microsoft JhengHei" pitchFamily="34" charset="0"/>
-                <a:ea typeface="Microsoft JhengHei" pitchFamily="34" charset="-122"/>
-                <a:cs typeface="Microsoft JhengHei" pitchFamily="34" charset="-120"/>
-              </a:rPr>
-              <a:t>無論如何,這些都是您的。</a:t>
-            </a:r>
-            <a:endParaRPr lang="en-US" sz="1300" dirty="0"/>
-          </a:p>
-        </p:txBody>
+          <p:cNvPr id="5" name="Shape 3"/>
+          <p:cNvSpPr/>
+          <p:nvPr/>
+        </p:nvSpPr>
+        <p:spPr>
+          <a:xfrm>
+            <a:off x="1097280" y="1618488"/>
+            <a:ext cx="512064" cy="512064"/>
+          </a:xfrm>
+          <a:prstGeom prst="ellipse">
+            <a:avLst/>
+          </a:prstGeom>
+          <a:solidFill>
+            <a:srgbClr val="1E6E64"/>
+          </a:solidFill>
+          <a:ln/>
+        </p:spPr>
       </p:sp>
       <p:pic>
         <p:nvPicPr>
-          <p:cNvPr id="9" name="Image 0" descr="preencoded.png">    </p:cNvPr>
+          <p:cNvPr id="6" name="Image 0" descr="preencoded.png">    </p:cNvPr>
           <p:cNvPicPr>
             <a:picLocks noChangeAspect="1"/>
           </p:cNvPicPr>
@@ -5193,8 +4457,8 @@
         </p:blipFill>
         <p:spPr>
           <a:xfrm>
-            <a:off x="5532120" y="3017520"/>
-            <a:ext cx="502920" cy="502920"/>
+            <a:off x="1209934" y="1731142"/>
+            <a:ext cx="286756" cy="286756"/>
           </a:xfrm>
           <a:prstGeom prst="rect">
             <a:avLst/>
@@ -5203,96 +4467,191 @@
       </p:pic>
       <p:sp>
         <p:nvSpPr>
-          <p:cNvPr id="10" name="Text 7"/>
-          <p:cNvSpPr/>
-          <p:nvPr/>
-        </p:nvSpPr>
-        <p:spPr>
-          <a:xfrm>
-            <a:off x="5230368" y="3611880"/>
-            <a:ext cx="1737360" cy="365760"/>
-          </a:xfrm>
-          <a:prstGeom prst="rect">
-            <a:avLst/>
-          </a:prstGeom>
-          <a:noFill/>
-          <a:ln/>
-        </p:spPr>
-        <p:txBody>
-          <a:bodyPr wrap="square" lIns="0" tIns="0" rIns="0" bIns="0" rtlCol="0" anchor="ctr"/>
-          <a:lstStyle/>
-          <a:p>
-            <a:pPr algn="ctr" indent="0" marL="0">
-              <a:buNone/>
-            </a:pPr>
-            <a:r>
-              <a:rPr lang="en-US" sz="1150" dirty="0">
-                <a:solidFill>
-                  <a:srgbClr val="8FA0BE"/>
-                </a:solidFill>
-                <a:latin typeface="Microsoft JhengHei" pitchFamily="34" charset="0"/>
-                <a:ea typeface="Microsoft JhengHei" pitchFamily="34" charset="-122"/>
-                <a:cs typeface="Microsoft JhengHei" pitchFamily="34" charset="-120"/>
-              </a:rPr>
-              <a:t>滿意再繼續</a:t>
-            </a:r>
-            <a:endParaRPr lang="en-US" sz="1150" dirty="0"/>
-          </a:p>
-        </p:txBody>
-      </p:sp>
-      <p:sp>
-        <p:nvSpPr>
-          <p:cNvPr id="11" name="Shape 8"/>
-          <p:cNvSpPr/>
-          <p:nvPr/>
-        </p:nvSpPr>
-        <p:spPr>
-          <a:xfrm>
-            <a:off x="7022592" y="1463040"/>
-            <a:ext cx="4343400" cy="3931920"/>
+          <p:cNvPr id="7" name="Text 4"/>
+          <p:cNvSpPr/>
+          <p:nvPr/>
+        </p:nvSpPr>
+        <p:spPr>
+          <a:xfrm>
+            <a:off x="1783080" y="1581912"/>
+            <a:ext cx="3931920" cy="384048"/>
+          </a:xfrm>
+          <a:prstGeom prst="rect">
+            <a:avLst/>
+          </a:prstGeom>
+          <a:noFill/>
+          <a:ln/>
+        </p:spPr>
+        <p:txBody>
+          <a:bodyPr wrap="square" lIns="0" tIns="0" rIns="0" bIns="0" rtlCol="0" anchor="ctr"/>
+          <a:lstStyle/>
+          <a:p>
+            <a:pPr indent="0" marL="0">
+              <a:buNone/>
+            </a:pPr>
+            <a:r>
+              <a:rPr lang="en-US" sz="1600" b="1" dirty="0">
+                <a:solidFill>
+                  <a:srgbClr val="35C2B0"/>
+                </a:solidFill>
+                <a:latin typeface="Microsoft JhengHei" pitchFamily="34" charset="0"/>
+                <a:ea typeface="Microsoft JhengHei" pitchFamily="34" charset="-122"/>
+                <a:cs typeface="Microsoft JhengHei" pitchFamily="34" charset="-120"/>
+              </a:rPr>
+              <a:t>保證一｜</a:t>
+            </a:r>
+            <a:pPr indent="0" marL="0">
+              <a:buNone/>
+            </a:pPr>
+            <a:r>
+              <a:rPr lang="en-US" sz="1600" b="1" dirty="0">
+                <a:solidFill>
+                  <a:srgbClr val="FFFFFF"/>
+                </a:solidFill>
+                <a:latin typeface="Microsoft JhengHei" pitchFamily="34" charset="0"/>
+                <a:ea typeface="Microsoft JhengHei" pitchFamily="34" charset="-122"/>
+                <a:cs typeface="Microsoft JhengHei" pitchFamily="34" charset="-120"/>
+              </a:rPr>
+              <a:t>獨一無二的人設</a:t>
+            </a:r>
+            <a:endParaRPr lang="en-US" sz="1600" dirty="0"/>
+          </a:p>
+        </p:txBody>
+      </p:sp>
+      <p:sp>
+        <p:nvSpPr>
+          <p:cNvPr id="8" name="Text 5"/>
+          <p:cNvSpPr/>
+          <p:nvPr/>
+        </p:nvSpPr>
+        <p:spPr>
+          <a:xfrm>
+            <a:off x="1783080" y="2002536"/>
+            <a:ext cx="3977640" cy="1188720"/>
+          </a:xfrm>
+          <a:prstGeom prst="rect">
+            <a:avLst/>
+          </a:prstGeom>
+          <a:noFill/>
+          <a:ln/>
+        </p:spPr>
+        <p:txBody>
+          <a:bodyPr wrap="square" lIns="0" tIns="0" rIns="0" bIns="0" rtlCol="0" anchor="ctr"/>
+          <a:lstStyle/>
+          <a:p>
+            <a:pPr indent="0" marL="0">
+              <a:lnSpc>
+                <a:spcPct val="125000"/>
+              </a:lnSpc>
+              <a:buNone/>
+            </a:pPr>
+            <a:r>
+              <a:rPr lang="en-US" sz="1250" dirty="0">
+                <a:solidFill>
+                  <a:srgbClr val="C7D6EE"/>
+                </a:solidFill>
+                <a:latin typeface="Microsoft JhengHei" pitchFamily="34" charset="0"/>
+                <a:ea typeface="Microsoft JhengHei" pitchFamily="34" charset="-122"/>
+                <a:cs typeface="Microsoft JhengHei" pitchFamily="34" charset="-120"/>
+              </a:rPr>
+              <a:t>專為您的品牌量身打造，不重複授權、不套模板——這個人設在市場上只屬於您。</a:t>
+            </a:r>
+            <a:endParaRPr lang="en-US" sz="1250" dirty="0"/>
+          </a:p>
+        </p:txBody>
+      </p:sp>
+      <p:sp>
+        <p:nvSpPr>
+          <p:cNvPr id="9" name="Shape 6"/>
+          <p:cNvSpPr/>
+          <p:nvPr/>
+        </p:nvSpPr>
+        <p:spPr>
+          <a:xfrm>
+            <a:off x="6245352" y="1325880"/>
+            <a:ext cx="5120640" cy="1938528"/>
           </a:xfrm>
           <a:prstGeom prst="roundRect">
             <a:avLst>
-              <a:gd name="adj" fmla="val 2093"/>
+              <a:gd name="adj" fmla="val 3774"/>
             </a:avLst>
           </a:prstGeom>
           <a:solidFill>
             <a:srgbClr val="1A2440"/>
           </a:solidFill>
-          <a:ln w="19050">
-            <a:solidFill>
-              <a:srgbClr val="35C2B0"/>
-            </a:solidFill>
-            <a:prstDash val="solid"/>
-          </a:ln>
-        </p:spPr>
-      </p:sp>
-      <p:sp>
-        <p:nvSpPr>
-          <p:cNvPr id="12" name="Text 9"/>
-          <p:cNvSpPr/>
-          <p:nvPr/>
-        </p:nvSpPr>
-        <p:spPr>
-          <a:xfrm>
-            <a:off x="7342632" y="1737360"/>
-            <a:ext cx="3474720" cy="320040"/>
-          </a:xfrm>
-          <a:prstGeom prst="rect">
-            <a:avLst/>
-          </a:prstGeom>
-          <a:noFill/>
-          <a:ln/>
-        </p:spPr>
-        <p:txBody>
-          <a:bodyPr wrap="square" lIns="0" tIns="0" rIns="0" bIns="0" rtlCol="0" anchor="ctr"/>
-          <a:lstStyle/>
-          <a:p>
-            <a:pPr indent="0" marL="0">
-              <a:buNone/>
-            </a:pPr>
-            <a:r>
-              <a:rPr lang="en-US" sz="1200" b="1" spc="200" kern="0" dirty="0">
+          <a:ln/>
+        </p:spPr>
+      </p:sp>
+      <p:sp>
+        <p:nvSpPr>
+          <p:cNvPr id="10" name="Shape 7"/>
+          <p:cNvSpPr/>
+          <p:nvPr/>
+        </p:nvSpPr>
+        <p:spPr>
+          <a:xfrm>
+            <a:off x="6519672" y="1618488"/>
+            <a:ext cx="512064" cy="512064"/>
+          </a:xfrm>
+          <a:prstGeom prst="ellipse">
+            <a:avLst/>
+          </a:prstGeom>
+          <a:solidFill>
+            <a:srgbClr val="1E6E64"/>
+          </a:solidFill>
+          <a:ln/>
+        </p:spPr>
+      </p:sp>
+      <p:pic>
+        <p:nvPicPr>
+          <p:cNvPr id="11" name="Image 1" descr="preencoded.png">    </p:cNvPr>
+          <p:cNvPicPr>
+            <a:picLocks noChangeAspect="1"/>
+          </p:cNvPicPr>
+          <p:nvPr/>
+        </p:nvPicPr>
+        <p:blipFill>
+          <a:blip r:embed="rId2"/>
+          <a:stretch>
+            <a:fillRect/>
+          </a:stretch>
+        </p:blipFill>
+        <p:spPr>
+          <a:xfrm>
+            <a:off x="6632326" y="1731142"/>
+            <a:ext cx="286756" cy="286756"/>
+          </a:xfrm>
+          <a:prstGeom prst="rect">
+            <a:avLst/>
+          </a:prstGeom>
+        </p:spPr>
+      </p:pic>
+      <p:sp>
+        <p:nvSpPr>
+          <p:cNvPr id="12" name="Text 8"/>
+          <p:cNvSpPr/>
+          <p:nvPr/>
+        </p:nvSpPr>
+        <p:spPr>
+          <a:xfrm>
+            <a:off x="7205472" y="1581912"/>
+            <a:ext cx="3931920" cy="384048"/>
+          </a:xfrm>
+          <a:prstGeom prst="rect">
+            <a:avLst/>
+          </a:prstGeom>
+          <a:noFill/>
+          <a:ln/>
+        </p:spPr>
+        <p:txBody>
+          <a:bodyPr wrap="square" lIns="0" tIns="0" rIns="0" bIns="0" rtlCol="0" anchor="ctr"/>
+          <a:lstStyle/>
+          <a:p>
+            <a:pPr indent="0" marL="0">
+              <a:buNone/>
+            </a:pPr>
+            <a:r>
+              <a:rPr lang="en-US" sz="1600" b="1" dirty="0">
                 <a:solidFill>
                   <a:srgbClr val="35C2B0"/>
                 </a:solidFill>
@@ -5300,84 +4659,55 @@
                 <a:ea typeface="Microsoft JhengHei" pitchFamily="34" charset="-122"/>
                 <a:cs typeface="Microsoft JhengHei" pitchFamily="34" charset="-120"/>
               </a:rPr>
-              <a:t>STEP 2・正式營運一季</a:t>
-            </a:r>
-            <a:endParaRPr lang="en-US" sz="1200" dirty="0"/>
-          </a:p>
-        </p:txBody>
-      </p:sp>
-      <p:sp>
-        <p:nvSpPr>
-          <p:cNvPr id="13" name="Text 10"/>
-          <p:cNvSpPr/>
-          <p:nvPr/>
-        </p:nvSpPr>
-        <p:spPr>
-          <a:xfrm>
-            <a:off x="7342632" y="2103120"/>
-            <a:ext cx="3749040" cy="502920"/>
-          </a:xfrm>
-          <a:prstGeom prst="rect">
-            <a:avLst/>
-          </a:prstGeom>
-          <a:noFill/>
-          <a:ln/>
-        </p:spPr>
-        <p:txBody>
-          <a:bodyPr wrap="square" lIns="0" tIns="0" rIns="0" bIns="0" rtlCol="0" anchor="ctr"/>
-          <a:lstStyle/>
-          <a:p>
-            <a:pPr indent="0" marL="0">
-              <a:buNone/>
-            </a:pPr>
-            <a:r>
-              <a:rPr lang="en-US" sz="2800" b="1" dirty="0">
-                <a:solidFill>
-                  <a:srgbClr val="E8B45F"/>
-                </a:solidFill>
-                <a:latin typeface="Microsoft JhengHei" pitchFamily="34" charset="0"/>
-                <a:ea typeface="Microsoft JhengHei" pitchFamily="34" charset="-122"/>
-                <a:cs typeface="Microsoft JhengHei" pitchFamily="34" charset="-120"/>
-              </a:rPr>
-              <a:t>補 NT$195,000</a:t>
-            </a:r>
-            <a:endParaRPr lang="en-US" sz="2800" dirty="0"/>
-          </a:p>
-        </p:txBody>
-      </p:sp>
-      <p:sp>
-        <p:nvSpPr>
-          <p:cNvPr id="14" name="Text 11"/>
-          <p:cNvSpPr/>
-          <p:nvPr/>
-        </p:nvSpPr>
-        <p:spPr>
-          <a:xfrm>
-            <a:off x="7342632" y="2834640"/>
-            <a:ext cx="3749040" cy="1737360"/>
-          </a:xfrm>
-          <a:prstGeom prst="rect">
-            <a:avLst/>
-          </a:prstGeom>
-          <a:noFill/>
-          <a:ln/>
-        </p:spPr>
-        <p:txBody>
-          <a:bodyPr wrap="square" lIns="0" tIns="0" rIns="0" bIns="0" rtlCol="0" anchor="ctr"/>
-          <a:lstStyle/>
-          <a:p>
-            <a:pPr marL="342900" indent="-342900">
+              <a:t>保證二｜</a:t>
+            </a:r>
+            <a:pPr indent="0" marL="0">
+              <a:buNone/>
+            </a:pPr>
+            <a:r>
+              <a:rPr lang="en-US" sz="1600" b="1" dirty="0">
+                <a:solidFill>
+                  <a:srgbClr val="FFFFFF"/>
+                </a:solidFill>
+                <a:latin typeface="Microsoft JhengHei" pitchFamily="34" charset="0"/>
+                <a:ea typeface="Microsoft JhengHei" pitchFamily="34" charset="-122"/>
+                <a:cs typeface="Microsoft JhengHei" pitchFamily="34" charset="-120"/>
+              </a:rPr>
+              <a:t>持續製造爆款素材</a:t>
+            </a:r>
+            <a:endParaRPr lang="en-US" sz="1600" dirty="0"/>
+          </a:p>
+        </p:txBody>
+      </p:sp>
+      <p:sp>
+        <p:nvSpPr>
+          <p:cNvPr id="13" name="Text 9"/>
+          <p:cNvSpPr/>
+          <p:nvPr/>
+        </p:nvSpPr>
+        <p:spPr>
+          <a:xfrm>
+            <a:off x="7205472" y="2002536"/>
+            <a:ext cx="3977640" cy="1188720"/>
+          </a:xfrm>
+          <a:prstGeom prst="rect">
+            <a:avLst/>
+          </a:prstGeom>
+          <a:noFill/>
+          <a:ln/>
+        </p:spPr>
+        <p:txBody>
+          <a:bodyPr wrap="square" lIns="0" tIns="0" rIns="0" bIns="0" rtlCol="0" anchor="ctr"/>
+          <a:lstStyle/>
+          <a:p>
+            <a:pPr indent="0" marL="0">
               <a:lnSpc>
-                <a:spcPct val="112000"/>
+                <a:spcPct val="125000"/>
               </a:lnSpc>
-              <a:spcAft>
-                <a:spcPts val="800"/>
-              </a:spcAft>
-              <a:buSzPct val="100000"/>
-              <a:buChar char="•"/>
-            </a:pPr>
-            <a:r>
-              <a:rPr lang="en-US" sz="1350" dirty="0">
+              <a:buNone/>
+            </a:pPr>
+            <a:r>
+              <a:rPr lang="en-US" sz="1250" dirty="0">
                 <a:solidFill>
                   <a:srgbClr val="C7D6EE"/>
                 </a:solidFill>
@@ -5385,23 +4715,160 @@
                 <a:ea typeface="Microsoft JhengHei" pitchFamily="34" charset="-122"/>
                 <a:cs typeface="Microsoft JhengHei" pitchFamily="34" charset="-120"/>
               </a:rPr>
-              <a:t>試用費即頭期款——總價 25.5 萬,與直接簽一季相同</a:t>
-            </a:r>
-            <a:endParaRPr lang="en-US" sz="1350" dirty="0"/>
-          </a:p>
-          <a:p>
-            <a:pPr marL="342900" indent="-342900">
+              <a:t>用實時爆款方法論持續產出；未達驗收標準我們自費重做，不占您的修改次數。</a:t>
+            </a:r>
+            <a:endParaRPr lang="en-US" sz="1250" dirty="0"/>
+          </a:p>
+        </p:txBody>
+      </p:sp>
+      <p:sp>
+        <p:nvSpPr>
+          <p:cNvPr id="14" name="Shape 10"/>
+          <p:cNvSpPr/>
+          <p:nvPr/>
+        </p:nvSpPr>
+        <p:spPr>
+          <a:xfrm>
+            <a:off x="822960" y="3447288"/>
+            <a:ext cx="5120640" cy="1938528"/>
+          </a:xfrm>
+          <a:prstGeom prst="roundRect">
+            <a:avLst>
+              <a:gd name="adj" fmla="val 3774"/>
+            </a:avLst>
+          </a:prstGeom>
+          <a:solidFill>
+            <a:srgbClr val="1A2440"/>
+          </a:solidFill>
+          <a:ln/>
+        </p:spPr>
+      </p:sp>
+      <p:sp>
+        <p:nvSpPr>
+          <p:cNvPr id="15" name="Shape 11"/>
+          <p:cNvSpPr/>
+          <p:nvPr/>
+        </p:nvSpPr>
+        <p:spPr>
+          <a:xfrm>
+            <a:off x="1097280" y="3739896"/>
+            <a:ext cx="512064" cy="512064"/>
+          </a:xfrm>
+          <a:prstGeom prst="ellipse">
+            <a:avLst/>
+          </a:prstGeom>
+          <a:solidFill>
+            <a:srgbClr val="1E6E64"/>
+          </a:solidFill>
+          <a:ln/>
+        </p:spPr>
+      </p:sp>
+      <p:pic>
+        <p:nvPicPr>
+          <p:cNvPr id="16" name="Image 2" descr="preencoded.png">    </p:cNvPr>
+          <p:cNvPicPr>
+            <a:picLocks noChangeAspect="1"/>
+          </p:cNvPicPr>
+          <p:nvPr/>
+        </p:nvPicPr>
+        <p:blipFill>
+          <a:blip r:embed="rId3"/>
+          <a:stretch>
+            <a:fillRect/>
+          </a:stretch>
+        </p:blipFill>
+        <p:spPr>
+          <a:xfrm>
+            <a:off x="1209934" y="3852550"/>
+            <a:ext cx="286756" cy="286756"/>
+          </a:xfrm>
+          <a:prstGeom prst="rect">
+            <a:avLst/>
+          </a:prstGeom>
+        </p:spPr>
+      </p:pic>
+      <p:sp>
+        <p:nvSpPr>
+          <p:cNvPr id="17" name="Text 12"/>
+          <p:cNvSpPr/>
+          <p:nvPr/>
+        </p:nvSpPr>
+        <p:spPr>
+          <a:xfrm>
+            <a:off x="1783080" y="3703320"/>
+            <a:ext cx="3931920" cy="384048"/>
+          </a:xfrm>
+          <a:prstGeom prst="rect">
+            <a:avLst/>
+          </a:prstGeom>
+          <a:noFill/>
+          <a:ln/>
+        </p:spPr>
+        <p:txBody>
+          <a:bodyPr wrap="square" lIns="0" tIns="0" rIns="0" bIns="0" rtlCol="0" anchor="ctr"/>
+          <a:lstStyle/>
+          <a:p>
+            <a:pPr indent="0" marL="0">
+              <a:buNone/>
+            </a:pPr>
+            <a:r>
+              <a:rPr lang="en-US" sz="1600" b="1" dirty="0">
+                <a:solidFill>
+                  <a:srgbClr val="35C2B0"/>
+                </a:solidFill>
+                <a:latin typeface="Microsoft JhengHei" pitchFamily="34" charset="0"/>
+                <a:ea typeface="Microsoft JhengHei" pitchFamily="34" charset="-122"/>
+                <a:cs typeface="Microsoft JhengHei" pitchFamily="34" charset="-120"/>
+              </a:rPr>
+              <a:t>保證三｜</a:t>
+            </a:r>
+            <a:pPr indent="0" marL="0">
+              <a:buNone/>
+            </a:pPr>
+            <a:r>
+              <a:rPr lang="en-US" sz="1600" b="1" dirty="0">
+                <a:solidFill>
+                  <a:srgbClr val="FFFFFF"/>
+                </a:solidFill>
+                <a:latin typeface="Microsoft JhengHei" pitchFamily="34" charset="0"/>
+                <a:ea typeface="Microsoft JhengHei" pitchFamily="34" charset="-122"/>
+                <a:cs typeface="Microsoft JhengHei" pitchFamily="34" charset="-120"/>
+              </a:rPr>
+              <a:t>流量持續上升</a:t>
+            </a:r>
+            <a:endParaRPr lang="en-US" sz="1600" dirty="0"/>
+          </a:p>
+        </p:txBody>
+      </p:sp>
+      <p:sp>
+        <p:nvSpPr>
+          <p:cNvPr id="18" name="Text 13"/>
+          <p:cNvSpPr/>
+          <p:nvPr/>
+        </p:nvSpPr>
+        <p:spPr>
+          <a:xfrm>
+            <a:off x="1783080" y="4123944"/>
+            <a:ext cx="3977640" cy="1188720"/>
+          </a:xfrm>
+          <a:prstGeom prst="rect">
+            <a:avLst/>
+          </a:prstGeom>
+          <a:noFill/>
+          <a:ln/>
+        </p:spPr>
+        <p:txBody>
+          <a:bodyPr wrap="square" lIns="0" tIns="0" rIns="0" bIns="0" rtlCol="0" anchor="ctr"/>
+          <a:lstStyle/>
+          <a:p>
+            <a:pPr indent="0" marL="0">
               <a:lnSpc>
-                <a:spcPct val="112000"/>
+                <a:spcPct val="125000"/>
               </a:lnSpc>
-              <a:spcAft>
-                <a:spcPts val="800"/>
-              </a:spcAft>
-              <a:buSzPct val="100000"/>
-              <a:buChar char="•"/>
-            </a:pPr>
-            <a:r>
-              <a:rPr lang="en-US" sz="1350" dirty="0">
+              <a:buNone/>
+            </a:pPr>
+            <a:r>
+              <a:rPr lang="en-US" sz="1250" dirty="0">
                 <a:solidFill>
                   <a:srgbClr val="C7D6EE"/>
                 </a:solidFill>
@@ -5409,23 +4876,160 @@
                 <a:ea typeface="Microsoft JhengHei" pitchFamily="34" charset="-122"/>
                 <a:cs typeface="Microsoft JhengHei" pitchFamily="34" charset="-120"/>
               </a:rPr>
-              <a:t>每週產出+自動發布+週報月報</a:t>
-            </a:r>
-            <a:endParaRPr lang="en-US" sz="1350" dirty="0"/>
-          </a:p>
-          <a:p>
-            <a:pPr marL="342900" indent="-342900">
+              <a:t>經營期間帳號流量持續成長；每週數據報告攤開檢視，汰弱留強。</a:t>
+            </a:r>
+            <a:endParaRPr lang="en-US" sz="1250" dirty="0"/>
+          </a:p>
+        </p:txBody>
+      </p:sp>
+      <p:sp>
+        <p:nvSpPr>
+          <p:cNvPr id="19" name="Shape 14"/>
+          <p:cNvSpPr/>
+          <p:nvPr/>
+        </p:nvSpPr>
+        <p:spPr>
+          <a:xfrm>
+            <a:off x="6245352" y="3447288"/>
+            <a:ext cx="5120640" cy="1938528"/>
+          </a:xfrm>
+          <a:prstGeom prst="roundRect">
+            <a:avLst>
+              <a:gd name="adj" fmla="val 3774"/>
+            </a:avLst>
+          </a:prstGeom>
+          <a:solidFill>
+            <a:srgbClr val="1A2440"/>
+          </a:solidFill>
+          <a:ln/>
+        </p:spPr>
+      </p:sp>
+      <p:sp>
+        <p:nvSpPr>
+          <p:cNvPr id="20" name="Shape 15"/>
+          <p:cNvSpPr/>
+          <p:nvPr/>
+        </p:nvSpPr>
+        <p:spPr>
+          <a:xfrm>
+            <a:off x="6519672" y="3739896"/>
+            <a:ext cx="512064" cy="512064"/>
+          </a:xfrm>
+          <a:prstGeom prst="ellipse">
+            <a:avLst/>
+          </a:prstGeom>
+          <a:solidFill>
+            <a:srgbClr val="1E6E64"/>
+          </a:solidFill>
+          <a:ln/>
+        </p:spPr>
+      </p:sp>
+      <p:pic>
+        <p:nvPicPr>
+          <p:cNvPr id="21" name="Image 3" descr="preencoded.png">    </p:cNvPr>
+          <p:cNvPicPr>
+            <a:picLocks noChangeAspect="1"/>
+          </p:cNvPicPr>
+          <p:nvPr/>
+        </p:nvPicPr>
+        <p:blipFill>
+          <a:blip r:embed="rId4"/>
+          <a:stretch>
+            <a:fillRect/>
+          </a:stretch>
+        </p:blipFill>
+        <p:spPr>
+          <a:xfrm>
+            <a:off x="6632326" y="3852550"/>
+            <a:ext cx="286756" cy="286756"/>
+          </a:xfrm>
+          <a:prstGeom prst="rect">
+            <a:avLst/>
+          </a:prstGeom>
+        </p:spPr>
+      </p:pic>
+      <p:sp>
+        <p:nvSpPr>
+          <p:cNvPr id="22" name="Text 16"/>
+          <p:cNvSpPr/>
+          <p:nvPr/>
+        </p:nvSpPr>
+        <p:spPr>
+          <a:xfrm>
+            <a:off x="7205472" y="3703320"/>
+            <a:ext cx="3931920" cy="384048"/>
+          </a:xfrm>
+          <a:prstGeom prst="rect">
+            <a:avLst/>
+          </a:prstGeom>
+          <a:noFill/>
+          <a:ln/>
+        </p:spPr>
+        <p:txBody>
+          <a:bodyPr wrap="square" lIns="0" tIns="0" rIns="0" bIns="0" rtlCol="0" anchor="ctr"/>
+          <a:lstStyle/>
+          <a:p>
+            <a:pPr indent="0" marL="0">
+              <a:buNone/>
+            </a:pPr>
+            <a:r>
+              <a:rPr lang="en-US" sz="1600" b="1" dirty="0">
+                <a:solidFill>
+                  <a:srgbClr val="35C2B0"/>
+                </a:solidFill>
+                <a:latin typeface="Microsoft JhengHei" pitchFamily="34" charset="0"/>
+                <a:ea typeface="Microsoft JhengHei" pitchFamily="34" charset="-122"/>
+                <a:cs typeface="Microsoft JhengHei" pitchFamily="34" charset="-120"/>
+              </a:rPr>
+              <a:t>保證四｜</a:t>
+            </a:r>
+            <a:pPr indent="0" marL="0">
+              <a:buNone/>
+            </a:pPr>
+            <a:r>
+              <a:rPr lang="en-US" sz="1600" b="1" dirty="0">
+                <a:solidFill>
+                  <a:srgbClr val="FFFFFF"/>
+                </a:solidFill>
+                <a:latin typeface="Microsoft JhengHei" pitchFamily="34" charset="0"/>
+                <a:ea typeface="Microsoft JhengHei" pitchFamily="34" charset="-122"/>
+                <a:cs typeface="Microsoft JhengHei" pitchFamily="34" charset="-120"/>
+              </a:rPr>
+              <a:t>客戶完整話語權</a:t>
+            </a:r>
+            <a:endParaRPr lang="en-US" sz="1600" dirty="0"/>
+          </a:p>
+        </p:txBody>
+      </p:sp>
+      <p:sp>
+        <p:nvSpPr>
+          <p:cNvPr id="23" name="Text 17"/>
+          <p:cNvSpPr/>
+          <p:nvPr/>
+        </p:nvSpPr>
+        <p:spPr>
+          <a:xfrm>
+            <a:off x="7205472" y="4123944"/>
+            <a:ext cx="3977640" cy="1188720"/>
+          </a:xfrm>
+          <a:prstGeom prst="rect">
+            <a:avLst/>
+          </a:prstGeom>
+          <a:noFill/>
+          <a:ln/>
+        </p:spPr>
+        <p:txBody>
+          <a:bodyPr wrap="square" lIns="0" tIns="0" rIns="0" bIns="0" rtlCol="0" anchor="ctr"/>
+          <a:lstStyle/>
+          <a:p>
+            <a:pPr indent="0" marL="0">
               <a:lnSpc>
-                <a:spcPct val="112000"/>
+                <a:spcPct val="125000"/>
               </a:lnSpc>
-              <a:spcAft>
-                <a:spcPts val="800"/>
-              </a:spcAft>
-              <a:buSzPct val="100000"/>
-              <a:buChar char="•"/>
-            </a:pPr>
-            <a:r>
-              <a:rPr lang="en-US" sz="1350" dirty="0">
+              <a:buNone/>
+            </a:pPr>
+            <a:r>
+              <a:rPr lang="en-US" sz="1250" dirty="0">
                 <a:solidFill>
                   <a:srgbClr val="C7D6EE"/>
                 </a:solidFill>
@@ -5433,22 +5037,22 @@
                 <a:ea typeface="Microsoft JhengHei" pitchFamily="34" charset="-122"/>
                 <a:cs typeface="Microsoft JhengHei" pitchFamily="34" charset="-120"/>
               </a:rPr>
-              <a:t>每 30 天檢核點,不滿意退未執行月份</a:t>
-            </a:r>
-            <a:endParaRPr lang="en-US" sz="1350" dirty="0"/>
-          </a:p>
-        </p:txBody>
-      </p:sp>
-      <p:sp>
-        <p:nvSpPr>
-          <p:cNvPr id="15" name="Text 12"/>
-          <p:cNvSpPr/>
-          <p:nvPr/>
-        </p:nvSpPr>
-        <p:spPr>
-          <a:xfrm>
-            <a:off x="822960" y="5806440"/>
-            <a:ext cx="10543032" cy="411480"/>
+              <a:t>KOL 完全屬於您——想讓他說什麼，他就說什麼；經營方向由您主導，結果自然滿意。</a:t>
+            </a:r>
+            <a:endParaRPr lang="en-US" sz="1250" dirty="0"/>
+          </a:p>
+        </p:txBody>
+      </p:sp>
+      <p:sp>
+        <p:nvSpPr>
+          <p:cNvPr id="24" name="Text 18"/>
+          <p:cNvSpPr/>
+          <p:nvPr/>
+        </p:nvSpPr>
+        <p:spPr>
+          <a:xfrm>
+            <a:off x="822960" y="5715000"/>
+            <a:ext cx="10543032" cy="457200"/>
           </a:xfrm>
           <a:prstGeom prst="rect">
             <a:avLst/>
@@ -5464,7 +5068,7 @@
               <a:buNone/>
             </a:pPr>
             <a:r>
-              <a:rPr lang="en-US" sz="1400" b="1" dirty="0">
+              <a:rPr lang="en-US" sz="1500" b="1" i="1" dirty="0">
                 <a:solidFill>
                   <a:srgbClr val="35C2B0"/>
                 </a:solidFill>
@@ -5472,9 +5076,9 @@
                 <a:ea typeface="Microsoft JhengHei" pitchFamily="34" charset="-122"/>
                 <a:cs typeface="Microsoft JhengHei" pitchFamily="34" charset="-120"/>
               </a:rPr>
-              <a:t>一句話:試用的錢不會白花——之後簽約,它就是頭期款。</a:t>
-            </a:r>
-            <a:endParaRPr lang="en-US" sz="1400" dirty="0"/>
+              <a:t>「四大保證之外，還有一條寫進合約：每 30 天檢核點，不滿意退未執行月份。」</a:t>
+            </a:r>
+            <a:endParaRPr lang="en-US" sz="1500" dirty="0"/>
           </a:p>
         </p:txBody>
       </p:sp>
@@ -5543,7 +5147,7 @@
                 <a:ea typeface="Microsoft JhengHei" pitchFamily="34" charset="-122"/>
                 <a:cs typeface="Microsoft JhengHei" pitchFamily="34" charset="-120"/>
               </a:rPr>
-              <a:t>ONBOARDING|您的時間成本,很低</a:t>
+              <a:t>ONBOARDING｜您的時間成本，很低</a:t>
             </a:r>
             <a:endParaRPr lang="en-US" sz="1100" dirty="0"/>
           </a:p>
@@ -5582,7 +5186,7 @@
                 <a:ea typeface="Microsoft JhengHei" pitchFamily="34" charset="-122"/>
                 <a:cs typeface="Microsoft JhengHei" pitchFamily="34" charset="-120"/>
               </a:rPr>
-              <a:t>三週上線,您只需要 3 次確認</a:t>
+              <a:t>三週上線，您只需要 3 次確認</a:t>
             </a:r>
             <a:endParaRPr lang="en-US" sz="3000" dirty="0"/>
           </a:p>
@@ -5724,7 +5328,7 @@
                 <a:ea typeface="Microsoft JhengHei" pitchFamily="34" charset="-122"/>
                 <a:cs typeface="Microsoft JhengHei" pitchFamily="34" charset="-120"/>
               </a:rPr>
-              <a:t>我們交付人設設定與內容規劃,由您簽核定案。</a:t>
+              <a:t>我們交付人設設定與內容規劃，由您簽核定案。</a:t>
             </a:r>
             <a:endParaRPr lang="en-US" sz="1250" dirty="0"/>
           </a:p>
@@ -5766,7 +5370,7 @@
                 <a:ea typeface="Microsoft JhengHei" pitchFamily="34" charset="-122"/>
                 <a:cs typeface="Microsoft JhengHei" pitchFamily="34" charset="-120"/>
               </a:rPr>
-              <a:t>您要做的:</a:t>
+              <a:t>您要做的：</a:t>
             </a:r>
             <a:pPr indent="0" marL="0">
               <a:lnSpc>
@@ -5883,7 +5487,7 @@
                 <a:ea typeface="Microsoft JhengHei" pitchFamily="34" charset="-122"/>
                 <a:cs typeface="Microsoft JhengHei" pitchFamily="34" charset="-120"/>
               </a:rPr>
-              <a:t>定裝與系統串接</a:t>
+              <a:t>定裝與帳號串接</a:t>
             </a:r>
             <a:endParaRPr lang="en-US" sz="1800" dirty="0"/>
           </a:p>
@@ -5925,7 +5529,7 @@
                 <a:ea typeface="Microsoft JhengHei" pitchFamily="34" charset="-122"/>
                 <a:cs typeface="Microsoft JhengHei" pitchFamily="34" charset="-120"/>
               </a:rPr>
-              <a:t>視覺定裝、專屬聲音完成;帳號綁入自動化管理系統。</a:t>
+              <a:t>視覺定裝、專屬聲音完成；各平台帳號完成串接，準備發布。</a:t>
             </a:r>
             <a:endParaRPr lang="en-US" sz="1250" dirty="0"/>
           </a:p>
@@ -5967,7 +5571,7 @@
                 <a:ea typeface="Microsoft JhengHei" pitchFamily="34" charset="-122"/>
                 <a:cs typeface="Microsoft JhengHei" pitchFamily="34" charset="-120"/>
               </a:rPr>
-              <a:t>您要做的:</a:t>
+              <a:t>您要做的：</a:t>
             </a:r>
             <a:pPr indent="0" marL="0">
               <a:lnSpc>
@@ -6084,7 +5688,7 @@
                 <a:ea typeface="Microsoft JhengHei" pitchFamily="34" charset="-122"/>
                 <a:cs typeface="Microsoft JhengHei" pitchFamily="34" charset="-120"/>
               </a:rPr>
-              <a:t>樣品發布與數據</a:t>
+              <a:t>首波發布與數據</a:t>
             </a:r>
             <a:endParaRPr lang="en-US" sz="1800" dirty="0"/>
           </a:p>
@@ -6126,7 +5730,7 @@
                 <a:ea typeface="Microsoft JhengHei" pitchFamily="34" charset="-122"/>
                 <a:cs typeface="Microsoft JhengHei" pitchFamily="34" charset="-120"/>
               </a:rPr>
-              <a:t>4-6 篇內容實際發布,交付首波成效數據報告。</a:t>
+              <a:t>首批內容實際發布，交付首波成效數據報告。</a:t>
             </a:r>
             <a:endParaRPr lang="en-US" sz="1250" dirty="0"/>
           </a:p>
@@ -6168,7 +5772,7 @@
                 <a:ea typeface="Microsoft JhengHei" pitchFamily="34" charset="-122"/>
                 <a:cs typeface="Microsoft JhengHei" pitchFamily="34" charset="-120"/>
               </a:rPr>
-              <a:t>您要做的:</a:t>
+              <a:t>您要做的：</a:t>
             </a:r>
             <a:pPr indent="0" marL="0">
               <a:lnSpc>
@@ -6185,7 +5789,7 @@
                 <a:ea typeface="Microsoft JhengHei" pitchFamily="34" charset="-122"/>
                 <a:cs typeface="Microsoft JhengHei" pitchFamily="34" charset="-120"/>
               </a:rPr>
-              <a:t>驗收,決定是否續約</a:t>
+              <a:t>驗收首波成效；之後每 30 天檢核</a:t>
             </a:r>
             <a:endParaRPr lang="en-US" sz="1200" dirty="0"/>
           </a:p>
@@ -6246,7 +5850,7 @@
                 <a:ea typeface="Microsoft JhengHei" pitchFamily="34" charset="-122"/>
                 <a:cs typeface="Microsoft JhengHei" pitchFamily="34" charset="-120"/>
               </a:rPr>
-              <a:t>進入正式營運後,您每月只需要約 2 小時</a:t>
+              <a:t>進入正式營運後，您每月只需要約 2 小時</a:t>
             </a:r>
             <a:pPr algn="ctr" indent="0" marL="0">
               <a:buNone/>
@@ -6260,7 +5864,7 @@
                 <a:ea typeface="Microsoft JhengHei" pitchFamily="34" charset="-122"/>
                 <a:cs typeface="Microsoft JhengHei" pitchFamily="34" charset="-120"/>
               </a:rPr>
-              <a:t>:月初 1 次行事曆審核+素材確認。其餘,我們處理。</a:t>
+              <a:t>：月初 1 次行事曆審核+素材確認。其餘，我們處理。</a:t>
             </a:r>
             <a:endParaRPr lang="en-US" sz="1500" dirty="0"/>
           </a:p>
@@ -6331,7 +5935,7 @@
                 <a:ea typeface="Microsoft JhengHei" pitchFamily="34" charset="-122"/>
                 <a:cs typeface="Microsoft JhengHei" pitchFamily="34" charset="-120"/>
               </a:rPr>
-              <a:t>PLANS|正式營運方案</a:t>
+              <a:t>PLANS｜方案與報價</a:t>
             </a:r>
             <a:endParaRPr lang="en-US" sz="1100" dirty="0"/>
           </a:p>
@@ -6569,7 +6173,7 @@
                 <a:ea typeface="Microsoft JhengHei" pitchFamily="34" charset="-122"/>
                 <a:cs typeface="Microsoft JhengHei" pitchFamily="34" charset="-120"/>
               </a:rPr>
-              <a:t>雙人設,或加量產出</a:t>
+              <a:t>雙人設，或加量產出</a:t>
             </a:r>
             <a:endParaRPr lang="en-US" sz="1200" dirty="0"/>
           </a:p>
@@ -6821,7 +6425,7 @@
                 <a:ea typeface="Microsoft JhengHei" pitchFamily="34" charset="-122"/>
                 <a:cs typeface="Microsoft JhengHei" pitchFamily="34" charset="-120"/>
               </a:rPr>
-              <a:t>6 大平台,素材依平台格式再製</a:t>
+              <a:t>6 大平台，素材依平台格式再製</a:t>
             </a:r>
             <a:endParaRPr lang="en-US" sz="1200" dirty="0"/>
           </a:p>
@@ -6893,7 +6497,7 @@
                 <a:ea typeface="Microsoft JhengHei" pitchFamily="34" charset="-122"/>
                 <a:cs typeface="Microsoft JhengHei" pitchFamily="34" charset="-120"/>
               </a:rPr>
-              <a:t>週報+月報(含對標追蹤)</a:t>
+              <a:t>週報+月報（含對標追蹤）</a:t>
             </a:r>
             <a:endParaRPr lang="en-US" sz="1200" dirty="0"/>
           </a:p>
@@ -7179,7 +6783,7 @@
                 <a:ea typeface="Microsoft JhengHei" pitchFamily="34" charset="-122"/>
                 <a:cs typeface="Microsoft JhengHei" pitchFamily="34" charset="-120"/>
               </a:rPr>
-              <a:t>一季一約|每 30 天檢核點,退未執行月份|每素材內含 1 次修改|第 2 位數位人 85 折|年約 9 折+建置費半價折抵</a:t>
+              <a:t>一季一約，簽約一次收齊｜每 30 天檢核點，退未執行月份｜每素材內含 1 次修改｜第 2 位數位人 85 折｜半年約 95 折・年約 9 折</a:t>
             </a:r>
             <a:endParaRPr lang="en-US" sz="1150" dirty="0"/>
           </a:p>
@@ -7250,7 +6854,7 @@
                 <a:ea typeface="Microsoft JhengHei" pitchFamily="34" charset="-122"/>
                 <a:cs typeface="Microsoft JhengHei" pitchFamily="34" charset="-120"/>
               </a:rPr>
-              <a:t>Q&amp;A|您可能想問</a:t>
+              <a:t>Q&amp;A｜您可能想問</a:t>
             </a:r>
             <a:endParaRPr lang="en-US" sz="1100" dirty="0"/>
           </a:p>
@@ -7397,7 +7001,7 @@
                 <a:ea typeface="Microsoft JhengHei" pitchFamily="34" charset="-122"/>
                 <a:cs typeface="Microsoft JhengHei" pitchFamily="34" charset="-120"/>
               </a:rPr>
-              <a:t>帳號從零開始,沒有粉絲怎麼辦?</a:t>
+              <a:t>帳號從零開始，沒有粉絲怎麼辦？</a:t>
             </a:r>
             <a:endParaRPr lang="en-US" sz="1500" dirty="0"/>
           </a:p>
@@ -7439,7 +7043,7 @@
                 <a:ea typeface="Microsoft JhengHei" pitchFamily="34" charset="-122"/>
                 <a:cs typeface="Microsoft JhengHei" pitchFamily="34" charset="-120"/>
               </a:rPr>
-              <a:t>內容從第一天就能作為廣告素材投放,自然與付費流量互餵;也可加購廣告代操,同一組內容直接放大。</a:t>
+              <a:t>內容從第一天就能作為廣告素材投放，自然與付費流量互餵；也可加購廣告代操，同一組內容直接放大。</a:t>
             </a:r>
             <a:endParaRPr lang="en-US" sz="1250" dirty="0"/>
           </a:p>
@@ -7547,7 +7151,7 @@
                 <a:ea typeface="Microsoft JhengHei" pitchFamily="34" charset="-122"/>
                 <a:cs typeface="Microsoft JhengHei" pitchFamily="34" charset="-120"/>
               </a:rPr>
-              <a:t>AI 生成內容,平台允許嗎?</a:t>
+              <a:t>AI 生成內容，平台允許嗎？</a:t>
             </a:r>
             <a:endParaRPr lang="en-US" sz="1500" dirty="0"/>
           </a:p>
@@ -7589,7 +7193,7 @@
                 <a:ea typeface="Microsoft JhengHei" pitchFamily="34" charset="-122"/>
                 <a:cs typeface="Microsoft JhengHei" pitchFamily="34" charset="-120"/>
               </a:rPr>
-              <a:t>依各平台規範標示 AI 內容;建置期先書面定義產業紅線,合規框架已有實際運行經驗。</a:t>
+              <a:t>依各平台規範標示 AI 內容；上線前先以書面定義產業紅線，合規框架已有實際運行經驗。</a:t>
             </a:r>
             <a:endParaRPr lang="en-US" sz="1250" dirty="0"/>
           </a:p>
@@ -7697,7 +7301,7 @@
                 <a:ea typeface="Microsoft JhengHei" pitchFamily="34" charset="-122"/>
                 <a:cs typeface="Microsoft JhengHei" pitchFamily="34" charset="-120"/>
               </a:rPr>
-              <a:t>如果做了效果不好?</a:t>
+              <a:t>如果做了效果不好？</a:t>
             </a:r>
             <a:endParaRPr lang="en-US" sz="1500" dirty="0"/>
           </a:p>
@@ -7739,7 +7343,7 @@
                 <a:ea typeface="Microsoft JhengHei" pitchFamily="34" charset="-122"/>
                 <a:cs typeface="Microsoft JhengHei" pitchFamily="34" charset="-120"/>
               </a:rPr>
-              <a:t>每 30 天檢核點:不滿意可終止,未執行月份全額退款;之後還能用同一人設單購素材。</a:t>
+              <a:t>每 30 天檢核點：不滿意可終止，未執行月份全額退款；之後還能用同一人設單購素材。</a:t>
             </a:r>
             <a:endParaRPr lang="en-US" sz="1250" dirty="0"/>
           </a:p>
@@ -7814,7 +7418,7 @@
                 <a:ea typeface="Microsoft JhengHei" pitchFamily="34" charset="-122"/>
                 <a:cs typeface="Microsoft JhengHei" pitchFamily="34" charset="-120"/>
               </a:rPr>
-              <a:t>   兌心科技 INSIGHT TECH</a:t>
+              <a:t>   兌心科技 INSIGHT SOFTWARE</a:t>
             </a:r>
             <a:endParaRPr lang="en-US" sz="1700" dirty="0"/>
           </a:p>
@@ -7885,7 +7489,7 @@
                 <a:ea typeface="Microsoft JhengHei" pitchFamily="34" charset="-122"/>
                 <a:cs typeface="Microsoft JhengHei" pitchFamily="34" charset="-120"/>
               </a:rPr>
-              <a:t>VALUE|為什麼值得</a:t>
+              <a:t>VALUE｜你買到的是什麼</a:t>
             </a:r>
             <a:endParaRPr lang="en-US" sz="1100" dirty="0"/>
           </a:p>
@@ -7924,7 +7528,7 @@
                 <a:ea typeface="Microsoft JhengHei" pitchFamily="34" charset="-122"/>
                 <a:cs typeface="Microsoft JhengHei" pitchFamily="34" charset="-120"/>
               </a:rPr>
-              <a:t>一筆預算,三層價值</a:t>
+              <a:t>一個帳號，三層價值</a:t>
             </a:r>
             <a:endParaRPr lang="en-US" sz="3000" dirty="0"/>
           </a:p>
@@ -8029,7 +7633,7 @@
                 <a:ea typeface="Microsoft JhengHei" pitchFamily="34" charset="-122"/>
                 <a:cs typeface="Microsoft JhengHei" pitchFamily="34" charset="-120"/>
               </a:rPr>
-              <a:t>資產</a:t>
+              <a:t>永續資產</a:t>
             </a:r>
             <a:endParaRPr lang="en-US" sz="1200" dirty="0"/>
           </a:p>
@@ -8044,7 +7648,7 @@
         <p:spPr>
           <a:xfrm>
             <a:off x="886968" y="2852928"/>
-            <a:ext cx="2880360" cy="548640"/>
+            <a:ext cx="2880360" cy="868680"/>
           </a:xfrm>
           <a:prstGeom prst="rect">
             <a:avLst/>
@@ -8071,7 +7675,7 @@
                 <a:ea typeface="Microsoft JhengHei" pitchFamily="34" charset="-122"/>
                 <a:cs typeface="Microsoft JhengHei" pitchFamily="34" charset="-120"/>
               </a:rPr>
-              <a:t>角色 IP,歸屬品牌</a:t>
+              <a:t>買下來，就是品牌的資產</a:t>
             </a:r>
             <a:endParaRPr lang="en-US" sz="1800" dirty="0"/>
           </a:p>
@@ -8085,8 +7689,8 @@
         </p:nvSpPr>
         <p:spPr>
           <a:xfrm>
-            <a:off x="886968" y="3493008"/>
-            <a:ext cx="2880360" cy="2103120"/>
+            <a:off x="886968" y="3767328"/>
+            <a:ext cx="2880360" cy="1920240"/>
           </a:xfrm>
           <a:prstGeom prst="rect">
             <a:avLst/>
@@ -8113,7 +7717,7 @@
                 <a:ea typeface="Microsoft JhengHei" pitchFamily="34" charset="-122"/>
                 <a:cs typeface="Microsoft JhengHei" pitchFamily="34" charset="-120"/>
               </a:rPr>
-              <a:t>人設、外型、聲音、帳號,依合約歸屬品牌。素材可無限次再利用:廣告、官網、產品頁。</a:t>
+              <a:t>人設、外型、聲音、素材與帳號，依合約歸屬品牌；不隨合約結束歸零，持續留存、持續累積。</a:t>
             </a:r>
             <a:endParaRPr lang="en-US" sz="1300" dirty="0"/>
           </a:p>
@@ -8218,7 +7822,7 @@
                 <a:ea typeface="Microsoft JhengHei" pitchFamily="34" charset="-122"/>
                 <a:cs typeface="Microsoft JhengHei" pitchFamily="34" charset="-120"/>
               </a:rPr>
-              <a:t>產能</a:t>
+              <a:t>品牌引流</a:t>
             </a:r>
             <a:endParaRPr lang="en-US" sz="1200" dirty="0"/>
           </a:p>
@@ -8233,7 +7837,7 @@
         <p:spPr>
           <a:xfrm>
             <a:off x="4663440" y="2852928"/>
-            <a:ext cx="2880360" cy="548640"/>
+            <a:ext cx="2880360" cy="868680"/>
           </a:xfrm>
           <a:prstGeom prst="rect">
             <a:avLst/>
@@ -8260,7 +7864,7 @@
                 <a:ea typeface="Microsoft JhengHei" pitchFamily="34" charset="-122"/>
                 <a:cs typeface="Microsoft JhengHei" pitchFamily="34" charset="-120"/>
               </a:rPr>
-              <a:t>每篇內容約 NT$3,000</a:t>
+              <a:t>為引流而生的帳號</a:t>
             </a:r>
             <a:endParaRPr lang="en-US" sz="1800" dirty="0"/>
           </a:p>
@@ -8274,8 +7878,8 @@
         </p:nvSpPr>
         <p:spPr>
           <a:xfrm>
-            <a:off x="4663440" y="3493008"/>
-            <a:ext cx="2880360" cy="2103120"/>
+            <a:off x="4663440" y="3767328"/>
+            <a:ext cx="2880360" cy="1920240"/>
           </a:xfrm>
           <a:prstGeom prst="rect">
             <a:avLst/>
@@ -8302,7 +7906,7 @@
                 <a:ea typeface="Microsoft JhengHei" pitchFamily="34" charset="-122"/>
                 <a:cs typeface="Microsoft JhengHei" pitchFamily="34" charset="-120"/>
               </a:rPr>
-              <a:t>已含策略、製作、排程與報告。市面委外一支短影音 NT$3,500 起,完整製作 3 萬起。</a:t>
+              <a:t>這個 KOL 從誕生的第一天就為您的品牌服務——每一篇內容，都在把流量導回品牌的產品與服務。</a:t>
             </a:r>
             <a:endParaRPr lang="en-US" sz="1300" dirty="0"/>
           </a:p>
@@ -8407,7 +8011,7 @@
                 <a:ea typeface="Microsoft JhengHei" pitchFamily="34" charset="-122"/>
                 <a:cs typeface="Microsoft JhengHei" pitchFamily="34" charset="-120"/>
               </a:rPr>
-              <a:t>成效循環</a:t>
+              <a:t>完整主控權</a:t>
             </a:r>
             <a:endParaRPr lang="en-US" sz="1200" dirty="0"/>
           </a:p>
@@ -8422,7 +8026,7 @@
         <p:spPr>
           <a:xfrm>
             <a:off x="8439912" y="2852928"/>
-            <a:ext cx="2880360" cy="548640"/>
+            <a:ext cx="2880360" cy="868680"/>
           </a:xfrm>
           <a:prstGeom prst="rect">
             <a:avLst/>
@@ -8449,7 +8053,7 @@
                 <a:ea typeface="Microsoft JhengHei" pitchFamily="34" charset="-122"/>
                 <a:cs typeface="Microsoft JhengHei" pitchFamily="34" charset="-120"/>
               </a:rPr>
-              <a:t>每週數據,汰弱留強</a:t>
+              <a:t>說什麼、發什麼，品牌決定</a:t>
             </a:r>
             <a:endParaRPr lang="en-US" sz="1800" dirty="0"/>
           </a:p>
@@ -8463,8 +8067,8 @@
         </p:nvSpPr>
         <p:spPr>
           <a:xfrm>
-            <a:off x="8439912" y="3493008"/>
-            <a:ext cx="2880360" cy="2103120"/>
+            <a:off x="8439912" y="3767328"/>
+            <a:ext cx="2880360" cy="1920240"/>
           </a:xfrm>
           <a:prstGeom prst="rect">
             <a:avLst/>
@@ -8491,7 +8095,7 @@
                 <a:ea typeface="Microsoft JhengHei" pitchFamily="34" charset="-122"/>
                 <a:cs typeface="Microsoft JhengHei" pitchFamily="34" charset="-120"/>
               </a:rPr>
-              <a:t>用實際互動數據迭代選題與格式,表現落後的型式直接淘汰更新。</a:t>
+              <a:t>方向由品牌主導，不必配合真人檔期與意願；沒有人設翻車風險，也沒有解約糾紛。</a:t>
             </a:r>
             <a:endParaRPr lang="en-US" sz="1300" dirty="0"/>
           </a:p>
@@ -8562,7 +8166,7 @@
                 <a:ea typeface="Microsoft JhengHei" pitchFamily="34" charset="-122"/>
                 <a:cs typeface="Microsoft JhengHei" pitchFamily="34" charset="-120"/>
               </a:rPr>
-              <a:t>COMPARISON|同樣預算的三種去向</a:t>
+              <a:t>LEGACY｜企業品牌的永續規劃</a:t>
             </a:r>
             <a:endParaRPr lang="en-US" sz="1100" dirty="0"/>
           </a:p>
@@ -8601,7 +8205,7 @@
                 <a:ea typeface="Microsoft JhengHei" pitchFamily="34" charset="-122"/>
                 <a:cs typeface="Microsoft JhengHei" pitchFamily="34" charset="-120"/>
               </a:rPr>
-              <a:t>同樣的月預算,一年後剩下什麼?</a:t>
+              <a:t>買下 IP，就是永續規劃</a:t>
             </a:r>
             <a:endParaRPr lang="en-US" sz="3000" dirty="0"/>
           </a:p>
@@ -8616,33 +8220,33 @@
         <p:spPr>
           <a:xfrm>
             <a:off x="822960" y="1170432"/>
-            <a:ext cx="10058400" cy="320040"/>
-          </a:xfrm>
-          <a:prstGeom prst="rect">
-            <a:avLst/>
-          </a:prstGeom>
-          <a:noFill/>
-          <a:ln/>
-        </p:spPr>
-        <p:txBody>
-          <a:bodyPr wrap="square" lIns="0" tIns="0" rIns="0" bIns="0" rtlCol="0" anchor="ctr"/>
-          <a:lstStyle/>
-          <a:p>
-            <a:pPr indent="0" marL="0">
-              <a:buNone/>
-            </a:pPr>
-            <a:r>
-              <a:rPr lang="en-US" sz="1300" dirty="0">
-                <a:solidFill>
-                  <a:srgbClr val="8FA0BE"/>
-                </a:solidFill>
-                <a:latin typeface="Microsoft JhengHei" pitchFamily="34" charset="0"/>
-                <a:ea typeface="Microsoft JhengHei" pitchFamily="34" charset="-122"/>
-                <a:cs typeface="Microsoft JhengHei" pitchFamily="34" charset="-120"/>
-              </a:rPr>
-              <a:t>以每月 NT$65,000、連續投入 12 個月為例</a:t>
-            </a:r>
-            <a:endParaRPr lang="en-US" sz="1300" dirty="0"/>
+            <a:ext cx="10058400" cy="347472"/>
+          </a:xfrm>
+          <a:prstGeom prst="rect">
+            <a:avLst/>
+          </a:prstGeom>
+          <a:noFill/>
+          <a:ln/>
+        </p:spPr>
+        <p:txBody>
+          <a:bodyPr wrap="square" lIns="0" tIns="0" rIns="0" bIns="0" rtlCol="0" anchor="ctr"/>
+          <a:lstStyle/>
+          <a:p>
+            <a:pPr indent="0" marL="0">
+              <a:buNone/>
+            </a:pPr>
+            <a:r>
+              <a:rPr lang="en-US" sz="1350" dirty="0">
+                <a:solidFill>
+                  <a:srgbClr val="C7D6EE"/>
+                </a:solidFill>
+                <a:latin typeface="Microsoft JhengHei" pitchFamily="34" charset="0"/>
+                <a:ea typeface="Microsoft JhengHei" pitchFamily="34" charset="-122"/>
+                <a:cs typeface="Microsoft JhengHei" pitchFamily="34" charset="-120"/>
+              </a:rPr>
+              <a:t>KOL IP 一旦買下，就永久屬於品牌——經營可以暫停，資產不會消失。</a:t>
+            </a:r>
+            <a:endParaRPr lang="en-US" sz="1350" dirty="0"/>
           </a:p>
         </p:txBody>
       </p:sp>
@@ -8655,11 +8259,11 @@
         <p:spPr>
           <a:xfrm>
             <a:off x="822960" y="1691640"/>
-            <a:ext cx="10543032" cy="1298448"/>
+            <a:ext cx="10543032" cy="1371600"/>
           </a:xfrm>
           <a:prstGeom prst="roundRect">
             <a:avLst>
-              <a:gd name="adj" fmla="val 4930"/>
+              <a:gd name="adj" fmla="val 4667"/>
             </a:avLst>
           </a:prstGeom>
           <a:solidFill>
@@ -8670,14 +8274,58 @@
       </p:sp>
       <p:sp>
         <p:nvSpPr>
-          <p:cNvPr id="6" name="Text 4"/>
-          <p:cNvSpPr/>
-          <p:nvPr/>
-        </p:nvSpPr>
-        <p:spPr>
-          <a:xfrm>
-            <a:off x="1143000" y="1856232"/>
-            <a:ext cx="2468880" cy="969264"/>
+          <p:cNvPr id="6" name="Shape 4"/>
+          <p:cNvSpPr/>
+          <p:nvPr/>
+        </p:nvSpPr>
+        <p:spPr>
+          <a:xfrm>
+            <a:off x="1143000" y="2093976"/>
+            <a:ext cx="566928" cy="566928"/>
+          </a:xfrm>
+          <a:prstGeom prst="ellipse">
+            <a:avLst/>
+          </a:prstGeom>
+          <a:solidFill>
+            <a:srgbClr val="1E6E64"/>
+          </a:solidFill>
+          <a:ln/>
+        </p:spPr>
+      </p:sp>
+      <p:pic>
+        <p:nvPicPr>
+          <p:cNvPr id="7" name="Image 0" descr="preencoded.png">    </p:cNvPr>
+          <p:cNvPicPr>
+            <a:picLocks noChangeAspect="1"/>
+          </p:cNvPicPr>
+          <p:nvPr/>
+        </p:nvPicPr>
+        <p:blipFill>
+          <a:blip r:embed="rId1"/>
+          <a:stretch>
+            <a:fillRect/>
+          </a:stretch>
+        </p:blipFill>
+        <p:spPr>
+          <a:xfrm>
+            <a:off x="1267724" y="2218700"/>
+            <a:ext cx="317480" cy="317480"/>
+          </a:xfrm>
+          <a:prstGeom prst="rect">
+            <a:avLst/>
+          </a:prstGeom>
+        </p:spPr>
+      </p:pic>
+      <p:sp>
+        <p:nvSpPr>
+          <p:cNvPr id="8" name="Text 5"/>
+          <p:cNvSpPr/>
+          <p:nvPr/>
+        </p:nvSpPr>
+        <p:spPr>
+          <a:xfrm>
+            <a:off x="2057400" y="1874520"/>
+            <a:ext cx="3017520" cy="1005840"/>
           </a:xfrm>
           <a:prstGeom prst="rect">
             <a:avLst/>
@@ -8695,55 +8343,55 @@
             <a:r>
               <a:rPr lang="en-US" sz="1700" b="1" dirty="0">
                 <a:solidFill>
+                  <a:srgbClr val="FFFFFF"/>
+                </a:solidFill>
+                <a:latin typeface="Microsoft JhengHei" pitchFamily="34" charset="0"/>
+                <a:ea typeface="Microsoft JhengHei" pitchFamily="34" charset="-122"/>
+                <a:cs typeface="Microsoft JhengHei" pitchFamily="34" charset="-120"/>
+              </a:rPr>
+              <a:t>素材留得住</a:t>
+            </a:r>
+            <a:endParaRPr lang="en-US" sz="1700" dirty="0"/>
+          </a:p>
+        </p:txBody>
+      </p:sp>
+      <p:sp>
+        <p:nvSpPr>
+          <p:cNvPr id="9" name="Text 6"/>
+          <p:cNvSpPr/>
+          <p:nvPr/>
+        </p:nvSpPr>
+        <p:spPr>
+          <a:xfrm>
+            <a:off x="5212080" y="1856232"/>
+            <a:ext cx="5852160" cy="1051560"/>
+          </a:xfrm>
+          <a:prstGeom prst="rect">
+            <a:avLst/>
+          </a:prstGeom>
+          <a:noFill/>
+          <a:ln/>
+        </p:spPr>
+        <p:txBody>
+          <a:bodyPr wrap="square" lIns="0" tIns="0" rIns="0" bIns="0" rtlCol="0" anchor="ctr"/>
+          <a:lstStyle/>
+          <a:p>
+            <a:pPr indent="0" marL="0">
+              <a:lnSpc>
+                <a:spcPct val="122000"/>
+              </a:lnSpc>
+              <a:buNone/>
+            </a:pPr>
+            <a:r>
+              <a:rPr lang="en-US" sz="1250" dirty="0">
+                <a:solidFill>
                   <a:srgbClr val="C7D6EE"/>
                 </a:solidFill>
                 <a:latin typeface="Microsoft JhengHei" pitchFamily="34" charset="0"/>
                 <a:ea typeface="Microsoft JhengHei" pitchFamily="34" charset="-122"/>
                 <a:cs typeface="Microsoft JhengHei" pitchFamily="34" charset="-120"/>
               </a:rPr>
-              <a:t>真人 KOL 業配</a:t>
-            </a:r>
-            <a:endParaRPr lang="en-US" sz="1700" dirty="0"/>
-          </a:p>
-        </p:txBody>
-      </p:sp>
-      <p:sp>
-        <p:nvSpPr>
-          <p:cNvPr id="7" name="Text 5"/>
-          <p:cNvSpPr/>
-          <p:nvPr/>
-        </p:nvSpPr>
-        <p:spPr>
-          <a:xfrm>
-            <a:off x="3703320" y="1856232"/>
-            <a:ext cx="4480560" cy="969264"/>
-          </a:xfrm>
-          <a:prstGeom prst="rect">
-            <a:avLst/>
-          </a:prstGeom>
-          <a:noFill/>
-          <a:ln/>
-        </p:spPr>
-        <p:txBody>
-          <a:bodyPr wrap="square" lIns="0" tIns="0" rIns="0" bIns="0" rtlCol="0" anchor="ctr"/>
-          <a:lstStyle/>
-          <a:p>
-            <a:pPr indent="0" marL="0">
-              <a:lnSpc>
-                <a:spcPct val="125000"/>
-              </a:lnSpc>
-              <a:buNone/>
-            </a:pPr>
-            <a:r>
-              <a:rPr lang="en-US" sz="1250" dirty="0">
-                <a:solidFill>
-                  <a:srgbClr val="8FA0BE"/>
-                </a:solidFill>
-                <a:latin typeface="Microsoft JhengHei" pitchFamily="34" charset="0"/>
-                <a:ea typeface="Microsoft JhengHei" pitchFamily="34" charset="-122"/>
-                <a:cs typeface="Microsoft JhengHei" pitchFamily="34" charset="-120"/>
-              </a:rPr>
-              <a:t>藝人同時服務多個品牌;授權到期素材不能再用,粉絲留在對方帳號。</a:t>
+              <a:t>即使只經營 30 天，期間產出的素材與帳號都留在品牌名下；素材可直接拿去投廣告，權利完全屬於品牌。</a:t>
             </a:r>
             <a:endParaRPr lang="en-US" sz="1250" dirty="0"/>
           </a:p>
@@ -8751,57 +8399,18 @@
       </p:sp>
       <p:sp>
         <p:nvSpPr>
-          <p:cNvPr id="8" name="Text 6"/>
-          <p:cNvSpPr/>
-          <p:nvPr/>
-        </p:nvSpPr>
-        <p:spPr>
-          <a:xfrm>
-            <a:off x="8366760" y="1856232"/>
-            <a:ext cx="2743200" cy="969264"/>
-          </a:xfrm>
-          <a:prstGeom prst="rect">
-            <a:avLst/>
-          </a:prstGeom>
-          <a:noFill/>
-          <a:ln/>
-        </p:spPr>
-        <p:txBody>
-          <a:bodyPr wrap="square" lIns="0" tIns="0" rIns="0" bIns="0" rtlCol="0" anchor="ctr"/>
-          <a:lstStyle/>
-          <a:p>
-            <a:pPr indent="0" marL="0">
-              <a:buNone/>
-            </a:pPr>
-            <a:r>
-              <a:rPr lang="en-US" sz="1500" b="1" dirty="0">
-                <a:solidFill>
-                  <a:srgbClr val="8FA0BE"/>
-                </a:solidFill>
-                <a:latin typeface="Microsoft JhengHei" pitchFamily="34" charset="0"/>
-                <a:ea typeface="Microsoft JhengHei" pitchFamily="34" charset="-122"/>
-                <a:cs typeface="Microsoft JhengHei" pitchFamily="34" charset="-120"/>
-              </a:rPr>
-              <a:t>剩下:0 項資產</a:t>
-            </a:r>
-            <a:endParaRPr lang="en-US" sz="1500" dirty="0"/>
-          </a:p>
-        </p:txBody>
-      </p:sp>
-      <p:sp>
-        <p:nvSpPr>
-          <p:cNvPr id="9" name="Shape 7"/>
-          <p:cNvSpPr/>
-          <p:nvPr/>
-        </p:nvSpPr>
-        <p:spPr>
-          <a:xfrm>
-            <a:off x="822960" y="3172968"/>
-            <a:ext cx="10543032" cy="1298448"/>
+          <p:cNvPr id="10" name="Shape 7"/>
+          <p:cNvSpPr/>
+          <p:nvPr/>
+        </p:nvSpPr>
+        <p:spPr>
+          <a:xfrm>
+            <a:off x="822960" y="3209544"/>
+            <a:ext cx="10543032" cy="1371600"/>
           </a:xfrm>
           <a:prstGeom prst="roundRect">
             <a:avLst>
-              <a:gd name="adj" fmla="val 4930"/>
+              <a:gd name="adj" fmla="val 4667"/>
             </a:avLst>
           </a:prstGeom>
           <a:solidFill>
@@ -8812,139 +8421,17 @@
       </p:sp>
       <p:sp>
         <p:nvSpPr>
-          <p:cNvPr id="10" name="Text 8"/>
-          <p:cNvSpPr/>
-          <p:nvPr/>
-        </p:nvSpPr>
-        <p:spPr>
-          <a:xfrm>
-            <a:off x="1143000" y="3337560"/>
-            <a:ext cx="2468880" cy="969264"/>
-          </a:xfrm>
-          <a:prstGeom prst="rect">
-            <a:avLst/>
-          </a:prstGeom>
-          <a:noFill/>
-          <a:ln/>
-        </p:spPr>
-        <p:txBody>
-          <a:bodyPr wrap="square" lIns="0" tIns="0" rIns="0" bIns="0" rtlCol="0" anchor="ctr"/>
-          <a:lstStyle/>
-          <a:p>
-            <a:pPr indent="0" marL="0">
-              <a:buNone/>
-            </a:pPr>
-            <a:r>
-              <a:rPr lang="en-US" sz="1700" b="1" dirty="0">
-                <a:solidFill>
-                  <a:srgbClr val="C7D6EE"/>
-                </a:solidFill>
-                <a:latin typeface="Microsoft JhengHei" pitchFamily="34" charset="0"/>
-                <a:ea typeface="Microsoft JhengHei" pitchFamily="34" charset="-122"/>
-                <a:cs typeface="Microsoft JhengHei" pitchFamily="34" charset="-120"/>
-              </a:rPr>
-              <a:t>廣告投放</a:t>
-            </a:r>
-            <a:endParaRPr lang="en-US" sz="1700" dirty="0"/>
-          </a:p>
-        </p:txBody>
-      </p:sp>
-      <p:sp>
-        <p:nvSpPr>
-          <p:cNvPr id="11" name="Text 9"/>
-          <p:cNvSpPr/>
-          <p:nvPr/>
-        </p:nvSpPr>
-        <p:spPr>
-          <a:xfrm>
-            <a:off x="3703320" y="3337560"/>
-            <a:ext cx="4480560" cy="969264"/>
-          </a:xfrm>
-          <a:prstGeom prst="rect">
-            <a:avLst/>
-          </a:prstGeom>
-          <a:noFill/>
-          <a:ln/>
-        </p:spPr>
-        <p:txBody>
-          <a:bodyPr wrap="square" lIns="0" tIns="0" rIns="0" bIns="0" rtlCol="0" anchor="ctr"/>
-          <a:lstStyle/>
-          <a:p>
-            <a:pPr indent="0" marL="0">
-              <a:lnSpc>
-                <a:spcPct val="125000"/>
-              </a:lnSpc>
-              <a:buNone/>
-            </a:pPr>
-            <a:r>
-              <a:rPr lang="en-US" sz="1250" dirty="0">
-                <a:solidFill>
-                  <a:srgbClr val="8FA0BE"/>
-                </a:solidFill>
-                <a:latin typeface="Microsoft JhengHei" pitchFamily="34" charset="0"/>
-                <a:ea typeface="Microsoft JhengHei" pitchFamily="34" charset="-122"/>
-                <a:cs typeface="Microsoft JhengHei" pitchFamily="34" charset="-120"/>
-              </a:rPr>
-              <a:t>曝光可量測,但停止投放即歸零;素材還要另外花錢製作。</a:t>
-            </a:r>
-            <a:endParaRPr lang="en-US" sz="1250" dirty="0"/>
-          </a:p>
-        </p:txBody>
-      </p:sp>
-      <p:sp>
-        <p:nvSpPr>
-          <p:cNvPr id="12" name="Text 10"/>
-          <p:cNvSpPr/>
-          <p:nvPr/>
-        </p:nvSpPr>
-        <p:spPr>
-          <a:xfrm>
-            <a:off x="8366760" y="3337560"/>
-            <a:ext cx="2743200" cy="969264"/>
-          </a:xfrm>
-          <a:prstGeom prst="rect">
-            <a:avLst/>
-          </a:prstGeom>
-          <a:noFill/>
-          <a:ln/>
-        </p:spPr>
-        <p:txBody>
-          <a:bodyPr wrap="square" lIns="0" tIns="0" rIns="0" bIns="0" rtlCol="0" anchor="ctr"/>
-          <a:lstStyle/>
-          <a:p>
-            <a:pPr indent="0" marL="0">
-              <a:buNone/>
-            </a:pPr>
-            <a:r>
-              <a:rPr lang="en-US" sz="1500" b="1" dirty="0">
-                <a:solidFill>
-                  <a:srgbClr val="8FA0BE"/>
-                </a:solidFill>
-                <a:latin typeface="Microsoft JhengHei" pitchFamily="34" charset="0"/>
-                <a:ea typeface="Microsoft JhengHei" pitchFamily="34" charset="-122"/>
-                <a:cs typeface="Microsoft JhengHei" pitchFamily="34" charset="-120"/>
-              </a:rPr>
-              <a:t>剩下:0 項資產</a:t>
-            </a:r>
-            <a:endParaRPr lang="en-US" sz="1500" dirty="0"/>
-          </a:p>
-        </p:txBody>
-      </p:sp>
-      <p:sp>
-        <p:nvSpPr>
-          <p:cNvPr id="13" name="Shape 11"/>
-          <p:cNvSpPr/>
-          <p:nvPr/>
-        </p:nvSpPr>
-        <p:spPr>
-          <a:xfrm>
-            <a:off x="822960" y="4654296"/>
-            <a:ext cx="10543032" cy="1298448"/>
-          </a:xfrm>
-          <a:prstGeom prst="roundRect">
-            <a:avLst>
-              <a:gd name="adj" fmla="val 4930"/>
-            </a:avLst>
+          <p:cNvPr id="11" name="Shape 8"/>
+          <p:cNvSpPr/>
+          <p:nvPr/>
+        </p:nvSpPr>
+        <p:spPr>
+          <a:xfrm>
+            <a:off x="1143000" y="3611880"/>
+            <a:ext cx="566928" cy="566928"/>
+          </a:xfrm>
+          <a:prstGeom prst="ellipse">
+            <a:avLst/>
           </a:prstGeom>
           <a:solidFill>
             <a:srgbClr val="1E6E64"/>
@@ -8952,16 +8439,40 @@
           <a:ln/>
         </p:spPr>
       </p:sp>
-      <p:sp>
-        <p:nvSpPr>
-          <p:cNvPr id="14" name="Text 12"/>
-          <p:cNvSpPr/>
-          <p:nvPr/>
-        </p:nvSpPr>
-        <p:spPr>
-          <a:xfrm>
-            <a:off x="1143000" y="4818888"/>
-            <a:ext cx="2468880" cy="969264"/>
+      <p:pic>
+        <p:nvPicPr>
+          <p:cNvPr id="12" name="Image 1" descr="preencoded.png">    </p:cNvPr>
+          <p:cNvPicPr>
+            <a:picLocks noChangeAspect="1"/>
+          </p:cNvPicPr>
+          <p:nvPr/>
+        </p:nvPicPr>
+        <p:blipFill>
+          <a:blip r:embed="rId2"/>
+          <a:stretch>
+            <a:fillRect/>
+          </a:stretch>
+        </p:blipFill>
+        <p:spPr>
+          <a:xfrm>
+            <a:off x="1267724" y="3736604"/>
+            <a:ext cx="317480" cy="317480"/>
+          </a:xfrm>
+          <a:prstGeom prst="rect">
+            <a:avLst/>
+          </a:prstGeom>
+        </p:spPr>
+      </p:pic>
+      <p:sp>
+        <p:nvSpPr>
+          <p:cNvPr id="13" name="Text 9"/>
+          <p:cNvSpPr/>
+          <p:nvPr/>
+        </p:nvSpPr>
+        <p:spPr>
+          <a:xfrm>
+            <a:off x="2057400" y="3392424"/>
+            <a:ext cx="3017520" cy="1005840"/>
           </a:xfrm>
           <a:prstGeom prst="rect">
             <a:avLst/>
@@ -8985,7 +8496,7 @@
                 <a:ea typeface="Microsoft JhengHei" pitchFamily="34" charset="-122"/>
                 <a:cs typeface="Microsoft JhengHei" pitchFamily="34" charset="-120"/>
               </a:rPr>
-              <a:t>數位人 KOL</a:t>
+              <a:t>隨時能重啟</a:t>
             </a:r>
             <a:endParaRPr lang="en-US" sz="1700" dirty="0"/>
           </a:p>
@@ -8993,14 +8504,14 @@
       </p:sp>
       <p:sp>
         <p:nvSpPr>
-          <p:cNvPr id="15" name="Text 13"/>
-          <p:cNvSpPr/>
-          <p:nvPr/>
-        </p:nvSpPr>
-        <p:spPr>
-          <a:xfrm>
-            <a:off x="3703320" y="4818888"/>
-            <a:ext cx="4480560" cy="969264"/>
+          <p:cNvPr id="14" name="Text 10"/>
+          <p:cNvSpPr/>
+          <p:nvPr/>
+        </p:nvSpPr>
+        <p:spPr>
+          <a:xfrm>
+            <a:off x="5212080" y="3374136"/>
+            <a:ext cx="5852160" cy="1051560"/>
           </a:xfrm>
           <a:prstGeom prst="rect">
             <a:avLst/>
@@ -9014,61 +8525,169 @@
           <a:p>
             <a:pPr indent="0" marL="0">
               <a:lnSpc>
-                <a:spcPct val="125000"/>
+                <a:spcPct val="122000"/>
               </a:lnSpc>
               <a:buNone/>
             </a:pPr>
             <a:r>
               <a:rPr lang="en-US" sz="1250" dirty="0">
                 <a:solidFill>
+                  <a:srgbClr val="C7D6EE"/>
+                </a:solidFill>
+                <a:latin typeface="Microsoft JhengHei" pitchFamily="34" charset="0"/>
+                <a:ea typeface="Microsoft JhengHei" pitchFamily="34" charset="-122"/>
+                <a:cs typeface="Microsoft JhengHei" pitchFamily="34" charset="-120"/>
+              </a:rPr>
+              <a:t>IP 永久存在。停了半年想回來經營，隨時續購方案——同一個人設接著生產，粉絲與素材接著累積。</a:t>
+            </a:r>
+            <a:endParaRPr lang="en-US" sz="1250" dirty="0"/>
+          </a:p>
+        </p:txBody>
+      </p:sp>
+      <p:sp>
+        <p:nvSpPr>
+          <p:cNvPr id="15" name="Shape 11"/>
+          <p:cNvSpPr/>
+          <p:nvPr/>
+        </p:nvSpPr>
+        <p:spPr>
+          <a:xfrm>
+            <a:off x="822960" y="4727448"/>
+            <a:ext cx="10543032" cy="1371600"/>
+          </a:xfrm>
+          <a:prstGeom prst="roundRect">
+            <a:avLst>
+              <a:gd name="adj" fmla="val 4667"/>
+            </a:avLst>
+          </a:prstGeom>
+          <a:solidFill>
+            <a:srgbClr val="1E6E64"/>
+          </a:solidFill>
+          <a:ln/>
+        </p:spPr>
+      </p:sp>
+      <p:sp>
+        <p:nvSpPr>
+          <p:cNvPr id="16" name="Shape 12"/>
+          <p:cNvSpPr/>
+          <p:nvPr/>
+        </p:nvSpPr>
+        <p:spPr>
+          <a:xfrm>
+            <a:off x="1143000" y="5129784"/>
+            <a:ext cx="566928" cy="566928"/>
+          </a:xfrm>
+          <a:prstGeom prst="ellipse">
+            <a:avLst/>
+          </a:prstGeom>
+          <a:solidFill>
+            <a:srgbClr val="1E6E64"/>
+          </a:solidFill>
+          <a:ln/>
+        </p:spPr>
+      </p:sp>
+      <p:pic>
+        <p:nvPicPr>
+          <p:cNvPr id="17" name="Image 2" descr="preencoded.png">    </p:cNvPr>
+          <p:cNvPicPr>
+            <a:picLocks noChangeAspect="1"/>
+          </p:cNvPicPr>
+          <p:nvPr/>
+        </p:nvPicPr>
+        <p:blipFill>
+          <a:blip r:embed="rId3"/>
+          <a:stretch>
+            <a:fillRect/>
+          </a:stretch>
+        </p:blipFill>
+        <p:spPr>
+          <a:xfrm>
+            <a:off x="1267724" y="5254508"/>
+            <a:ext cx="317480" cy="317480"/>
+          </a:xfrm>
+          <a:prstGeom prst="rect">
+            <a:avLst/>
+          </a:prstGeom>
+        </p:spPr>
+      </p:pic>
+      <p:sp>
+        <p:nvSpPr>
+          <p:cNvPr id="18" name="Text 13"/>
+          <p:cNvSpPr/>
+          <p:nvPr/>
+        </p:nvSpPr>
+        <p:spPr>
+          <a:xfrm>
+            <a:off x="2057400" y="4910328"/>
+            <a:ext cx="3017520" cy="1005840"/>
+          </a:xfrm>
+          <a:prstGeom prst="rect">
+            <a:avLst/>
+          </a:prstGeom>
+          <a:noFill/>
+          <a:ln/>
+        </p:spPr>
+        <p:txBody>
+          <a:bodyPr wrap="square" lIns="0" tIns="0" rIns="0" bIns="0" rtlCol="0" anchor="ctr"/>
+          <a:lstStyle/>
+          <a:p>
+            <a:pPr indent="0" marL="0">
+              <a:buNone/>
+            </a:pPr>
+            <a:r>
+              <a:rPr lang="en-US" sz="1700" b="1" dirty="0">
+                <a:solidFill>
+                  <a:srgbClr val="FFFFFF"/>
+                </a:solidFill>
+                <a:latin typeface="Microsoft JhengHei" pitchFamily="34" charset="0"/>
+                <a:ea typeface="Microsoft JhengHei" pitchFamily="34" charset="-122"/>
+                <a:cs typeface="Microsoft JhengHei" pitchFamily="34" charset="-120"/>
+              </a:rPr>
+              <a:t>永續規劃的一環</a:t>
+            </a:r>
+            <a:endParaRPr lang="en-US" sz="1700" dirty="0"/>
+          </a:p>
+        </p:txBody>
+      </p:sp>
+      <p:sp>
+        <p:nvSpPr>
+          <p:cNvPr id="19" name="Text 14"/>
+          <p:cNvSpPr/>
+          <p:nvPr/>
+        </p:nvSpPr>
+        <p:spPr>
+          <a:xfrm>
+            <a:off x="5212080" y="4892040"/>
+            <a:ext cx="5852160" cy="1051560"/>
+          </a:xfrm>
+          <a:prstGeom prst="rect">
+            <a:avLst/>
+          </a:prstGeom>
+          <a:noFill/>
+          <a:ln/>
+        </p:spPr>
+        <p:txBody>
+          <a:bodyPr wrap="square" lIns="0" tIns="0" rIns="0" bIns="0" rtlCol="0" anchor="ctr"/>
+          <a:lstStyle/>
+          <a:p>
+            <a:pPr indent="0" marL="0">
+              <a:lnSpc>
+                <a:spcPct val="122000"/>
+              </a:lnSpc>
+              <a:buNone/>
+            </a:pPr>
+            <a:r>
+              <a:rPr lang="en-US" sz="1250" dirty="0">
+                <a:solidFill>
                   <a:srgbClr val="EAF6F3"/>
                 </a:solidFill>
                 <a:latin typeface="Microsoft JhengHei" pitchFamily="34" charset="0"/>
                 <a:ea typeface="Microsoft JhengHei" pitchFamily="34" charset="-122"/>
                 <a:cs typeface="Microsoft JhengHei" pitchFamily="34" charset="-120"/>
               </a:rPr>
-              <a:t>260+ 篇自有素材、6 個經營中的帳號、1 套人設與內容生產流程。</a:t>
+              <a:t>一次建立、長期使用：KOL IP 是留得下來的品牌資產，不是花掉就沒有的行銷費用。</a:t>
             </a:r>
             <a:endParaRPr lang="en-US" sz="1250" dirty="0"/>
-          </a:p>
-        </p:txBody>
-      </p:sp>
-      <p:sp>
-        <p:nvSpPr>
-          <p:cNvPr id="16" name="Text 14"/>
-          <p:cNvSpPr/>
-          <p:nvPr/>
-        </p:nvSpPr>
-        <p:spPr>
-          <a:xfrm>
-            <a:off x="8366760" y="4818888"/>
-            <a:ext cx="2743200" cy="969264"/>
-          </a:xfrm>
-          <a:prstGeom prst="rect">
-            <a:avLst/>
-          </a:prstGeom>
-          <a:noFill/>
-          <a:ln/>
-        </p:spPr>
-        <p:txBody>
-          <a:bodyPr wrap="square" lIns="0" tIns="0" rIns="0" bIns="0" rtlCol="0" anchor="ctr"/>
-          <a:lstStyle/>
-          <a:p>
-            <a:pPr indent="0" marL="0">
-              <a:buNone/>
-            </a:pPr>
-            <a:r>
-              <a:rPr lang="en-US" sz="1500" b="1" dirty="0">
-                <a:solidFill>
-                  <a:srgbClr val="E8B45F"/>
-                </a:solidFill>
-                <a:latin typeface="Microsoft JhengHei" pitchFamily="34" charset="0"/>
-                <a:ea typeface="Microsoft JhengHei" pitchFamily="34" charset="-122"/>
-                <a:cs typeface="Microsoft JhengHei" pitchFamily="34" charset="-120"/>
-              </a:rPr>
-              <a:t>剩下:全部,歸品牌名下</a:t>
-            </a:r>
-            <a:endParaRPr lang="en-US" sz="1500" dirty="0"/>
           </a:p>
         </p:txBody>
       </p:sp>
@@ -9137,7 +8756,7 @@
                 <a:ea typeface="Microsoft JhengHei" pitchFamily="34" charset="-122"/>
                 <a:cs typeface="Microsoft JhengHei" pitchFamily="34" charset="-120"/>
               </a:rPr>
-              <a:t>TRAFFIC|這門服務的本質</a:t>
+              <a:t>TRAFFIC｜這門服務的本質</a:t>
             </a:r>
             <a:endParaRPr lang="en-US" sz="1100" dirty="0"/>
           </a:p>
@@ -9176,7 +8795,7 @@
                 <a:ea typeface="Microsoft JhengHei" pitchFamily="34" charset="-122"/>
                 <a:cs typeface="Microsoft JhengHei" pitchFamily="34" charset="-120"/>
               </a:rPr>
-              <a:t>說到底,您買的是「引流」</a:t>
+              <a:t>三位一體，持續引流</a:t>
             </a:r>
             <a:endParaRPr lang="en-US" sz="3000" dirty="0"/>
           </a:p>
@@ -9215,7 +8834,7 @@
                 <a:ea typeface="Microsoft JhengHei" pitchFamily="34" charset="-122"/>
                 <a:cs typeface="Microsoft JhengHei" pitchFamily="34" charset="-120"/>
               </a:rPr>
-              <a:t>同一筆錢——每月 NT$65,000——兩種用法,結果差在哪?</a:t>
+              <a:t>同一筆錢——每月 NT$65,000——兩種用法，結果差在哪？</a:t>
             </a:r>
             <a:endParaRPr lang="en-US" sz="1400" dirty="0"/>
           </a:p>
@@ -9323,7 +8942,7 @@
                 <a:ea typeface="Microsoft JhengHei" pitchFamily="34" charset="-122"/>
                 <a:cs typeface="Microsoft JhengHei" pitchFamily="34" charset="-120"/>
               </a:rPr>
-              <a:t>AI 內容</a:t>
+              <a:t>全 AI</a:t>
             </a:r>
             <a:endParaRPr lang="en-US" sz="1350" dirty="0"/>
           </a:p>
@@ -9343,7 +8962,7 @@
                 <a:ea typeface="Microsoft JhengHei" pitchFamily="34" charset="-122"/>
                 <a:cs typeface="Microsoft JhengHei" pitchFamily="34" charset="-120"/>
               </a:rPr>
-              <a:t>生成</a:t>
+              <a:t>內容生成</a:t>
             </a:r>
             <a:endParaRPr lang="en-US" sz="1350" dirty="0"/>
           </a:p>
@@ -9385,7 +9004,7 @@
                 <a:ea typeface="Microsoft JhengHei" pitchFamily="34" charset="-122"/>
                 <a:cs typeface="Microsoft JhengHei" pitchFamily="34" charset="-120"/>
               </a:rPr>
-              <a:t>自動化</a:t>
+              <a:t>多平台</a:t>
             </a:r>
             <a:endParaRPr lang="en-US" sz="1350" dirty="0"/>
           </a:p>
@@ -9405,7 +9024,7 @@
                 <a:ea typeface="Microsoft JhengHei" pitchFamily="34" charset="-122"/>
                 <a:cs typeface="Microsoft JhengHei" pitchFamily="34" charset="-120"/>
               </a:rPr>
-              <a:t>排程發布</a:t>
+              <a:t>經營</a:t>
             </a:r>
             <a:endParaRPr lang="en-US" sz="1350" dirty="0"/>
           </a:p>
@@ -9509,7 +9128,7 @@
                 <a:ea typeface="Microsoft JhengHei" pitchFamily="34" charset="-122"/>
                 <a:cs typeface="Microsoft JhengHei" pitchFamily="34" charset="-120"/>
               </a:rPr>
-              <a:t>三件事綁在一起,流量才會持續、自然、有人味</a:t>
+              <a:t>三件事綁在一起，引流效果才會持續累積</a:t>
             </a:r>
             <a:endParaRPr lang="en-US" sz="1200" dirty="0"/>
           </a:p>
@@ -9612,7 +9231,7 @@
                 <a:ea typeface="Microsoft JhengHei" pitchFamily="34" charset="-122"/>
                 <a:cs typeface="Microsoft JhengHei" pitchFamily="34" charset="-120"/>
               </a:rPr>
-              <a:t>6.5 萬 ≈ 32.5 萬次曝光*,素材費還要另計;停止投放,流量當天歸零。</a:t>
+              <a:t>6.5 萬 ≈ 32.5 萬次曝光*，素材費還要另計；停止投放，流量當天歸零。</a:t>
             </a:r>
             <a:endParaRPr lang="en-US" sz="1150" dirty="0"/>
           </a:p>
@@ -9715,7 +9334,7 @@
                 <a:ea typeface="Microsoft JhengHei" pitchFamily="34" charset="-122"/>
                 <a:cs typeface="Microsoft JhengHei" pitchFamily="34" charset="-120"/>
               </a:rPr>
-              <a:t>同樣 6.5 萬:每月 22 篇內容+人設資產,累積在您的帳號;不投放也有自然流量。</a:t>
+              <a:t>同樣 6.5 萬：每月 22 篇內容+人設資產，累積在您的帳號；不投放也有自然流量。</a:t>
             </a:r>
             <a:endParaRPr lang="en-US" sz="1150" dirty="0"/>
           </a:p>
@@ -9818,7 +9437,7 @@
                 <a:ea typeface="Microsoft JhengHei" pitchFamily="34" charset="-122"/>
                 <a:cs typeface="Microsoft JhengHei" pitchFamily="34" charset="-120"/>
               </a:rPr>
-              <a:t>自然流打底、廣告放大;我們的素材可直接投廣告,素材費不用花兩次。</a:t>
+              <a:t>資產是要被看到的——自然流打底、廣告放大；素材一份兩用，不用花兩次錢。</a:t>
             </a:r>
             <a:endParaRPr lang="en-US" sz="1150" dirty="0"/>
           </a:p>
@@ -9857,7 +9476,7 @@
                 <a:ea typeface="Microsoft JhengHei" pitchFamily="34" charset="-122"/>
                 <a:cs typeface="Microsoft JhengHei" pitchFamily="34" charset="-120"/>
               </a:rPr>
-              <a:t>成效衡量:公域曝光 → 私域名單與轉化,每週報告攤開對比。  *以台灣 Meta 平均 CPM 約 NT$200 估算(2026 公開行情)</a:t>
+              <a:t>成效衡量：公域曝光 → 私域名單與轉化，每週報告攤開對比。  *以台灣 Meta 平均 CPM 約 NT$200 估算（2026 公開行情）</a:t>
             </a:r>
             <a:endParaRPr lang="en-US" sz="1150" dirty="0"/>
           </a:p>
@@ -9928,7 +9547,7 @@
                 <a:ea typeface="Microsoft JhengHei" pitchFamily="34" charset="-122"/>
                 <a:cs typeface="Microsoft JhengHei" pitchFamily="34" charset="-120"/>
               </a:rPr>
-              <a:t>TRUE STORY|我們自己付過的學費</a:t>
+              <a:t>TRUE STORY｜我們 200 萬的親身經歷</a:t>
             </a:r>
             <a:endParaRPr lang="en-US" sz="1100" dirty="0"/>
           </a:p>
@@ -9967,7 +9586,7 @@
                 <a:ea typeface="Microsoft JhengHei" pitchFamily="34" charset="-122"/>
                 <a:cs typeface="Microsoft JhengHei" pitchFamily="34" charset="-120"/>
               </a:rPr>
-              <a:t>40 萬的真人代言,教會我們的事</a:t>
+              <a:t>這門學費，很多品牌都付過</a:t>
             </a:r>
             <a:endParaRPr lang="en-US" sz="3000" dirty="0"/>
           </a:p>
@@ -10003,7 +9622,7 @@
         </p:nvSpPr>
         <p:spPr>
           <a:xfrm>
-            <a:off x="1143000" y="1627632"/>
+            <a:off x="1143000" y="1572768"/>
             <a:ext cx="4572000" cy="365760"/>
           </a:xfrm>
           <a:prstGeom prst="rect">
@@ -10028,7 +9647,7 @@
                 <a:ea typeface="Microsoft JhengHei" pitchFamily="34" charset="-122"/>
                 <a:cs typeface="Microsoft JhengHei" pitchFamily="34" charset="-120"/>
               </a:rPr>
-              <a:t>真人藝人合作(2025.10-2026.01)</a:t>
+              <a:t>真人藝人合作（2025.10-2026.01）</a:t>
             </a:r>
             <a:endParaRPr lang="en-US" sz="1500" dirty="0"/>
           </a:p>
@@ -10042,7 +9661,85 @@
         </p:nvSpPr>
         <p:spPr>
           <a:xfrm>
-            <a:off x="1143000" y="2148840"/>
+            <a:off x="1143000" y="1993392"/>
+            <a:ext cx="4572000" cy="502920"/>
+          </a:xfrm>
+          <a:prstGeom prst="rect">
+            <a:avLst/>
+          </a:prstGeom>
+          <a:noFill/>
+          <a:ln/>
+        </p:spPr>
+        <p:txBody>
+          <a:bodyPr wrap="square" lIns="0" tIns="0" rIns="0" bIns="0" rtlCol="0" anchor="ctr"/>
+          <a:lstStyle/>
+          <a:p>
+            <a:pPr indent="0" marL="0">
+              <a:buNone/>
+            </a:pPr>
+            <a:r>
+              <a:rPr lang="en-US" sz="2700" b="1" dirty="0">
+                <a:solidFill>
+                  <a:srgbClr val="E8B45F"/>
+                </a:solidFill>
+                <a:latin typeface="Microsoft JhengHei" pitchFamily="34" charset="0"/>
+                <a:ea typeface="Microsoft JhengHei" pitchFamily="34" charset="-122"/>
+                <a:cs typeface="Microsoft JhengHei" pitchFamily="34" charset="-120"/>
+              </a:rPr>
+              <a:t>NT$2,000,000</a:t>
+            </a:r>
+            <a:endParaRPr lang="en-US" sz="2700" dirty="0"/>
+          </a:p>
+        </p:txBody>
+      </p:sp>
+      <p:sp>
+        <p:nvSpPr>
+          <p:cNvPr id="7" name="Text 5"/>
+          <p:cNvSpPr/>
+          <p:nvPr/>
+        </p:nvSpPr>
+        <p:spPr>
+          <a:xfrm>
+            <a:off x="1143000" y="2496312"/>
+            <a:ext cx="4572000" cy="292608"/>
+          </a:xfrm>
+          <a:prstGeom prst="rect">
+            <a:avLst/>
+          </a:prstGeom>
+          <a:noFill/>
+          <a:ln/>
+        </p:spPr>
+        <p:txBody>
+          <a:bodyPr wrap="square" lIns="0" tIns="0" rIns="0" bIns="0" rtlCol="0" anchor="ctr"/>
+          <a:lstStyle/>
+          <a:p>
+            <a:pPr indent="0" marL="0">
+              <a:buNone/>
+            </a:pPr>
+            <a:r>
+              <a:rPr lang="en-US" sz="1050" dirty="0">
+                <a:solidFill>
+                  <a:srgbClr val="8FA0BE"/>
+                </a:solidFill>
+                <a:latin typeface="Microsoft JhengHei" pitchFamily="34" charset="0"/>
+                <a:ea typeface="Microsoft JhengHei" pitchFamily="34" charset="-122"/>
+                <a:cs typeface="Microsoft JhengHei" pitchFamily="34" charset="-120"/>
+              </a:rPr>
+              <a:t>總投入（含代言授權、內容合作與相關拍攝支出）</a:t>
+            </a:r>
+            <a:endParaRPr lang="en-US" sz="1050" dirty="0"/>
+          </a:p>
+        </p:txBody>
+      </p:sp>
+      <p:sp>
+        <p:nvSpPr>
+          <p:cNvPr id="8" name="Text 6"/>
+          <p:cNvSpPr/>
+          <p:nvPr/>
+        </p:nvSpPr>
+        <p:spPr>
+          <a:xfrm>
+            <a:off x="1143000" y="2999232"/>
             <a:ext cx="868680" cy="713232"/>
           </a:xfrm>
           <a:prstGeom prst="rect">
@@ -10067,7 +9764,7 @@
                 <a:ea typeface="Microsoft JhengHei" pitchFamily="34" charset="-122"/>
                 <a:cs typeface="Microsoft JhengHei" pitchFamily="34" charset="-120"/>
               </a:rPr>
-              <a:t>投入</a:t>
+              <a:t>產出</a:t>
             </a:r>
             <a:endParaRPr lang="en-US" sz="1300" dirty="0"/>
           </a:p>
@@ -10075,13 +9772,13 @@
       </p:sp>
       <p:sp>
         <p:nvSpPr>
-          <p:cNvPr id="7" name="Text 5"/>
-          <p:cNvSpPr/>
-          <p:nvPr/>
-        </p:nvSpPr>
-        <p:spPr>
-          <a:xfrm>
-            <a:off x="2103120" y="2148840"/>
+          <p:cNvPr id="9" name="Text 7"/>
+          <p:cNvSpPr/>
+          <p:nvPr/>
+        </p:nvSpPr>
+        <p:spPr>
+          <a:xfrm>
+            <a:off x="2103120" y="2999232"/>
             <a:ext cx="3657600" cy="713232"/>
           </a:xfrm>
           <a:prstGeom prst="rect">
@@ -10101,80 +9798,16 @@
               <a:buNone/>
             </a:pPr>
             <a:r>
-              <a:rPr lang="en-US" sz="1350" dirty="0">
-                <a:solidFill>
-                  <a:srgbClr val="C7D6EE"/>
-                </a:solidFill>
-                <a:latin typeface="Microsoft JhengHei" pitchFamily="34" charset="0"/>
-                <a:ea typeface="Microsoft JhengHei" pitchFamily="34" charset="-122"/>
-                <a:cs typeface="Microsoft JhengHei" pitchFamily="34" charset="-120"/>
-              </a:rPr>
-              <a:t>NT$400,000(含 IP 授權、內容合作、商務配合)</a:t>
-            </a:r>
-            <a:endParaRPr lang="en-US" sz="1350" dirty="0"/>
-          </a:p>
-        </p:txBody>
-      </p:sp>
-      <p:sp>
-        <p:nvSpPr>
-          <p:cNvPr id="8" name="Text 6"/>
-          <p:cNvSpPr/>
-          <p:nvPr/>
-        </p:nvSpPr>
-        <p:spPr>
-          <a:xfrm>
-            <a:off x="1143000" y="2953512"/>
-            <a:ext cx="868680" cy="713232"/>
-          </a:xfrm>
-          <a:prstGeom prst="rect">
-            <a:avLst/>
-          </a:prstGeom>
-          <a:noFill/>
-          <a:ln/>
-        </p:spPr>
-        <p:txBody>
-          <a:bodyPr wrap="square" lIns="0" tIns="0" rIns="0" bIns="0" rtlCol="0" anchor="ctr"/>
-          <a:lstStyle/>
-          <a:p>
-            <a:pPr indent="0" marL="0">
-              <a:buNone/>
-            </a:pPr>
-            <a:r>
-              <a:rPr lang="en-US" sz="1300" b="1" dirty="0">
-                <a:solidFill>
-                  <a:srgbClr val="8FA0BE"/>
-                </a:solidFill>
-                <a:latin typeface="Microsoft JhengHei" pitchFamily="34" charset="0"/>
-                <a:ea typeface="Microsoft JhengHei" pitchFamily="34" charset="-122"/>
-                <a:cs typeface="Microsoft JhengHei" pitchFamily="34" charset="-120"/>
-              </a:rPr>
-              <a:t>產出</a:t>
-            </a:r>
-            <a:endParaRPr lang="en-US" sz="1300" dirty="0"/>
-          </a:p>
-        </p:txBody>
-      </p:sp>
-      <p:sp>
-        <p:nvSpPr>
-          <p:cNvPr id="9" name="Text 7"/>
-          <p:cNvSpPr/>
-          <p:nvPr/>
-        </p:nvSpPr>
-        <p:spPr>
-          <a:xfrm>
-            <a:off x="2103120" y="2953512"/>
-            <a:ext cx="3657600" cy="713232"/>
-          </a:xfrm>
-          <a:prstGeom prst="rect">
-            <a:avLst/>
-          </a:prstGeom>
-          <a:noFill/>
-          <a:ln/>
-        </p:spPr>
-        <p:txBody>
-          <a:bodyPr wrap="square" lIns="0" tIns="0" rIns="0" bIns="0" rtlCol="0" anchor="ctr"/>
-          <a:lstStyle/>
-          <a:p>
+              <a:rPr lang="en-US" sz="1350" b="1" dirty="0">
+                <a:solidFill>
+                  <a:srgbClr val="FFFFFF"/>
+                </a:solidFill>
+                <a:latin typeface="Microsoft JhengHei" pitchFamily="34" charset="0"/>
+                <a:ea typeface="Microsoft JhengHei" pitchFamily="34" charset="-122"/>
+                <a:cs typeface="Microsoft JhengHei" pitchFamily="34" charset="-120"/>
+              </a:rPr>
+              <a:t>22 支內容</a:t>
+            </a:r>
             <a:pPr indent="0" marL="0">
               <a:lnSpc>
                 <a:spcPct val="120000"/>
@@ -10190,7 +9823,7 @@
                 <a:ea typeface="Microsoft JhengHei" pitchFamily="34" charset="-122"/>
                 <a:cs typeface="Microsoft JhengHei" pitchFamily="34" charset="-120"/>
               </a:rPr>
-              <a:t>22 支內容(節目 4 集+短影音 18 支)</a:t>
+              <a:t>（節目 4 集+短影音 18 支）</a:t>
             </a:r>
             <a:endParaRPr lang="en-US" sz="1350" dirty="0"/>
           </a:p>
@@ -10204,7 +9837,7 @@
         </p:nvSpPr>
         <p:spPr>
           <a:xfrm>
-            <a:off x="1143000" y="3758184"/>
+            <a:off x="1143000" y="3803904"/>
             <a:ext cx="868680" cy="713232"/>
           </a:xfrm>
           <a:prstGeom prst="rect">
@@ -10243,7 +9876,7 @@
         </p:nvSpPr>
         <p:spPr>
           <a:xfrm>
-            <a:off x="2103120" y="3758184"/>
+            <a:off x="2103120" y="3803904"/>
             <a:ext cx="3657600" cy="713232"/>
           </a:xfrm>
           <a:prstGeom prst="rect">
@@ -10271,72 +9904,8 @@
                 <a:ea typeface="Microsoft JhengHei" pitchFamily="34" charset="-122"/>
                 <a:cs typeface="Microsoft JhengHei" pitchFamily="34" charset="-120"/>
               </a:rPr>
-              <a:t>觀看 9,225 次・訂閱 +37</a:t>
-            </a:r>
-            <a:endParaRPr lang="en-US" sz="1350" dirty="0"/>
-          </a:p>
-        </p:txBody>
-      </p:sp>
-      <p:sp>
-        <p:nvSpPr>
-          <p:cNvPr id="12" name="Text 10"/>
-          <p:cNvSpPr/>
-          <p:nvPr/>
-        </p:nvSpPr>
-        <p:spPr>
-          <a:xfrm>
-            <a:off x="1143000" y="4562856"/>
-            <a:ext cx="868680" cy="713232"/>
-          </a:xfrm>
-          <a:prstGeom prst="rect">
-            <a:avLst/>
-          </a:prstGeom>
-          <a:noFill/>
-          <a:ln/>
-        </p:spPr>
-        <p:txBody>
-          <a:bodyPr wrap="square" lIns="0" tIns="0" rIns="0" bIns="0" rtlCol="0" anchor="ctr"/>
-          <a:lstStyle/>
-          <a:p>
-            <a:pPr indent="0" marL="0">
-              <a:buNone/>
-            </a:pPr>
-            <a:r>
-              <a:rPr lang="en-US" sz="1300" b="1" dirty="0">
-                <a:solidFill>
-                  <a:srgbClr val="8FA0BE"/>
-                </a:solidFill>
-                <a:latin typeface="Microsoft JhengHei" pitchFamily="34" charset="0"/>
-                <a:ea typeface="Microsoft JhengHei" pitchFamily="34" charset="-122"/>
-                <a:cs typeface="Microsoft JhengHei" pitchFamily="34" charset="-120"/>
-              </a:rPr>
-              <a:t>結局</a:t>
-            </a:r>
-            <a:endParaRPr lang="en-US" sz="1300" dirty="0"/>
-          </a:p>
-        </p:txBody>
-      </p:sp>
-      <p:sp>
-        <p:nvSpPr>
-          <p:cNvPr id="13" name="Text 11"/>
-          <p:cNvSpPr/>
-          <p:nvPr/>
-        </p:nvSpPr>
-        <p:spPr>
-          <a:xfrm>
-            <a:off x="2103120" y="4562856"/>
-            <a:ext cx="3657600" cy="713232"/>
-          </a:xfrm>
-          <a:prstGeom prst="rect">
-            <a:avLst/>
-          </a:prstGeom>
-          <a:noFill/>
-          <a:ln/>
-        </p:spPr>
-        <p:txBody>
-          <a:bodyPr wrap="square" lIns="0" tIns="0" rIns="0" bIns="0" rtlCol="0" anchor="ctr"/>
-          <a:lstStyle/>
-          <a:p>
+              <a:t>觀看 </a:t>
+            </a:r>
             <a:pPr indent="0" marL="0">
               <a:lnSpc>
                 <a:spcPct val="120000"/>
@@ -10344,6 +9913,23 @@
               <a:buNone/>
             </a:pPr>
             <a:r>
+              <a:rPr lang="en-US" sz="1600" b="1" dirty="0">
+                <a:solidFill>
+                  <a:srgbClr val="E8B45F"/>
+                </a:solidFill>
+                <a:latin typeface="Microsoft JhengHei" pitchFamily="34" charset="0"/>
+                <a:ea typeface="Microsoft JhengHei" pitchFamily="34" charset="-122"/>
+                <a:cs typeface="Microsoft JhengHei" pitchFamily="34" charset="-120"/>
+              </a:rPr>
+              <a:t>9,225</a:t>
+            </a:r>
+            <a:pPr indent="0" marL="0">
+              <a:lnSpc>
+                <a:spcPct val="120000"/>
+              </a:lnSpc>
+              <a:buNone/>
+            </a:pPr>
+            <a:r>
               <a:rPr lang="en-US" sz="1350" dirty="0">
                 <a:solidFill>
                   <a:srgbClr val="C7D6EE"/>
@@ -10352,7 +9938,105 @@
                 <a:ea typeface="Microsoft JhengHei" pitchFamily="34" charset="-122"/>
                 <a:cs typeface="Microsoft JhengHei" pitchFamily="34" charset="-120"/>
               </a:rPr>
-              <a:t>授權到期,對方帳號素材可下架</a:t>
+              <a:t> 次・訂閱 </a:t>
+            </a:r>
+            <a:pPr indent="0" marL="0">
+              <a:lnSpc>
+                <a:spcPct val="120000"/>
+              </a:lnSpc>
+              <a:buNone/>
+            </a:pPr>
+            <a:r>
+              <a:rPr lang="en-US" sz="1600" b="1" dirty="0">
+                <a:solidFill>
+                  <a:srgbClr val="E8B45F"/>
+                </a:solidFill>
+                <a:latin typeface="Microsoft JhengHei" pitchFamily="34" charset="0"/>
+                <a:ea typeface="Microsoft JhengHei" pitchFamily="34" charset="-122"/>
+                <a:cs typeface="Microsoft JhengHei" pitchFamily="34" charset="-120"/>
+              </a:rPr>
+              <a:t>+37</a:t>
+            </a:r>
+            <a:endParaRPr lang="en-US" sz="1350" dirty="0"/>
+          </a:p>
+        </p:txBody>
+      </p:sp>
+      <p:sp>
+        <p:nvSpPr>
+          <p:cNvPr id="12" name="Text 10"/>
+          <p:cNvSpPr/>
+          <p:nvPr/>
+        </p:nvSpPr>
+        <p:spPr>
+          <a:xfrm>
+            <a:off x="1143000" y="4608576"/>
+            <a:ext cx="868680" cy="713232"/>
+          </a:xfrm>
+          <a:prstGeom prst="rect">
+            <a:avLst/>
+          </a:prstGeom>
+          <a:noFill/>
+          <a:ln/>
+        </p:spPr>
+        <p:txBody>
+          <a:bodyPr wrap="square" lIns="0" tIns="0" rIns="0" bIns="0" rtlCol="0" anchor="ctr"/>
+          <a:lstStyle/>
+          <a:p>
+            <a:pPr indent="0" marL="0">
+              <a:buNone/>
+            </a:pPr>
+            <a:r>
+              <a:rPr lang="en-US" sz="1300" b="1" dirty="0">
+                <a:solidFill>
+                  <a:srgbClr val="8FA0BE"/>
+                </a:solidFill>
+                <a:latin typeface="Microsoft JhengHei" pitchFamily="34" charset="0"/>
+                <a:ea typeface="Microsoft JhengHei" pitchFamily="34" charset="-122"/>
+                <a:cs typeface="Microsoft JhengHei" pitchFamily="34" charset="-120"/>
+              </a:rPr>
+              <a:t>結局</a:t>
+            </a:r>
+            <a:endParaRPr lang="en-US" sz="1300" dirty="0"/>
+          </a:p>
+        </p:txBody>
+      </p:sp>
+      <p:sp>
+        <p:nvSpPr>
+          <p:cNvPr id="13" name="Text 11"/>
+          <p:cNvSpPr/>
+          <p:nvPr/>
+        </p:nvSpPr>
+        <p:spPr>
+          <a:xfrm>
+            <a:off x="2103120" y="4608576"/>
+            <a:ext cx="3657600" cy="713232"/>
+          </a:xfrm>
+          <a:prstGeom prst="rect">
+            <a:avLst/>
+          </a:prstGeom>
+          <a:noFill/>
+          <a:ln/>
+        </p:spPr>
+        <p:txBody>
+          <a:bodyPr wrap="square" lIns="0" tIns="0" rIns="0" bIns="0" rtlCol="0" anchor="ctr"/>
+          <a:lstStyle/>
+          <a:p>
+            <a:pPr indent="0" marL="0">
+              <a:lnSpc>
+                <a:spcPct val="120000"/>
+              </a:lnSpc>
+              <a:buNone/>
+            </a:pPr>
+            <a:r>
+              <a:rPr lang="en-US" sz="1350" dirty="0">
+                <a:solidFill>
+                  <a:srgbClr val="C7D6EE"/>
+                </a:solidFill>
+                <a:latin typeface="Microsoft JhengHei" pitchFamily="34" charset="0"/>
+                <a:ea typeface="Microsoft JhengHei" pitchFamily="34" charset="-122"/>
+                <a:cs typeface="Microsoft JhengHei" pitchFamily="34" charset="-120"/>
+              </a:rPr>
+              <a:t>授權到期，對方帳號素材可下架</a:t>
             </a:r>
             <a:endParaRPr lang="en-US" sz="1350" dirty="0"/>
           </a:p>
@@ -10388,7 +10072,7 @@
         </p:nvSpPr>
         <p:spPr>
           <a:xfrm>
-            <a:off x="6583680" y="1627632"/>
+            <a:off x="6583680" y="1572768"/>
             <a:ext cx="4572000" cy="365760"/>
           </a:xfrm>
           <a:prstGeom prst="rect">
@@ -10413,7 +10097,7 @@
                 <a:ea typeface="Microsoft JhengHei" pitchFamily="34" charset="-122"/>
                 <a:cs typeface="Microsoft JhengHei" pitchFamily="34" charset="-120"/>
               </a:rPr>
-              <a:t>同樣 40 萬,投入數位人</a:t>
+              <a:t>同樣 200 萬，投入數位人</a:t>
             </a:r>
             <a:endParaRPr lang="en-US" sz="1500" dirty="0"/>
           </a:p>
@@ -10427,7 +10111,99 @@
         </p:nvSpPr>
         <p:spPr>
           <a:xfrm>
-            <a:off x="6583680" y="2148840"/>
+            <a:off x="6583680" y="1993392"/>
+            <a:ext cx="4572000" cy="502920"/>
+          </a:xfrm>
+          <a:prstGeom prst="rect">
+            <a:avLst/>
+          </a:prstGeom>
+          <a:noFill/>
+          <a:ln/>
+        </p:spPr>
+        <p:txBody>
+          <a:bodyPr wrap="square" lIns="0" tIns="0" rIns="0" bIns="0" rtlCol="0" anchor="ctr"/>
+          <a:lstStyle/>
+          <a:p>
+            <a:pPr indent="0" marL="0">
+              <a:buNone/>
+            </a:pPr>
+            <a:r>
+              <a:rPr lang="en-US" sz="2700" b="1" dirty="0">
+                <a:solidFill>
+                  <a:srgbClr val="E8B45F"/>
+                </a:solidFill>
+                <a:latin typeface="Microsoft JhengHei" pitchFamily="34" charset="0"/>
+                <a:ea typeface="Microsoft JhengHei" pitchFamily="34" charset="-122"/>
+                <a:cs typeface="Microsoft JhengHei" pitchFamily="34" charset="-120"/>
+              </a:rPr>
+              <a:t>30 個月</a:t>
+            </a:r>
+            <a:pPr indent="0" marL="0">
+              <a:buNone/>
+            </a:pPr>
+            <a:r>
+              <a:rPr lang="en-US" sz="1500" b="1" dirty="0">
+                <a:solidFill>
+                  <a:srgbClr val="FFFFFF"/>
+                </a:solidFill>
+                <a:latin typeface="Microsoft JhengHei" pitchFamily="34" charset="0"/>
+                <a:ea typeface="Microsoft JhengHei" pitchFamily="34" charset="-122"/>
+                <a:cs typeface="Microsoft JhengHei" pitchFamily="34" charset="-120"/>
+              </a:rPr>
+              <a:t> 完整經營</a:t>
+            </a:r>
+            <a:endParaRPr lang="en-US" sz="2700" dirty="0"/>
+          </a:p>
+        </p:txBody>
+      </p:sp>
+      <p:sp>
+        <p:nvSpPr>
+          <p:cNvPr id="17" name="Text 15"/>
+          <p:cNvSpPr/>
+          <p:nvPr/>
+        </p:nvSpPr>
+        <p:spPr>
+          <a:xfrm>
+            <a:off x="6583680" y="2496312"/>
+            <a:ext cx="4572000" cy="292608"/>
+          </a:xfrm>
+          <a:prstGeom prst="rect">
+            <a:avLst/>
+          </a:prstGeom>
+          <a:noFill/>
+          <a:ln/>
+        </p:spPr>
+        <p:txBody>
+          <a:bodyPr wrap="square" lIns="0" tIns="0" rIns="0" bIns="0" rtlCol="0" anchor="ctr"/>
+          <a:lstStyle/>
+          <a:p>
+            <a:pPr indent="0" marL="0">
+              <a:buNone/>
+            </a:pPr>
+            <a:r>
+              <a:rPr lang="en-US" sz="1050" dirty="0">
+                <a:solidFill>
+                  <a:srgbClr val="BFE8E0"/>
+                </a:solidFill>
+                <a:latin typeface="Microsoft JhengHei" pitchFamily="34" charset="0"/>
+                <a:ea typeface="Microsoft JhengHei" pitchFamily="34" charset="-122"/>
+                <a:cs typeface="Microsoft JhengHei" pitchFamily="34" charset="-120"/>
+              </a:rPr>
+              <a:t>主推全平台方案（65,000/月）可連續經營 2 年半</a:t>
+            </a:r>
+            <a:endParaRPr lang="en-US" sz="1050" dirty="0"/>
+          </a:p>
+        </p:txBody>
+      </p:sp>
+      <p:sp>
+        <p:nvSpPr>
+          <p:cNvPr id="18" name="Text 16"/>
+          <p:cNvSpPr/>
+          <p:nvPr/>
+        </p:nvSpPr>
+        <p:spPr>
+          <a:xfrm>
+            <a:off x="6583680" y="2999232"/>
             <a:ext cx="868680" cy="713232"/>
           </a:xfrm>
           <a:prstGeom prst="rect">
@@ -10452,7 +10228,7 @@
                 <a:ea typeface="Microsoft JhengHei" pitchFamily="34" charset="-122"/>
                 <a:cs typeface="Microsoft JhengHei" pitchFamily="34" charset="-120"/>
               </a:rPr>
-              <a:t>投入</a:t>
+              <a:t>產出</a:t>
             </a:r>
             <a:endParaRPr lang="en-US" sz="1300" dirty="0"/>
           </a:p>
@@ -10460,13 +10236,13 @@
       </p:sp>
       <p:sp>
         <p:nvSpPr>
-          <p:cNvPr id="17" name="Text 15"/>
-          <p:cNvSpPr/>
-          <p:nvPr/>
-        </p:nvSpPr>
-        <p:spPr>
-          <a:xfrm>
-            <a:off x="7543800" y="2148840"/>
+          <p:cNvPr id="19" name="Text 17"/>
+          <p:cNvSpPr/>
+          <p:nvPr/>
+        </p:nvSpPr>
+        <p:spPr>
+          <a:xfrm>
+            <a:off x="7543800" y="2999232"/>
             <a:ext cx="3657600" cy="713232"/>
           </a:xfrm>
           <a:prstGeom prst="rect">
@@ -10486,7 +10262,7 @@
               <a:buNone/>
             </a:pPr>
             <a:r>
-              <a:rPr lang="en-US" sz="1350" dirty="0">
+              <a:rPr lang="en-US" sz="1350" b="1" dirty="0">
                 <a:solidFill>
                   <a:srgbClr val="FFFFFF"/>
                 </a:solidFill>
@@ -10494,72 +10270,8 @@
                 <a:ea typeface="Microsoft JhengHei" pitchFamily="34" charset="-122"/>
                 <a:cs typeface="Microsoft JhengHei" pitchFamily="34" charset="-120"/>
               </a:rPr>
-              <a:t>建置+主推全平台方案約 5 個月</a:t>
-            </a:r>
-            <a:endParaRPr lang="en-US" sz="1350" dirty="0"/>
-          </a:p>
-        </p:txBody>
-      </p:sp>
-      <p:sp>
-        <p:nvSpPr>
-          <p:cNvPr id="18" name="Text 16"/>
-          <p:cNvSpPr/>
-          <p:nvPr/>
-        </p:nvSpPr>
-        <p:spPr>
-          <a:xfrm>
-            <a:off x="6583680" y="2953512"/>
-            <a:ext cx="868680" cy="713232"/>
-          </a:xfrm>
-          <a:prstGeom prst="rect">
-            <a:avLst/>
-          </a:prstGeom>
-          <a:noFill/>
-          <a:ln/>
-        </p:spPr>
-        <p:txBody>
-          <a:bodyPr wrap="square" lIns="0" tIns="0" rIns="0" bIns="0" rtlCol="0" anchor="ctr"/>
-          <a:lstStyle/>
-          <a:p>
-            <a:pPr indent="0" marL="0">
-              <a:buNone/>
-            </a:pPr>
-            <a:r>
-              <a:rPr lang="en-US" sz="1300" b="1" dirty="0">
-                <a:solidFill>
-                  <a:srgbClr val="BFE8E0"/>
-                </a:solidFill>
-                <a:latin typeface="Microsoft JhengHei" pitchFamily="34" charset="0"/>
-                <a:ea typeface="Microsoft JhengHei" pitchFamily="34" charset="-122"/>
-                <a:cs typeface="Microsoft JhengHei" pitchFamily="34" charset="-120"/>
-              </a:rPr>
-              <a:t>產出</a:t>
-            </a:r>
-            <a:endParaRPr lang="en-US" sz="1300" dirty="0"/>
-          </a:p>
-        </p:txBody>
-      </p:sp>
-      <p:sp>
-        <p:nvSpPr>
-          <p:cNvPr id="19" name="Text 17"/>
-          <p:cNvSpPr/>
-          <p:nvPr/>
-        </p:nvSpPr>
-        <p:spPr>
-          <a:xfrm>
-            <a:off x="7543800" y="2953512"/>
-            <a:ext cx="3657600" cy="713232"/>
-          </a:xfrm>
-          <a:prstGeom prst="rect">
-            <a:avLst/>
-          </a:prstGeom>
-          <a:noFill/>
-          <a:ln/>
-        </p:spPr>
-        <p:txBody>
-          <a:bodyPr wrap="square" lIns="0" tIns="0" rIns="0" bIns="0" rtlCol="0" anchor="ctr"/>
-          <a:lstStyle/>
-          <a:p>
+              <a:t>約 390 篇圖文+260 支影音</a:t>
+            </a:r>
             <a:pPr indent="0" marL="0">
               <a:lnSpc>
                 <a:spcPct val="120000"/>
@@ -10569,13 +10281,13 @@
             <a:r>
               <a:rPr lang="en-US" sz="1350" dirty="0">
                 <a:solidFill>
-                  <a:srgbClr val="FFFFFF"/>
-                </a:solidFill>
-                <a:latin typeface="Microsoft JhengHei" pitchFamily="34" charset="0"/>
-                <a:ea typeface="Microsoft JhengHei" pitchFamily="34" charset="-122"/>
-                <a:cs typeface="Microsoft JhengHei" pitchFamily="34" charset="-120"/>
-              </a:rPr>
-              <a:t>110+ 篇內容,6 平台發布</a:t>
+                  <a:srgbClr val="EAF6F3"/>
+                </a:solidFill>
+                <a:latin typeface="Microsoft JhengHei" pitchFamily="34" charset="0"/>
+                <a:ea typeface="Microsoft JhengHei" pitchFamily="34" charset="-122"/>
+                <a:cs typeface="Microsoft JhengHei" pitchFamily="34" charset="-120"/>
+              </a:rPr>
+              <a:t>，6 平台發布</a:t>
             </a:r>
             <a:endParaRPr lang="en-US" sz="1350" dirty="0"/>
           </a:p>
@@ -10589,7 +10301,7 @@
         </p:nvSpPr>
         <p:spPr>
           <a:xfrm>
-            <a:off x="6583680" y="3758184"/>
+            <a:off x="6583680" y="3803904"/>
             <a:ext cx="868680" cy="713232"/>
           </a:xfrm>
           <a:prstGeom prst="rect">
@@ -10628,7 +10340,7 @@
         </p:nvSpPr>
         <p:spPr>
           <a:xfrm>
-            <a:off x="7543800" y="3758184"/>
+            <a:off x="7543800" y="3803904"/>
             <a:ext cx="3657600" cy="713232"/>
           </a:xfrm>
           <a:prstGeom prst="rect">
@@ -10650,7 +10362,7 @@
             <a:r>
               <a:rPr lang="en-US" sz="1350" dirty="0">
                 <a:solidFill>
-                  <a:srgbClr val="FFFFFF"/>
+                  <a:srgbClr val="EAF6F3"/>
                 </a:solidFill>
                 <a:latin typeface="Microsoft JhengHei" pitchFamily="34" charset="0"/>
                 <a:ea typeface="Microsoft JhengHei" pitchFamily="34" charset="-122"/>
@@ -10670,7 +10382,7 @@
         </p:nvSpPr>
         <p:spPr>
           <a:xfrm>
-            <a:off x="6583680" y="4562856"/>
+            <a:off x="6583680" y="4608576"/>
             <a:ext cx="868680" cy="713232"/>
           </a:xfrm>
           <a:prstGeom prst="rect">
@@ -10709,7 +10421,7 @@
         </p:nvSpPr>
         <p:spPr>
           <a:xfrm>
-            <a:off x="7543800" y="4562856"/>
+            <a:off x="7543800" y="4608576"/>
             <a:ext cx="3657600" cy="713232"/>
           </a:xfrm>
           <a:prstGeom prst="rect">
@@ -10731,13 +10443,13 @@
             <a:r>
               <a:rPr lang="en-US" sz="1350" dirty="0">
                 <a:solidFill>
-                  <a:srgbClr val="FFFFFF"/>
-                </a:solidFill>
-                <a:latin typeface="Microsoft JhengHei" pitchFamily="34" charset="0"/>
-                <a:ea typeface="Microsoft JhengHei" pitchFamily="34" charset="-122"/>
-                <a:cs typeface="Microsoft JhengHei" pitchFamily="34" charset="-120"/>
-              </a:rPr>
-              <a:t>素材可再投廣告,持續累積</a:t>
+                  <a:srgbClr val="EAF6F3"/>
+                </a:solidFill>
+                <a:latin typeface="Microsoft JhengHei" pitchFamily="34" charset="0"/>
+                <a:ea typeface="Microsoft JhengHei" pitchFamily="34" charset="-122"/>
+                <a:cs typeface="Microsoft JhengHei" pitchFamily="34" charset="-120"/>
+              </a:rPr>
+              <a:t>素材可再投廣告，持續累積</a:t>
             </a:r>
             <a:endParaRPr lang="en-US" sz="1350" dirty="0"/>
           </a:p>
@@ -10776,7 +10488,7 @@
                 <a:ea typeface="Microsoft JhengHei" pitchFamily="34" charset="-122"/>
                 <a:cs typeface="Microsoft JhengHei" pitchFamily="34" charset="-120"/>
               </a:rPr>
-              <a:t>真人合作買的是人、檔期與關係,約滿即散;數位人買的,是留得下來的資產。</a:t>
+              <a:t>真人合作買的是檔期與關係，約滿即散；同一筆錢投入數位人，買的是留得下來的資產。</a:t>
             </a:r>
             <a:endParaRPr lang="en-US" sz="1500" dirty="0"/>
           </a:p>
@@ -10815,7 +10527,7 @@
                 <a:ea typeface="Microsoft JhengHei" pitchFamily="34" charset="-122"/>
                 <a:cs typeface="Microsoft JhengHei" pitchFamily="34" charset="-120"/>
               </a:rPr>
-              <a:t>為尊重合作對象,本案例不具名;數據為自有頻道官方後台實測。</a:t>
+              <a:t>為尊重合作對象，本案例不具名；數據為自有頻道官方後台實測。</a:t>
             </a:r>
             <a:endParaRPr lang="en-US" sz="1050" dirty="0"/>
           </a:p>
@@ -10886,7 +10598,7 @@
                 <a:ea typeface="Microsoft JhengHei" pitchFamily="34" charset="-122"/>
                 <a:cs typeface="Microsoft JhengHei" pitchFamily="34" charset="-120"/>
               </a:rPr>
-              <a:t>DIFFERENTIATION|跟一般代操比</a:t>
+              <a:t>BREAKTHROUGH｜跟傳統製作比</a:t>
             </a:r>
             <a:endParaRPr lang="en-US" sz="1100" dirty="0"/>
           </a:p>
@@ -10925,7 +10637,7 @@
                 <a:ea typeface="Microsoft JhengHei" pitchFamily="34" charset="-122"/>
                 <a:cs typeface="Microsoft JhengHei" pitchFamily="34" charset="-120"/>
               </a:rPr>
-              <a:t>跟一般社群代操,差在哪?</a:t>
+              <a:t>傳統的限制，就是我們的突破</a:t>
             </a:r>
             <a:endParaRPr lang="en-US" sz="3000" dirty="0"/>
           </a:p>
@@ -10964,7 +10676,7 @@
                 <a:ea typeface="Microsoft JhengHei" pitchFamily="34" charset="-122"/>
                 <a:cs typeface="Microsoft JhengHei" pitchFamily="34" charset="-120"/>
               </a:rPr>
-              <a:t>傳統社群代操</a:t>
+              <a:t>傳統製作的限制</a:t>
             </a:r>
             <a:endParaRPr lang="en-US" sz="1250" dirty="0"/>
           </a:p>
@@ -11003,7 +10715,7 @@
                 <a:ea typeface="Microsoft JhengHei" pitchFamily="34" charset="-122"/>
                 <a:cs typeface="Microsoft JhengHei" pitchFamily="34" charset="-120"/>
               </a:rPr>
-              <a:t>兌心 數位人 KOL</a:t>
+              <a:t>我們的 AIGC 突破</a:t>
             </a:r>
             <a:endParaRPr lang="en-US" sz="1250" dirty="0"/>
           </a:p>
@@ -11017,12 +10729,12 @@
         </p:nvSpPr>
         <p:spPr>
           <a:xfrm>
-            <a:off x="822960" y="1627632"/>
-            <a:ext cx="10543032" cy="731520"/>
+            <a:off x="822960" y="1664208"/>
+            <a:ext cx="10543032" cy="1280160"/>
           </a:xfrm>
           <a:prstGeom prst="roundRect">
             <a:avLst>
-              <a:gd name="adj" fmla="val 7500"/>
+              <a:gd name="adj" fmla="val 5000"/>
             </a:avLst>
           </a:prstGeom>
           <a:solidFill>
@@ -11033,30 +10745,77 @@
       </p:sp>
       <p:sp>
         <p:nvSpPr>
-          <p:cNvPr id="7" name="Text 5"/>
-          <p:cNvSpPr/>
-          <p:nvPr/>
-        </p:nvSpPr>
-        <p:spPr>
-          <a:xfrm>
-            <a:off x="1097280" y="1700784"/>
-            <a:ext cx="2011680" cy="585216"/>
-          </a:xfrm>
-          <a:prstGeom prst="rect">
-            <a:avLst/>
-          </a:prstGeom>
-          <a:noFill/>
-          <a:ln/>
-        </p:spPr>
-        <p:txBody>
-          <a:bodyPr wrap="square" lIns="0" tIns="0" rIns="0" bIns="0" rtlCol="0" anchor="ctr"/>
-          <a:lstStyle/>
-          <a:p>
-            <a:pPr indent="0" marL="0">
-              <a:buNone/>
-            </a:pPr>
-            <a:r>
-              <a:rPr lang="en-US" sz="1350" b="1" dirty="0">
+          <p:cNvPr id="7" name="Shape 5"/>
+          <p:cNvSpPr/>
+          <p:nvPr/>
+        </p:nvSpPr>
+        <p:spPr>
+          <a:xfrm>
+            <a:off x="1115568" y="2020824"/>
+            <a:ext cx="566928" cy="566928"/>
+          </a:xfrm>
+          <a:prstGeom prst="ellipse">
+            <a:avLst/>
+          </a:prstGeom>
+          <a:solidFill>
+            <a:srgbClr val="1E6E64"/>
+          </a:solidFill>
+          <a:ln/>
+        </p:spPr>
+      </p:sp>
+      <p:pic>
+        <p:nvPicPr>
+          <p:cNvPr id="8" name="Image 0" descr="preencoded.png">    </p:cNvPr>
+          <p:cNvPicPr>
+            <a:picLocks noChangeAspect="1"/>
+          </p:cNvPicPr>
+          <p:nvPr/>
+        </p:nvPicPr>
+        <p:blipFill>
+          <a:blip r:embed="rId1"/>
+          <a:stretch>
+            <a:fillRect/>
+          </a:stretch>
+        </p:blipFill>
+        <p:spPr>
+          <a:xfrm>
+            <a:off x="1240292" y="2145548"/>
+            <a:ext cx="317480" cy="317480"/>
+          </a:xfrm>
+          <a:prstGeom prst="rect">
+            <a:avLst/>
+          </a:prstGeom>
+        </p:spPr>
+      </p:pic>
+      <p:sp>
+        <p:nvSpPr>
+          <p:cNvPr id="9" name="Text 6"/>
+          <p:cNvSpPr/>
+          <p:nvPr/>
+        </p:nvSpPr>
+        <p:spPr>
+          <a:xfrm>
+            <a:off x="1920240" y="1773936"/>
+            <a:ext cx="1325880" cy="1060704"/>
+          </a:xfrm>
+          <a:prstGeom prst="rect">
+            <a:avLst/>
+          </a:prstGeom>
+          <a:noFill/>
+          <a:ln/>
+        </p:spPr>
+        <p:txBody>
+          <a:bodyPr wrap="square" lIns="0" tIns="0" rIns="0" bIns="0" rtlCol="0" anchor="ctr"/>
+          <a:lstStyle/>
+          <a:p>
+            <a:pPr indent="0" marL="0">
+              <a:lnSpc>
+                <a:spcPct val="110000"/>
+              </a:lnSpc>
+              <a:buNone/>
+            </a:pPr>
+            <a:r>
+              <a:rPr lang="en-US" sz="1500" b="1" dirty="0">
                 <a:solidFill>
                   <a:srgbClr val="FFFFFF"/>
                 </a:solidFill>
@@ -11064,22 +10823,22 @@
                 <a:ea typeface="Microsoft JhengHei" pitchFamily="34" charset="-122"/>
                 <a:cs typeface="Microsoft JhengHei" pitchFamily="34" charset="-120"/>
               </a:rPr>
-              <a:t>專屬代言人</a:t>
-            </a:r>
-            <a:endParaRPr lang="en-US" sz="1350" dirty="0"/>
-          </a:p>
-        </p:txBody>
-      </p:sp>
-      <p:sp>
-        <p:nvSpPr>
-          <p:cNvPr id="8" name="Text 6"/>
-          <p:cNvSpPr/>
-          <p:nvPr/>
-        </p:nvSpPr>
-        <p:spPr>
-          <a:xfrm>
-            <a:off x="3291840" y="1700784"/>
-            <a:ext cx="3931920" cy="585216"/>
+              <a:t>場景生成</a:t>
+            </a:r>
+            <a:endParaRPr lang="en-US" sz="1500" dirty="0"/>
+          </a:p>
+        </p:txBody>
+      </p:sp>
+      <p:sp>
+        <p:nvSpPr>
+          <p:cNvPr id="10" name="Text 7"/>
+          <p:cNvSpPr/>
+          <p:nvPr/>
+        </p:nvSpPr>
+        <p:spPr>
+          <a:xfrm>
+            <a:off x="3291840" y="1773936"/>
+            <a:ext cx="3931920" cy="1060704"/>
           </a:xfrm>
           <a:prstGeom prst="rect">
             <a:avLst/>
@@ -11093,7 +10852,7 @@
           <a:p>
             <a:pPr algn="ctr" indent="0" marL="0">
               <a:lnSpc>
-                <a:spcPct val="115000"/>
+                <a:spcPct val="120000"/>
               </a:lnSpc>
               <a:buNone/>
             </a:pPr>
@@ -11106,7 +10865,7 @@
                 <a:ea typeface="Microsoft JhengHei" pitchFamily="34" charset="-122"/>
                 <a:cs typeface="Microsoft JhengHei" pitchFamily="34" charset="-120"/>
               </a:rPr>
-              <a:t>無,內容掛在品牌帳號名下</a:t>
+              <a:t>場地、天氣、預算——實拍一個都少不了</a:t>
             </a:r>
             <a:endParaRPr lang="en-US" sz="1200" dirty="0"/>
           </a:p>
@@ -11114,14 +10873,14 @@
       </p:sp>
       <p:sp>
         <p:nvSpPr>
-          <p:cNvPr id="9" name="Text 7"/>
-          <p:cNvSpPr/>
-          <p:nvPr/>
-        </p:nvSpPr>
-        <p:spPr>
-          <a:xfrm>
-            <a:off x="7406640" y="1700784"/>
-            <a:ext cx="3931920" cy="585216"/>
+          <p:cNvPr id="11" name="Text 8"/>
+          <p:cNvSpPr/>
+          <p:nvPr/>
+        </p:nvSpPr>
+        <p:spPr>
+          <a:xfrm>
+            <a:off x="7406640" y="1773936"/>
+            <a:ext cx="3931920" cy="1060704"/>
           </a:xfrm>
           <a:prstGeom prst="rect">
             <a:avLst/>
@@ -11135,7 +10894,7 @@
           <a:p>
             <a:pPr algn="ctr" indent="0" marL="0">
               <a:lnSpc>
-                <a:spcPct val="115000"/>
+                <a:spcPct val="120000"/>
               </a:lnSpc>
               <a:buNone/>
             </a:pPr>
@@ -11148,7 +10907,7 @@
                 <a:ea typeface="Microsoft JhengHei" pitchFamily="34" charset="-122"/>
                 <a:cs typeface="Microsoft JhengHei" pitchFamily="34" charset="-120"/>
               </a:rPr>
-              <a:t>專屬數位人角色 IP,歸屬品牌</a:t>
+              <a:t>超乎想像的影片場景：深海、太空、雪山，想拍哪就拍哪</a:t>
             </a:r>
             <a:endParaRPr lang="en-US" sz="1200" dirty="0"/>
           </a:p>
@@ -11156,18 +10915,18 @@
       </p:sp>
       <p:sp>
         <p:nvSpPr>
-          <p:cNvPr id="10" name="Shape 8"/>
-          <p:cNvSpPr/>
-          <p:nvPr/>
-        </p:nvSpPr>
-        <p:spPr>
-          <a:xfrm>
-            <a:off x="822960" y="2487168"/>
-            <a:ext cx="10543032" cy="731520"/>
+          <p:cNvPr id="12" name="Shape 9"/>
+          <p:cNvSpPr/>
+          <p:nvPr/>
+        </p:nvSpPr>
+        <p:spPr>
+          <a:xfrm>
+            <a:off x="822960" y="3090672"/>
+            <a:ext cx="10543032" cy="1280160"/>
           </a:xfrm>
           <a:prstGeom prst="roundRect">
             <a:avLst>
-              <a:gd name="adj" fmla="val 7500"/>
+              <a:gd name="adj" fmla="val 5000"/>
             </a:avLst>
           </a:prstGeom>
           <a:solidFill>
@@ -11178,30 +10937,77 @@
       </p:sp>
       <p:sp>
         <p:nvSpPr>
-          <p:cNvPr id="11" name="Text 9"/>
-          <p:cNvSpPr/>
-          <p:nvPr/>
-        </p:nvSpPr>
-        <p:spPr>
-          <a:xfrm>
-            <a:off x="1097280" y="2560320"/>
-            <a:ext cx="2011680" cy="585216"/>
-          </a:xfrm>
-          <a:prstGeom prst="rect">
-            <a:avLst/>
-          </a:prstGeom>
-          <a:noFill/>
-          <a:ln/>
-        </p:spPr>
-        <p:txBody>
-          <a:bodyPr wrap="square" lIns="0" tIns="0" rIns="0" bIns="0" rtlCol="0" anchor="ctr"/>
-          <a:lstStyle/>
-          <a:p>
-            <a:pPr indent="0" marL="0">
-              <a:buNone/>
-            </a:pPr>
-            <a:r>
-              <a:rPr lang="en-US" sz="1350" b="1" dirty="0">
+          <p:cNvPr id="13" name="Shape 10"/>
+          <p:cNvSpPr/>
+          <p:nvPr/>
+        </p:nvSpPr>
+        <p:spPr>
+          <a:xfrm>
+            <a:off x="1115568" y="3447288"/>
+            <a:ext cx="566928" cy="566928"/>
+          </a:xfrm>
+          <a:prstGeom prst="ellipse">
+            <a:avLst/>
+          </a:prstGeom>
+          <a:solidFill>
+            <a:srgbClr val="1E6E64"/>
+          </a:solidFill>
+          <a:ln/>
+        </p:spPr>
+      </p:sp>
+      <p:pic>
+        <p:nvPicPr>
+          <p:cNvPr id="14" name="Image 1" descr="preencoded.png">    </p:cNvPr>
+          <p:cNvPicPr>
+            <a:picLocks noChangeAspect="1"/>
+          </p:cNvPicPr>
+          <p:nvPr/>
+        </p:nvPicPr>
+        <p:blipFill>
+          <a:blip r:embed="rId2"/>
+          <a:stretch>
+            <a:fillRect/>
+          </a:stretch>
+        </p:blipFill>
+        <p:spPr>
+          <a:xfrm>
+            <a:off x="1240292" y="3572012"/>
+            <a:ext cx="317480" cy="317480"/>
+          </a:xfrm>
+          <a:prstGeom prst="rect">
+            <a:avLst/>
+          </a:prstGeom>
+        </p:spPr>
+      </p:pic>
+      <p:sp>
+        <p:nvSpPr>
+          <p:cNvPr id="15" name="Text 11"/>
+          <p:cNvSpPr/>
+          <p:nvPr/>
+        </p:nvSpPr>
+        <p:spPr>
+          <a:xfrm>
+            <a:off x="1920240" y="3200400"/>
+            <a:ext cx="1325880" cy="1060704"/>
+          </a:xfrm>
+          <a:prstGeom prst="rect">
+            <a:avLst/>
+          </a:prstGeom>
+          <a:noFill/>
+          <a:ln/>
+        </p:spPr>
+        <p:txBody>
+          <a:bodyPr wrap="square" lIns="0" tIns="0" rIns="0" bIns="0" rtlCol="0" anchor="ctr"/>
+          <a:lstStyle/>
+          <a:p>
+            <a:pPr indent="0" marL="0">
+              <a:lnSpc>
+                <a:spcPct val="110000"/>
+              </a:lnSpc>
+              <a:buNone/>
+            </a:pPr>
+            <a:r>
+              <a:rPr lang="en-US" sz="1500" b="1" dirty="0">
                 <a:solidFill>
                   <a:srgbClr val="FFFFFF"/>
                 </a:solidFill>
@@ -11209,22 +11015,22 @@
                 <a:ea typeface="Microsoft JhengHei" pitchFamily="34" charset="-122"/>
                 <a:cs typeface="Microsoft JhengHei" pitchFamily="34" charset="-120"/>
               </a:rPr>
-              <a:t>短影音</a:t>
-            </a:r>
-            <a:endParaRPr lang="en-US" sz="1350" dirty="0"/>
-          </a:p>
-        </p:txBody>
-      </p:sp>
-      <p:sp>
-        <p:nvSpPr>
-          <p:cNvPr id="12" name="Text 10"/>
-          <p:cNvSpPr/>
-          <p:nvPr/>
-        </p:nvSpPr>
-        <p:spPr>
-          <a:xfrm>
-            <a:off x="3291840" y="2560320"/>
-            <a:ext cx="3931920" cy="585216"/>
+              <a:t>製作效率</a:t>
+            </a:r>
+            <a:endParaRPr lang="en-US" sz="1500" dirty="0"/>
+          </a:p>
+        </p:txBody>
+      </p:sp>
+      <p:sp>
+        <p:nvSpPr>
+          <p:cNvPr id="16" name="Text 12"/>
+          <p:cNvSpPr/>
+          <p:nvPr/>
+        </p:nvSpPr>
+        <p:spPr>
+          <a:xfrm>
+            <a:off x="3291840" y="3200400"/>
+            <a:ext cx="3931920" cy="1060704"/>
           </a:xfrm>
           <a:prstGeom prst="rect">
             <a:avLst/>
@@ -11238,7 +11044,7 @@
           <a:p>
             <a:pPr algn="ctr" indent="0" marL="0">
               <a:lnSpc>
-                <a:spcPct val="115000"/>
+                <a:spcPct val="120000"/>
               </a:lnSpc>
               <a:buNone/>
             </a:pPr>
@@ -11251,7 +11057,7 @@
                 <a:ea typeface="Microsoft JhengHei" pitchFamily="34" charset="-122"/>
                 <a:cs typeface="Microsoft JhengHei" pitchFamily="34" charset="-120"/>
               </a:rPr>
-              <a:t>多數另計(+1-2 萬/月)</a:t>
+              <a:t>一支影片動輒數週：檔期、拍攝、後製環環相扣</a:t>
             </a:r>
             <a:endParaRPr lang="en-US" sz="1200" dirty="0"/>
           </a:p>
@@ -11259,14 +11065,14 @@
       </p:sp>
       <p:sp>
         <p:nvSpPr>
-          <p:cNvPr id="13" name="Text 11"/>
-          <p:cNvSpPr/>
-          <p:nvPr/>
-        </p:nvSpPr>
-        <p:spPr>
-          <a:xfrm>
-            <a:off x="7406640" y="2560320"/>
-            <a:ext cx="3931920" cy="585216"/>
+          <p:cNvPr id="17" name="Text 13"/>
+          <p:cNvSpPr/>
+          <p:nvPr/>
+        </p:nvSpPr>
+        <p:spPr>
+          <a:xfrm>
+            <a:off x="7406640" y="3200400"/>
+            <a:ext cx="3931920" cy="1060704"/>
           </a:xfrm>
           <a:prstGeom prst="rect">
             <a:avLst/>
@@ -11280,7 +11086,7 @@
           <a:p>
             <a:pPr algn="ctr" indent="0" marL="0">
               <a:lnSpc>
-                <a:spcPct val="115000"/>
+                <a:spcPct val="120000"/>
               </a:lnSpc>
               <a:buNone/>
             </a:pPr>
@@ -11293,7 +11099,7 @@
                 <a:ea typeface="Microsoft JhengHei" pitchFamily="34" charset="-122"/>
                 <a:cs typeface="Microsoft JhengHei" pitchFamily="34" charset="-120"/>
               </a:rPr>
-              <a:t>方案內建,每週 1-2 支</a:t>
+              <a:t>AI 內容產線，週週多平台更新不斷檔</a:t>
             </a:r>
             <a:endParaRPr lang="en-US" sz="1200" dirty="0"/>
           </a:p>
@@ -11301,18 +11107,18 @@
       </p:sp>
       <p:sp>
         <p:nvSpPr>
-          <p:cNvPr id="14" name="Shape 12"/>
-          <p:cNvSpPr/>
-          <p:nvPr/>
-        </p:nvSpPr>
-        <p:spPr>
-          <a:xfrm>
-            <a:off x="822960" y="3346704"/>
-            <a:ext cx="10543032" cy="731520"/>
+          <p:cNvPr id="18" name="Shape 14"/>
+          <p:cNvSpPr/>
+          <p:nvPr/>
+        </p:nvSpPr>
+        <p:spPr>
+          <a:xfrm>
+            <a:off x="822960" y="4517136"/>
+            <a:ext cx="10543032" cy="1280160"/>
           </a:xfrm>
           <a:prstGeom prst="roundRect">
             <a:avLst>
-              <a:gd name="adj" fmla="val 7500"/>
+              <a:gd name="adj" fmla="val 5000"/>
             </a:avLst>
           </a:prstGeom>
           <a:solidFill>
@@ -11323,30 +11129,77 @@
       </p:sp>
       <p:sp>
         <p:nvSpPr>
-          <p:cNvPr id="15" name="Text 13"/>
-          <p:cNvSpPr/>
-          <p:nvPr/>
-        </p:nvSpPr>
-        <p:spPr>
-          <a:xfrm>
-            <a:off x="1097280" y="3419856"/>
-            <a:ext cx="2011680" cy="585216"/>
-          </a:xfrm>
-          <a:prstGeom prst="rect">
-            <a:avLst/>
-          </a:prstGeom>
-          <a:noFill/>
-          <a:ln/>
-        </p:spPr>
-        <p:txBody>
-          <a:bodyPr wrap="square" lIns="0" tIns="0" rIns="0" bIns="0" rtlCol="0" anchor="ctr"/>
-          <a:lstStyle/>
-          <a:p>
-            <a:pPr indent="0" marL="0">
-              <a:buNone/>
-            </a:pPr>
-            <a:r>
-              <a:rPr lang="en-US" sz="1350" b="1" dirty="0">
+          <p:cNvPr id="19" name="Shape 15"/>
+          <p:cNvSpPr/>
+          <p:nvPr/>
+        </p:nvSpPr>
+        <p:spPr>
+          <a:xfrm>
+            <a:off x="1115568" y="4873752"/>
+            <a:ext cx="566928" cy="566928"/>
+          </a:xfrm>
+          <a:prstGeom prst="ellipse">
+            <a:avLst/>
+          </a:prstGeom>
+          <a:solidFill>
+            <a:srgbClr val="1E6E64"/>
+          </a:solidFill>
+          <a:ln/>
+        </p:spPr>
+      </p:sp>
+      <p:pic>
+        <p:nvPicPr>
+          <p:cNvPr id="20" name="Image 2" descr="preencoded.png">    </p:cNvPr>
+          <p:cNvPicPr>
+            <a:picLocks noChangeAspect="1"/>
+          </p:cNvPicPr>
+          <p:nvPr/>
+        </p:nvPicPr>
+        <p:blipFill>
+          <a:blip r:embed="rId3"/>
+          <a:stretch>
+            <a:fillRect/>
+          </a:stretch>
+        </p:blipFill>
+        <p:spPr>
+          <a:xfrm>
+            <a:off x="1240292" y="4998476"/>
+            <a:ext cx="317480" cy="317480"/>
+          </a:xfrm>
+          <a:prstGeom prst="rect">
+            <a:avLst/>
+          </a:prstGeom>
+        </p:spPr>
+      </p:pic>
+      <p:sp>
+        <p:nvSpPr>
+          <p:cNvPr id="21" name="Text 16"/>
+          <p:cNvSpPr/>
+          <p:nvPr/>
+        </p:nvSpPr>
+        <p:spPr>
+          <a:xfrm>
+            <a:off x="1920240" y="4626864"/>
+            <a:ext cx="1325880" cy="1060704"/>
+          </a:xfrm>
+          <a:prstGeom prst="rect">
+            <a:avLst/>
+          </a:prstGeom>
+          <a:noFill/>
+          <a:ln/>
+        </p:spPr>
+        <p:txBody>
+          <a:bodyPr wrap="square" lIns="0" tIns="0" rIns="0" bIns="0" rtlCol="0" anchor="ctr"/>
+          <a:lstStyle/>
+          <a:p>
+            <a:pPr indent="0" marL="0">
+              <a:lnSpc>
+                <a:spcPct val="110000"/>
+              </a:lnSpc>
+              <a:buNone/>
+            </a:pPr>
+            <a:r>
+              <a:rPr lang="en-US" sz="1500" b="1" dirty="0">
                 <a:solidFill>
                   <a:srgbClr val="FFFFFF"/>
                 </a:solidFill>
@@ -11354,22 +11207,22 @@
                 <a:ea typeface="Microsoft JhengHei" pitchFamily="34" charset="-122"/>
                 <a:cs typeface="Microsoft JhengHei" pitchFamily="34" charset="-120"/>
               </a:rPr>
-              <a:t>發布執行</a:t>
-            </a:r>
-            <a:endParaRPr lang="en-US" sz="1350" dirty="0"/>
-          </a:p>
-        </p:txBody>
-      </p:sp>
-      <p:sp>
-        <p:nvSpPr>
-          <p:cNvPr id="16" name="Text 14"/>
-          <p:cNvSpPr/>
-          <p:nvPr/>
-        </p:nvSpPr>
-        <p:spPr>
-          <a:xfrm>
-            <a:off x="3291840" y="3419856"/>
-            <a:ext cx="3931920" cy="585216"/>
+              <a:t>敏感產業</a:t>
+            </a:r>
+            <a:endParaRPr lang="en-US" sz="1500" dirty="0"/>
+          </a:p>
+        </p:txBody>
+      </p:sp>
+      <p:sp>
+        <p:nvSpPr>
+          <p:cNvPr id="22" name="Text 17"/>
+          <p:cNvSpPr/>
+          <p:nvPr/>
+        </p:nvSpPr>
+        <p:spPr>
+          <a:xfrm>
+            <a:off x="3291840" y="4626864"/>
+            <a:ext cx="3931920" cy="1060704"/>
           </a:xfrm>
           <a:prstGeom prst="rect">
             <a:avLst/>
@@ -11383,7 +11236,7 @@
           <a:p>
             <a:pPr algn="ctr" indent="0" marL="0">
               <a:lnSpc>
-                <a:spcPct val="115000"/>
+                <a:spcPct val="120000"/>
               </a:lnSpc>
               <a:buNone/>
             </a:pPr>
@@ -11396,7 +11249,7 @@
                 <a:ea typeface="Microsoft JhengHei" pitchFamily="34" charset="-122"/>
                 <a:cs typeface="Microsoft JhengHei" pitchFamily="34" charset="-120"/>
               </a:rPr>
-              <a:t>人工排程,單一平台為主</a:t>
+              <a:t>合規敏感品類，真人不願接、接了有翻車風險</a:t>
             </a:r>
             <a:endParaRPr lang="en-US" sz="1200" dirty="0"/>
           </a:p>
@@ -11404,14 +11257,14 @@
       </p:sp>
       <p:sp>
         <p:nvSpPr>
-          <p:cNvPr id="17" name="Text 15"/>
-          <p:cNvSpPr/>
-          <p:nvPr/>
-        </p:nvSpPr>
-        <p:spPr>
-          <a:xfrm>
-            <a:off x="7406640" y="3419856"/>
-            <a:ext cx="3931920" cy="585216"/>
+          <p:cNvPr id="23" name="Text 18"/>
+          <p:cNvSpPr/>
+          <p:nvPr/>
+        </p:nvSpPr>
+        <p:spPr>
+          <a:xfrm>
+            <a:off x="7406640" y="4626864"/>
+            <a:ext cx="3931920" cy="1060704"/>
           </a:xfrm>
           <a:prstGeom prst="rect">
             <a:avLst/>
@@ -11425,7 +11278,7 @@
           <a:p>
             <a:pPr algn="ctr" indent="0" marL="0">
               <a:lnSpc>
-                <a:spcPct val="115000"/>
+                <a:spcPct val="120000"/>
               </a:lnSpc>
               <a:buNone/>
             </a:pPr>
@@ -11438,7 +11291,7 @@
                 <a:ea typeface="Microsoft JhengHei" pitchFamily="34" charset="-122"/>
                 <a:cs typeface="Microsoft JhengHei" pitchFamily="34" charset="-120"/>
               </a:rPr>
-              <a:t>素材依平台再製,自動化 6 平台發布</a:t>
+              <a:t>數位人沒有包袱，已有敏感產業實際營運案例</a:t>
             </a:r>
             <a:endParaRPr lang="en-US" sz="1200" dirty="0"/>
           </a:p>
@@ -11446,297 +11299,7 @@
       </p:sp>
       <p:sp>
         <p:nvSpPr>
-          <p:cNvPr id="18" name="Shape 16"/>
-          <p:cNvSpPr/>
-          <p:nvPr/>
-        </p:nvSpPr>
-        <p:spPr>
-          <a:xfrm>
-            <a:off x="822960" y="4206240"/>
-            <a:ext cx="10543032" cy="731520"/>
-          </a:xfrm>
-          <a:prstGeom prst="roundRect">
-            <a:avLst>
-              <a:gd name="adj" fmla="val 7500"/>
-            </a:avLst>
-          </a:prstGeom>
-          <a:solidFill>
-            <a:srgbClr val="1A2440"/>
-          </a:solidFill>
-          <a:ln/>
-        </p:spPr>
-      </p:sp>
-      <p:sp>
-        <p:nvSpPr>
-          <p:cNvPr id="19" name="Text 17"/>
-          <p:cNvSpPr/>
-          <p:nvPr/>
-        </p:nvSpPr>
-        <p:spPr>
-          <a:xfrm>
-            <a:off x="1097280" y="4279392"/>
-            <a:ext cx="2011680" cy="585216"/>
-          </a:xfrm>
-          <a:prstGeom prst="rect">
-            <a:avLst/>
-          </a:prstGeom>
-          <a:noFill/>
-          <a:ln/>
-        </p:spPr>
-        <p:txBody>
-          <a:bodyPr wrap="square" lIns="0" tIns="0" rIns="0" bIns="0" rtlCol="0" anchor="ctr"/>
-          <a:lstStyle/>
-          <a:p>
-            <a:pPr indent="0" marL="0">
-              <a:buNone/>
-            </a:pPr>
-            <a:r>
-              <a:rPr lang="en-US" sz="1350" b="1" dirty="0">
-                <a:solidFill>
-                  <a:srgbClr val="FFFFFF"/>
-                </a:solidFill>
-                <a:latin typeface="Microsoft JhengHei" pitchFamily="34" charset="0"/>
-                <a:ea typeface="Microsoft JhengHei" pitchFamily="34" charset="-122"/>
-                <a:cs typeface="Microsoft JhengHei" pitchFamily="34" charset="-120"/>
-              </a:rPr>
-              <a:t>敏感產業</a:t>
-            </a:r>
-            <a:endParaRPr lang="en-US" sz="1350" dirty="0"/>
-          </a:p>
-        </p:txBody>
-      </p:sp>
-      <p:sp>
-        <p:nvSpPr>
-          <p:cNvPr id="20" name="Text 18"/>
-          <p:cNvSpPr/>
-          <p:nvPr/>
-        </p:nvSpPr>
-        <p:spPr>
-          <a:xfrm>
-            <a:off x="3291840" y="4279392"/>
-            <a:ext cx="3931920" cy="585216"/>
-          </a:xfrm>
-          <a:prstGeom prst="rect">
-            <a:avLst/>
-          </a:prstGeom>
-          <a:noFill/>
-          <a:ln/>
-        </p:spPr>
-        <p:txBody>
-          <a:bodyPr wrap="square" lIns="0" tIns="0" rIns="0" bIns="0" rtlCol="0" anchor="ctr"/>
-          <a:lstStyle/>
-          <a:p>
-            <a:pPr algn="ctr" indent="0" marL="0">
-              <a:lnSpc>
-                <a:spcPct val="115000"/>
-              </a:lnSpc>
-              <a:buNone/>
-            </a:pPr>
-            <a:r>
-              <a:rPr lang="en-US" sz="1200" dirty="0">
-                <a:solidFill>
-                  <a:srgbClr val="8FA0BE"/>
-                </a:solidFill>
-                <a:latin typeface="Microsoft JhengHei" pitchFamily="34" charset="0"/>
-                <a:ea typeface="Microsoft JhengHei" pitchFamily="34" charset="-122"/>
-                <a:cs typeface="Microsoft JhengHei" pitchFamily="34" charset="-120"/>
-              </a:rPr>
-              <a:t>多數不承接</a:t>
-            </a:r>
-            <a:endParaRPr lang="en-US" sz="1200" dirty="0"/>
-          </a:p>
-        </p:txBody>
-      </p:sp>
-      <p:sp>
-        <p:nvSpPr>
-          <p:cNvPr id="21" name="Text 19"/>
-          <p:cNvSpPr/>
-          <p:nvPr/>
-        </p:nvSpPr>
-        <p:spPr>
-          <a:xfrm>
-            <a:off x="7406640" y="4279392"/>
-            <a:ext cx="3931920" cy="585216"/>
-          </a:xfrm>
-          <a:prstGeom prst="rect">
-            <a:avLst/>
-          </a:prstGeom>
-          <a:noFill/>
-          <a:ln/>
-        </p:spPr>
-        <p:txBody>
-          <a:bodyPr wrap="square" lIns="0" tIns="0" rIns="0" bIns="0" rtlCol="0" anchor="ctr"/>
-          <a:lstStyle/>
-          <a:p>
-            <a:pPr algn="ctr" indent="0" marL="0">
-              <a:lnSpc>
-                <a:spcPct val="115000"/>
-              </a:lnSpc>
-              <a:buNone/>
-            </a:pPr>
-            <a:r>
-              <a:rPr lang="en-US" sz="1200" b="1" dirty="0">
-                <a:solidFill>
-                  <a:srgbClr val="C7D6EE"/>
-                </a:solidFill>
-                <a:latin typeface="Microsoft JhengHei" pitchFamily="34" charset="0"/>
-                <a:ea typeface="Microsoft JhengHei" pitchFamily="34" charset="-122"/>
-                <a:cs typeface="Microsoft JhengHei" pitchFamily="34" charset="-120"/>
-              </a:rPr>
-              <a:t>合規框架,有實際營運案例</a:t>
-            </a:r>
-            <a:endParaRPr lang="en-US" sz="1200" dirty="0"/>
-          </a:p>
-        </p:txBody>
-      </p:sp>
-      <p:sp>
-        <p:nvSpPr>
-          <p:cNvPr id="22" name="Shape 20"/>
-          <p:cNvSpPr/>
-          <p:nvPr/>
-        </p:nvSpPr>
-        <p:spPr>
-          <a:xfrm>
-            <a:off x="822960" y="5065776"/>
-            <a:ext cx="10543032" cy="731520"/>
-          </a:xfrm>
-          <a:prstGeom prst="roundRect">
-            <a:avLst>
-              <a:gd name="adj" fmla="val 7500"/>
-            </a:avLst>
-          </a:prstGeom>
-          <a:solidFill>
-            <a:srgbClr val="1A2440"/>
-          </a:solidFill>
-          <a:ln/>
-        </p:spPr>
-      </p:sp>
-      <p:sp>
-        <p:nvSpPr>
-          <p:cNvPr id="23" name="Text 21"/>
-          <p:cNvSpPr/>
-          <p:nvPr/>
-        </p:nvSpPr>
-        <p:spPr>
-          <a:xfrm>
-            <a:off x="1097280" y="5138928"/>
-            <a:ext cx="2011680" cy="585216"/>
-          </a:xfrm>
-          <a:prstGeom prst="rect">
-            <a:avLst/>
-          </a:prstGeom>
-          <a:noFill/>
-          <a:ln/>
-        </p:spPr>
-        <p:txBody>
-          <a:bodyPr wrap="square" lIns="0" tIns="0" rIns="0" bIns="0" rtlCol="0" anchor="ctr"/>
-          <a:lstStyle/>
-          <a:p>
-            <a:pPr indent="0" marL="0">
-              <a:buNone/>
-            </a:pPr>
-            <a:r>
-              <a:rPr lang="en-US" sz="1350" b="1" dirty="0">
-                <a:solidFill>
-                  <a:srgbClr val="FFFFFF"/>
-                </a:solidFill>
-                <a:latin typeface="Microsoft JhengHei" pitchFamily="34" charset="0"/>
-                <a:ea typeface="Microsoft JhengHei" pitchFamily="34" charset="-122"/>
-                <a:cs typeface="Microsoft JhengHei" pitchFamily="34" charset="-120"/>
-              </a:rPr>
-              <a:t>一年後剩下</a:t>
-            </a:r>
-            <a:endParaRPr lang="en-US" sz="1350" dirty="0"/>
-          </a:p>
-        </p:txBody>
-      </p:sp>
-      <p:sp>
-        <p:nvSpPr>
-          <p:cNvPr id="24" name="Text 22"/>
-          <p:cNvSpPr/>
-          <p:nvPr/>
-        </p:nvSpPr>
-        <p:spPr>
-          <a:xfrm>
-            <a:off x="3291840" y="5138928"/>
-            <a:ext cx="3931920" cy="585216"/>
-          </a:xfrm>
-          <a:prstGeom prst="rect">
-            <a:avLst/>
-          </a:prstGeom>
-          <a:noFill/>
-          <a:ln/>
-        </p:spPr>
-        <p:txBody>
-          <a:bodyPr wrap="square" lIns="0" tIns="0" rIns="0" bIns="0" rtlCol="0" anchor="ctr"/>
-          <a:lstStyle/>
-          <a:p>
-            <a:pPr algn="ctr" indent="0" marL="0">
-              <a:lnSpc>
-                <a:spcPct val="115000"/>
-              </a:lnSpc>
-              <a:buNone/>
-            </a:pPr>
-            <a:r>
-              <a:rPr lang="en-US" sz="1200" dirty="0">
-                <a:solidFill>
-                  <a:srgbClr val="8FA0BE"/>
-                </a:solidFill>
-                <a:latin typeface="Microsoft JhengHei" pitchFamily="34" charset="0"/>
-                <a:ea typeface="Microsoft JhengHei" pitchFamily="34" charset="-122"/>
-                <a:cs typeface="Microsoft JhengHei" pitchFamily="34" charset="-120"/>
-              </a:rPr>
-              <a:t>貼文存檔,授權依約</a:t>
-            </a:r>
-            <a:endParaRPr lang="en-US" sz="1200" dirty="0"/>
-          </a:p>
-        </p:txBody>
-      </p:sp>
-      <p:sp>
-        <p:nvSpPr>
-          <p:cNvPr id="25" name="Text 23"/>
-          <p:cNvSpPr/>
-          <p:nvPr/>
-        </p:nvSpPr>
-        <p:spPr>
-          <a:xfrm>
-            <a:off x="7406640" y="5138928"/>
-            <a:ext cx="3931920" cy="585216"/>
-          </a:xfrm>
-          <a:prstGeom prst="rect">
-            <a:avLst/>
-          </a:prstGeom>
-          <a:noFill/>
-          <a:ln/>
-        </p:spPr>
-        <p:txBody>
-          <a:bodyPr wrap="square" lIns="0" tIns="0" rIns="0" bIns="0" rtlCol="0" anchor="ctr"/>
-          <a:lstStyle/>
-          <a:p>
-            <a:pPr algn="ctr" indent="0" marL="0">
-              <a:lnSpc>
-                <a:spcPct val="115000"/>
-              </a:lnSpc>
-              <a:buNone/>
-            </a:pPr>
-            <a:r>
-              <a:rPr lang="en-US" sz="1200" b="1" dirty="0">
-                <a:solidFill>
-                  <a:srgbClr val="C7D6EE"/>
-                </a:solidFill>
-                <a:latin typeface="Microsoft JhengHei" pitchFamily="34" charset="0"/>
-                <a:ea typeface="Microsoft JhengHei" pitchFamily="34" charset="-122"/>
-                <a:cs typeface="Microsoft JhengHei" pitchFamily="34" charset="-120"/>
-              </a:rPr>
-              <a:t>素材庫+帳號+角色 IP,全歸品牌</a:t>
-            </a:r>
-            <a:endParaRPr lang="en-US" sz="1200" dirty="0"/>
-          </a:p>
-        </p:txBody>
-      </p:sp>
-      <p:sp>
-        <p:nvSpPr>
-          <p:cNvPr id="26" name="Text 24"/>
+          <p:cNvPr id="24" name="Text 19"/>
           <p:cNvSpPr/>
           <p:nvPr/>
         </p:nvSpPr>
@@ -11767,7 +11330,7 @@
                 <a:ea typeface="Microsoft JhengHei" pitchFamily="34" charset="-122"/>
                 <a:cs typeface="Microsoft JhengHei" pitchFamily="34" charset="-120"/>
               </a:rPr>
-              <a:t>市場上也有低價代營 IP 的服務——多半不求質也不求量,更不含社群平台的實際營運。</a:t>
+              <a:t>市場上也有低價代營 IP 的服務——多半不求質也不求量，更不含社群平台的實際營運。</a:t>
             </a:r>
             <a:endParaRPr lang="en-US" sz="1150" dirty="0"/>
           </a:p>
@@ -11838,7 +11401,7 @@
                 <a:ea typeface="Microsoft JhengHei" pitchFamily="34" charset="-122"/>
                 <a:cs typeface="Microsoft JhengHei" pitchFamily="34" charset="-120"/>
               </a:rPr>
-              <a:t>CASE 01|形象型數位人</a:t>
+              <a:t>CASE 01｜形象型數位人</a:t>
             </a:r>
             <a:endParaRPr lang="en-US" sz="1100" dirty="0"/>
           </a:p>
@@ -11955,7 +11518,7 @@
                 <a:ea typeface="Microsoft JhengHei" pitchFamily="34" charset="-122"/>
                 <a:cs typeface="Microsoft JhengHei" pitchFamily="34" charset="-120"/>
               </a:rPr>
-              <a:t>「今天又要去尋找寶藏咖啡廳!」</a:t>
+              <a:t>「今天又要去尋找寶藏咖啡廳！」</a:t>
             </a:r>
             <a:endParaRPr lang="en-US" sz="1600" dirty="0"/>
           </a:p>
@@ -12117,7 +11680,7 @@
                 <a:ea typeface="Microsoft JhengHei" pitchFamily="34" charset="-122"/>
                 <a:cs typeface="Microsoft JhengHei" pitchFamily="34" charset="-120"/>
               </a:rPr>
-              <a:t>溫暖隨性,話不多,讓畫面說話</a:t>
+              <a:t>溫暖隨性，話不多，讓畫面說話</a:t>
             </a:r>
             <a:endParaRPr lang="en-US" sz="1350" dirty="0"/>
           </a:p>
@@ -12405,7 +11968,7 @@
                 <a:ea typeface="Microsoft JhengHei" pitchFamily="34" charset="-122"/>
                 <a:cs typeface="Microsoft JhengHei" pitchFamily="34" charset="-120"/>
               </a:rPr>
-              <a:t>同一人設可延伸為動態影片與舞蹈短片,會議中可播放展示</a:t>
+              <a:t>同一人設可延伸為動態影片與舞蹈短片，會議中可播放展示</a:t>
             </a:r>
             <a:endParaRPr lang="en-US" sz="1150" dirty="0"/>
           </a:p>
@@ -12476,7 +12039,7 @@
                 <a:ea typeface="Microsoft JhengHei" pitchFamily="34" charset="-122"/>
                 <a:cs typeface="Microsoft JhengHei" pitchFamily="34" charset="-120"/>
               </a:rPr>
-              <a:t>CASE 02|知識型數位人</a:t>
+              <a:t>CASE 02｜知識型數位人</a:t>
             </a:r>
             <a:endParaRPr lang="en-US" sz="1100" dirty="0"/>
           </a:p>
@@ -12593,7 +12156,7 @@
                 <a:ea typeface="Microsoft JhengHei" pitchFamily="34" charset="-122"/>
                 <a:cs typeface="Microsoft JhengHei" pitchFamily="34" charset="-120"/>
               </a:rPr>
-              <a:t>「今天,你發現規則了嗎?」</a:t>
+              <a:t>「今天，你發現規則了嗎？」</a:t>
             </a:r>
             <a:endParaRPr lang="en-US" sz="1600" dirty="0"/>
           </a:p>
@@ -12755,7 +12318,7 @@
                 <a:ea typeface="Microsoft JhengHei" pitchFamily="34" charset="-122"/>
                 <a:cs typeface="Microsoft JhengHei" pitchFamily="34" charset="-120"/>
               </a:rPr>
-              <a:t>沉穩理性,言簡意賅,偶爾一針見血</a:t>
+              <a:t>沉穩理性，言簡意賅，偶爾一針見血</a:t>
             </a:r>
             <a:endParaRPr lang="en-US" sz="1350" dirty="0"/>
           </a:p>
@@ -12836,7 +12399,7 @@
                 <a:ea typeface="Microsoft JhengHei" pitchFamily="34" charset="-122"/>
                 <a:cs typeface="Microsoft JhengHei" pitchFamily="34" charset="-120"/>
               </a:rPr>
-              <a:t>40-60 秒口播影片(專屬音色)、圖文</a:t>
+              <a:t>40-60 秒口播影片（專屬音色）、圖文</a:t>
             </a:r>
             <a:endParaRPr lang="en-US" sz="1350" dirty="0"/>
           </a:p>
@@ -12998,7 +12561,7 @@
                 <a:ea typeface="Microsoft JhengHei" pitchFamily="34" charset="-122"/>
                 <a:cs typeface="Microsoft JhengHei" pitchFamily="34" charset="-120"/>
               </a:rPr>
-              <a:t>只談規則與文化,不談玩法與收益</a:t>
+              <a:t>只談規則與文化，不談玩法與收益</a:t>
             </a:r>
             <a:endParaRPr lang="en-US" sz="1350" dirty="0"/>
           </a:p>
@@ -13085,7 +12648,7 @@
                 <a:ea typeface="Microsoft JhengHei" pitchFamily="34" charset="-122"/>
                 <a:cs typeface="Microsoft JhengHei" pitchFamily="34" charset="-120"/>
               </a:rPr>
-              <a:t>左:人設定裝照|右:實際發布貼文之配圖(皆 AI 生成)</a:t>
+              <a:t>左：人設定裝照｜右：實際發布貼文之配圖（皆 AI 生成）</a:t>
             </a:r>
             <a:endParaRPr lang="en-US" sz="1000" dirty="0"/>
           </a:p>
@@ -13124,7 +12687,7 @@
                 <a:ea typeface="Microsoft JhengHei" pitchFamily="34" charset="-122"/>
                 <a:cs typeface="Microsoft JhengHei" pitchFamily="34" charset="-120"/>
               </a:rPr>
-              <a:t>實際營運中:每日更新、六平台自動發布——「真人不便代言產業」的實證</a:t>
+              <a:t>實際營運中：每日更新、六平台同步經營——「真人不便代言產業」的實證</a:t>
             </a:r>
             <a:endParaRPr lang="en-US" sz="1150" dirty="0"/>
           </a:p>
@@ -13195,7 +12758,7 @@
                 <a:ea typeface="Microsoft JhengHei" pitchFamily="34" charset="-122"/>
                 <a:cs typeface="Microsoft JhengHei" pitchFamily="34" charset="-120"/>
               </a:rPr>
-              <a:t>LEARNING ENGINE|方法攤開給您看</a:t>
+              <a:t>ROSTER｜多元賽道的人設庫</a:t>
             </a:r>
             <a:endParaRPr lang="en-US" sz="1100" dirty="0"/>
           </a:p>
@@ -13234,199 +12797,15 @@
                 <a:ea typeface="Microsoft JhengHei" pitchFamily="34" charset="-122"/>
                 <a:cs typeface="Microsoft JhengHei" pitchFamily="34" charset="-120"/>
               </a:rPr>
-              <a:t>從零開始,怎麼找出有效內容</a:t>
+              <a:t>20+ 個人設設計經驗，依品牌量身打造</a:t>
             </a:r>
             <a:endParaRPr lang="en-US" sz="3000" dirty="0"/>
-          </a:p>
-        </p:txBody>
-      </p:sp>
-      <p:sp>
-        <p:nvSpPr>
-          <p:cNvPr id="4" name="Text 2"/>
-          <p:cNvSpPr/>
-          <p:nvPr/>
-        </p:nvSpPr>
-        <p:spPr>
-          <a:xfrm>
-            <a:off x="822960" y="1170432"/>
-            <a:ext cx="10515600" cy="320040"/>
-          </a:xfrm>
-          <a:prstGeom prst="rect">
-            <a:avLst/>
-          </a:prstGeom>
-          <a:noFill/>
-          <a:ln/>
-        </p:spPr>
-        <p:txBody>
-          <a:bodyPr wrap="square" lIns="0" tIns="0" rIns="0" bIns="0" rtlCol="0" anchor="ctr"/>
-          <a:lstStyle/>
-          <a:p>
-            <a:pPr indent="0" marL="0">
-              <a:buNone/>
-            </a:pPr>
-            <a:r>
-              <a:rPr lang="en-US" sz="1300" dirty="0">
-                <a:solidFill>
-                  <a:srgbClr val="8FA0BE"/>
-                </a:solidFill>
-                <a:latin typeface="Microsoft JhengHei" pitchFamily="34" charset="0"/>
-                <a:ea typeface="Microsoft JhengHei" pitchFamily="34" charset="-122"/>
-                <a:cs typeface="Microsoft JhengHei" pitchFamily="34" charset="-120"/>
-              </a:rPr>
-              <a:t>實際營運中的 3 個人設・23 天發布 111 篇素材・全程零廣告</a:t>
-            </a:r>
-            <a:endParaRPr lang="en-US" sz="1300" dirty="0"/>
-          </a:p>
-        </p:txBody>
-      </p:sp>
-      <p:sp>
-        <p:nvSpPr>
-          <p:cNvPr id="5" name="Shape 3"/>
-          <p:cNvSpPr/>
-          <p:nvPr/>
-        </p:nvSpPr>
-        <p:spPr>
-          <a:xfrm>
-            <a:off x="566928" y="1691640"/>
-            <a:ext cx="3502152" cy="3474720"/>
-          </a:xfrm>
-          <a:prstGeom prst="roundRect">
-            <a:avLst>
-              <a:gd name="adj" fmla="val 2368"/>
-            </a:avLst>
-          </a:prstGeom>
-          <a:solidFill>
-            <a:srgbClr val="1A2440"/>
-          </a:solidFill>
-          <a:ln/>
-        </p:spPr>
-      </p:sp>
-      <p:sp>
-        <p:nvSpPr>
-          <p:cNvPr id="6" name="Text 4"/>
-          <p:cNvSpPr/>
-          <p:nvPr/>
-        </p:nvSpPr>
-        <p:spPr>
-          <a:xfrm>
-            <a:off x="886968" y="1938528"/>
-            <a:ext cx="2880360" cy="320040"/>
-          </a:xfrm>
-          <a:prstGeom prst="rect">
-            <a:avLst/>
-          </a:prstGeom>
-          <a:noFill/>
-          <a:ln/>
-        </p:spPr>
-        <p:txBody>
-          <a:bodyPr wrap="square" lIns="0" tIns="0" rIns="0" bIns="0" rtlCol="0" anchor="ctr"/>
-          <a:lstStyle/>
-          <a:p>
-            <a:pPr indent="0" marL="0">
-              <a:buNone/>
-            </a:pPr>
-            <a:r>
-              <a:rPr lang="en-US" sz="1100" b="1" spc="150" kern="0" dirty="0">
-                <a:solidFill>
-                  <a:srgbClr val="35C2B0"/>
-                </a:solidFill>
-                <a:latin typeface="Microsoft JhengHei" pitchFamily="34" charset="0"/>
-                <a:ea typeface="Microsoft JhengHei" pitchFamily="34" charset="-122"/>
-                <a:cs typeface="Microsoft JhengHei" pitchFamily="34" charset="-120"/>
-              </a:rPr>
-              <a:t>STEP 1・測試</a:t>
-            </a:r>
-            <a:endParaRPr lang="en-US" sz="1100" dirty="0"/>
-          </a:p>
-        </p:txBody>
-      </p:sp>
-      <p:sp>
-        <p:nvSpPr>
-          <p:cNvPr id="7" name="Text 5"/>
-          <p:cNvSpPr/>
-          <p:nvPr/>
-        </p:nvSpPr>
-        <p:spPr>
-          <a:xfrm>
-            <a:off x="886968" y="2286000"/>
-            <a:ext cx="2880360" cy="548640"/>
-          </a:xfrm>
-          <a:prstGeom prst="rect">
-            <a:avLst/>
-          </a:prstGeom>
-          <a:noFill/>
-          <a:ln/>
-        </p:spPr>
-        <p:txBody>
-          <a:bodyPr wrap="square" lIns="0" tIns="0" rIns="0" bIns="0" rtlCol="0" anchor="ctr"/>
-          <a:lstStyle/>
-          <a:p>
-            <a:pPr indent="0" marL="0">
-              <a:lnSpc>
-                <a:spcPct val="115000"/>
-              </a:lnSpc>
-              <a:buNone/>
-            </a:pPr>
-            <a:r>
-              <a:rPr lang="en-US" sz="1700" b="1" dirty="0">
-                <a:solidFill>
-                  <a:srgbClr val="FFFFFF"/>
-                </a:solidFill>
-                <a:latin typeface="Microsoft JhengHei" pitchFamily="34" charset="0"/>
-                <a:ea typeface="Microsoft JhengHei" pitchFamily="34" charset="-122"/>
-                <a:cs typeface="Microsoft JhengHei" pitchFamily="34" charset="-120"/>
-              </a:rPr>
-              <a:t>全平台鋪量,建立基準</a:t>
-            </a:r>
-            <a:endParaRPr lang="en-US" sz="1700" dirty="0"/>
-          </a:p>
-        </p:txBody>
-      </p:sp>
-      <p:sp>
-        <p:nvSpPr>
-          <p:cNvPr id="8" name="Text 6"/>
-          <p:cNvSpPr/>
-          <p:nvPr/>
-        </p:nvSpPr>
-        <p:spPr>
-          <a:xfrm>
-            <a:off x="886968" y="2926080"/>
-            <a:ext cx="2880360" cy="2103120"/>
-          </a:xfrm>
-          <a:prstGeom prst="rect">
-            <a:avLst/>
-          </a:prstGeom>
-          <a:noFill/>
-          <a:ln/>
-        </p:spPr>
-        <p:txBody>
-          <a:bodyPr wrap="square" lIns="0" tIns="0" rIns="0" bIns="0" rtlCol="0" anchor="ctr"/>
-          <a:lstStyle/>
-          <a:p>
-            <a:pPr indent="0" marL="0">
-              <a:lnSpc>
-                <a:spcPct val="130000"/>
-              </a:lnSpc>
-              <a:buNone/>
-            </a:pPr>
-            <a:r>
-              <a:rPr lang="en-US" sz="1250" dirty="0">
-                <a:solidFill>
-                  <a:srgbClr val="C7D6EE"/>
-                </a:solidFill>
-                <a:latin typeface="Microsoft JhengHei" pitchFamily="34" charset="0"/>
-                <a:ea typeface="Microsoft JhengHei" pitchFamily="34" charset="-122"/>
-                <a:cs typeface="Microsoft JhengHei" pitchFamily="34" charset="-120"/>
-              </a:rPr>
-              <a:t>3 人設 × 6 平台,111 篇素材;冷啟動兩週,單帳號 IG 自然觸及 439-529。數據每週原樣呈報。</a:t>
-            </a:r>
-            <a:endParaRPr lang="en-US" sz="1250" dirty="0"/>
           </a:p>
         </p:txBody>
       </p:sp>
       <p:pic>
         <p:nvPicPr>
-          <p:cNvPr id="9" name="Image 0" descr="preencoded.png">    </p:cNvPr>
+          <p:cNvPr id="4" name="Image 0" descr="preencoded.png">    </p:cNvPr>
           <p:cNvPicPr>
             <a:picLocks noChangeAspect="1"/>
           </p:cNvPicPr>
@@ -13440,8 +12819,8 @@
         </p:blipFill>
         <p:spPr>
           <a:xfrm>
-            <a:off x="4114800" y="3246120"/>
-            <a:ext cx="320040" cy="320040"/>
+            <a:off x="1051560" y="1463040"/>
+            <a:ext cx="2103120" cy="1783080"/>
           </a:xfrm>
           <a:prstGeom prst="rect">
             <a:avLst/>
@@ -13450,94 +12829,30 @@
       </p:pic>
       <p:sp>
         <p:nvSpPr>
-          <p:cNvPr id="10" name="Shape 7"/>
-          <p:cNvSpPr/>
-          <p:nvPr/>
-        </p:nvSpPr>
-        <p:spPr>
-          <a:xfrm>
-            <a:off x="4343400" y="1691640"/>
-            <a:ext cx="3502152" cy="3474720"/>
-          </a:xfrm>
-          <a:prstGeom prst="roundRect">
-            <a:avLst>
-              <a:gd name="adj" fmla="val 2368"/>
-            </a:avLst>
-          </a:prstGeom>
-          <a:solidFill>
-            <a:srgbClr val="1A2440"/>
-          </a:solidFill>
-          <a:ln/>
-        </p:spPr>
-      </p:sp>
-      <p:sp>
-        <p:nvSpPr>
-          <p:cNvPr id="11" name="Text 8"/>
-          <p:cNvSpPr/>
-          <p:nvPr/>
-        </p:nvSpPr>
-        <p:spPr>
-          <a:xfrm>
-            <a:off x="4663440" y="1938528"/>
-            <a:ext cx="2880360" cy="320040"/>
-          </a:xfrm>
-          <a:prstGeom prst="rect">
-            <a:avLst/>
-          </a:prstGeom>
-          <a:noFill/>
-          <a:ln/>
-        </p:spPr>
-        <p:txBody>
-          <a:bodyPr wrap="square" lIns="0" tIns="0" rIns="0" bIns="0" rtlCol="0" anchor="ctr"/>
-          <a:lstStyle/>
-          <a:p>
-            <a:pPr indent="0" marL="0">
-              <a:buNone/>
-            </a:pPr>
-            <a:r>
-              <a:rPr lang="en-US" sz="1100" b="1" spc="150" kern="0" dirty="0">
-                <a:solidFill>
-                  <a:srgbClr val="35C2B0"/>
-                </a:solidFill>
-                <a:latin typeface="Microsoft JhengHei" pitchFamily="34" charset="0"/>
-                <a:ea typeface="Microsoft JhengHei" pitchFamily="34" charset="-122"/>
-                <a:cs typeface="Microsoft JhengHei" pitchFamily="34" charset="-120"/>
-              </a:rPr>
-              <a:t>STEP 2・訊號</a:t>
-            </a:r>
-            <a:endParaRPr lang="en-US" sz="1100" dirty="0"/>
-          </a:p>
-        </p:txBody>
-      </p:sp>
-      <p:sp>
-        <p:nvSpPr>
-          <p:cNvPr id="12" name="Text 9"/>
-          <p:cNvSpPr/>
-          <p:nvPr/>
-        </p:nvSpPr>
-        <p:spPr>
-          <a:xfrm>
-            <a:off x="4663440" y="2286000"/>
-            <a:ext cx="2880360" cy="548640"/>
-          </a:xfrm>
-          <a:prstGeom prst="rect">
-            <a:avLst/>
-          </a:prstGeom>
-          <a:noFill/>
-          <a:ln/>
-        </p:spPr>
-        <p:txBody>
-          <a:bodyPr wrap="square" lIns="0" tIns="0" rIns="0" bIns="0" rtlCol="0" anchor="ctr"/>
-          <a:lstStyle/>
-          <a:p>
-            <a:pPr indent="0" marL="0">
-              <a:lnSpc>
-                <a:spcPct val="115000"/>
-              </a:lnSpc>
-              <a:buNone/>
-            </a:pPr>
-            <a:r>
-              <a:rPr lang="en-US" sz="1700" b="1" dirty="0">
+          <p:cNvPr id="5" name="Text 2"/>
+          <p:cNvSpPr/>
+          <p:nvPr/>
+        </p:nvSpPr>
+        <p:spPr>
+          <a:xfrm>
+            <a:off x="1051560" y="3291840"/>
+            <a:ext cx="2103120" cy="292608"/>
+          </a:xfrm>
+          <a:prstGeom prst="rect">
+            <a:avLst/>
+          </a:prstGeom>
+          <a:noFill/>
+          <a:ln/>
+        </p:spPr>
+        <p:txBody>
+          <a:bodyPr wrap="square" lIns="0" tIns="0" rIns="0" bIns="0" rtlCol="0" anchor="ctr"/>
+          <a:lstStyle/>
+          <a:p>
+            <a:pPr algn="ctr" indent="0" marL="0">
+              <a:buNone/>
+            </a:pPr>
+            <a:r>
+              <a:rPr lang="en-US" sz="1300" b="1" dirty="0">
                 <a:solidFill>
                   <a:srgbClr val="FFFFFF"/>
                 </a:solidFill>
@@ -13545,57 +12860,54 @@
                 <a:ea typeface="Microsoft JhengHei" pitchFamily="34" charset="-122"/>
                 <a:cs typeface="Microsoft JhengHei" pitchFamily="34" charset="-120"/>
               </a:rPr>
-              <a:t>數據裡找出贏家</a:t>
-            </a:r>
-            <a:endParaRPr lang="en-US" sz="1700" dirty="0"/>
-          </a:p>
-        </p:txBody>
-      </p:sp>
-      <p:sp>
-        <p:nvSpPr>
-          <p:cNvPr id="13" name="Text 10"/>
-          <p:cNvSpPr/>
-          <p:nvPr/>
-        </p:nvSpPr>
-        <p:spPr>
-          <a:xfrm>
-            <a:off x="4663440" y="2926080"/>
-            <a:ext cx="2880360" cy="2103120"/>
-          </a:xfrm>
-          <a:prstGeom prst="rect">
-            <a:avLst/>
-          </a:prstGeom>
-          <a:noFill/>
-          <a:ln/>
-        </p:spPr>
-        <p:txBody>
-          <a:bodyPr wrap="square" lIns="0" tIns="0" rIns="0" bIns="0" rtlCol="0" anchor="ctr"/>
-          <a:lstStyle/>
-          <a:p>
-            <a:pPr indent="0" marL="0">
-              <a:lnSpc>
-                <a:spcPct val="130000"/>
-              </a:lnSpc>
-              <a:buNone/>
-            </a:pPr>
-            <a:r>
-              <a:rPr lang="en-US" sz="1250" dirty="0">
-                <a:solidFill>
-                  <a:srgbClr val="C7D6EE"/>
-                </a:solidFill>
-                <a:latin typeface="Microsoft JhengHei" pitchFamily="34" charset="0"/>
-                <a:ea typeface="Microsoft JhengHei" pitchFamily="34" charset="-122"/>
-                <a:cs typeface="Microsoft JhengHei" pitchFamily="34" charset="-120"/>
-              </a:rPr>
-              <a:t>「反直覺知識+生活場景+拋問句」互動率明顯高於純生活紀錄;TikTok 觸及是其他平台 3-5 倍。</a:t>
-            </a:r>
-            <a:endParaRPr lang="en-US" sz="1250" dirty="0"/>
+              <a:t>Luna Tanaka</a:t>
+            </a:r>
+            <a:endParaRPr lang="en-US" sz="1300" dirty="0"/>
+          </a:p>
+        </p:txBody>
+      </p:sp>
+      <p:sp>
+        <p:nvSpPr>
+          <p:cNvPr id="6" name="Text 3"/>
+          <p:cNvSpPr/>
+          <p:nvPr/>
+        </p:nvSpPr>
+        <p:spPr>
+          <a:xfrm>
+            <a:off x="1051560" y="3584448"/>
+            <a:ext cx="2103120" cy="274320"/>
+          </a:xfrm>
+          <a:prstGeom prst="rect">
+            <a:avLst/>
+          </a:prstGeom>
+          <a:noFill/>
+          <a:ln/>
+        </p:spPr>
+        <p:txBody>
+          <a:bodyPr wrap="square" lIns="0" tIns="0" rIns="0" bIns="0" rtlCol="0" anchor="ctr"/>
+          <a:lstStyle/>
+          <a:p>
+            <a:pPr algn="ctr" indent="0" marL="0">
+              <a:buNone/>
+            </a:pPr>
+            <a:r>
+              <a:rPr lang="en-US" sz="1050" dirty="0">
+                <a:solidFill>
+                  <a:srgbClr val="8FA0BE"/>
+                </a:solidFill>
+                <a:latin typeface="Microsoft JhengHei" pitchFamily="34" charset="0"/>
+                <a:ea typeface="Microsoft JhengHei" pitchFamily="34" charset="-122"/>
+                <a:cs typeface="Microsoft JhengHei" pitchFamily="34" charset="-120"/>
+              </a:rPr>
+              <a:t>京都・日系美學</a:t>
+            </a:r>
+            <a:endParaRPr lang="en-US" sz="1050" dirty="0"/>
           </a:p>
         </p:txBody>
       </p:sp>
       <p:pic>
         <p:nvPicPr>
-          <p:cNvPr id="14" name="Image 1" descr="preencoded.png">    </p:cNvPr>
+          <p:cNvPr id="7" name="Image 1" descr="preencoded.png">    </p:cNvPr>
           <p:cNvPicPr>
             <a:picLocks noChangeAspect="1"/>
           </p:cNvPicPr>
@@ -13609,8 +12921,8 @@
         </p:blipFill>
         <p:spPr>
           <a:xfrm>
-            <a:off x="7891272" y="3246120"/>
-            <a:ext cx="320040" cy="320040"/>
+            <a:off x="3657600" y="1463040"/>
+            <a:ext cx="2103120" cy="1783080"/>
           </a:xfrm>
           <a:prstGeom prst="rect">
             <a:avLst/>
@@ -13619,94 +12931,30 @@
       </p:pic>
       <p:sp>
         <p:nvSpPr>
-          <p:cNvPr id="15" name="Shape 11"/>
-          <p:cNvSpPr/>
-          <p:nvPr/>
-        </p:nvSpPr>
-        <p:spPr>
-          <a:xfrm>
-            <a:off x="8119872" y="1691640"/>
-            <a:ext cx="3502152" cy="3474720"/>
-          </a:xfrm>
-          <a:prstGeom prst="roundRect">
-            <a:avLst>
-              <a:gd name="adj" fmla="val 2368"/>
-            </a:avLst>
-          </a:prstGeom>
-          <a:solidFill>
-            <a:srgbClr val="1A2440"/>
-          </a:solidFill>
-          <a:ln/>
-        </p:spPr>
-      </p:sp>
-      <p:sp>
-        <p:nvSpPr>
-          <p:cNvPr id="16" name="Text 12"/>
-          <p:cNvSpPr/>
-          <p:nvPr/>
-        </p:nvSpPr>
-        <p:spPr>
-          <a:xfrm>
-            <a:off x="8439912" y="1938528"/>
-            <a:ext cx="2880360" cy="320040"/>
-          </a:xfrm>
-          <a:prstGeom prst="rect">
-            <a:avLst/>
-          </a:prstGeom>
-          <a:noFill/>
-          <a:ln/>
-        </p:spPr>
-        <p:txBody>
-          <a:bodyPr wrap="square" lIns="0" tIns="0" rIns="0" bIns="0" rtlCol="0" anchor="ctr"/>
-          <a:lstStyle/>
-          <a:p>
-            <a:pPr indent="0" marL="0">
-              <a:buNone/>
-            </a:pPr>
-            <a:r>
-              <a:rPr lang="en-US" sz="1100" b="1" spc="150" kern="0" dirty="0">
-                <a:solidFill>
-                  <a:srgbClr val="35C2B0"/>
-                </a:solidFill>
-                <a:latin typeface="Microsoft JhengHei" pitchFamily="34" charset="0"/>
-                <a:ea typeface="Microsoft JhengHei" pitchFamily="34" charset="-122"/>
-                <a:cs typeface="Microsoft JhengHei" pitchFamily="34" charset="-120"/>
-              </a:rPr>
-              <a:t>STEP 3・放大</a:t>
-            </a:r>
-            <a:endParaRPr lang="en-US" sz="1100" dirty="0"/>
-          </a:p>
-        </p:txBody>
-      </p:sp>
-      <p:sp>
-        <p:nvSpPr>
-          <p:cNvPr id="17" name="Text 13"/>
-          <p:cNvSpPr/>
-          <p:nvPr/>
-        </p:nvSpPr>
-        <p:spPr>
-          <a:xfrm>
-            <a:off x="8439912" y="2286000"/>
-            <a:ext cx="2880360" cy="548640"/>
-          </a:xfrm>
-          <a:prstGeom prst="rect">
-            <a:avLst/>
-          </a:prstGeom>
-          <a:noFill/>
-          <a:ln/>
-        </p:spPr>
-        <p:txBody>
-          <a:bodyPr wrap="square" lIns="0" tIns="0" rIns="0" bIns="0" rtlCol="0" anchor="ctr"/>
-          <a:lstStyle/>
-          <a:p>
-            <a:pPr indent="0" marL="0">
-              <a:lnSpc>
-                <a:spcPct val="115000"/>
-              </a:lnSpc>
-              <a:buNone/>
-            </a:pPr>
-            <a:r>
-              <a:rPr lang="en-US" sz="1700" b="1" dirty="0">
+          <p:cNvPr id="8" name="Text 4"/>
+          <p:cNvSpPr/>
+          <p:nvPr/>
+        </p:nvSpPr>
+        <p:spPr>
+          <a:xfrm>
+            <a:off x="3657600" y="3291840"/>
+            <a:ext cx="2103120" cy="292608"/>
+          </a:xfrm>
+          <a:prstGeom prst="rect">
+            <a:avLst/>
+          </a:prstGeom>
+          <a:noFill/>
+          <a:ln/>
+        </p:spPr>
+        <p:txBody>
+          <a:bodyPr wrap="square" lIns="0" tIns="0" rIns="0" bIns="0" rtlCol="0" anchor="ctr"/>
+          <a:lstStyle/>
+          <a:p>
+            <a:pPr algn="ctr" indent="0" marL="0">
+              <a:buNone/>
+            </a:pPr>
+            <a:r>
+              <a:rPr lang="en-US" sz="1300" b="1" dirty="0">
                 <a:solidFill>
                   <a:srgbClr val="FFFFFF"/>
                 </a:solidFill>
@@ -13714,64 +12962,22 @@
                 <a:ea typeface="Microsoft JhengHei" pitchFamily="34" charset="-122"/>
                 <a:cs typeface="Microsoft JhengHei" pitchFamily="34" charset="-120"/>
               </a:rPr>
-              <a:t>汰弱留強,重壓贏家</a:t>
-            </a:r>
-            <a:endParaRPr lang="en-US" sz="1700" dirty="0"/>
-          </a:p>
-        </p:txBody>
-      </p:sp>
-      <p:sp>
-        <p:nvSpPr>
-          <p:cNvPr id="18" name="Text 14"/>
-          <p:cNvSpPr/>
-          <p:nvPr/>
-        </p:nvSpPr>
-        <p:spPr>
-          <a:xfrm>
-            <a:off x="8439912" y="2926080"/>
-            <a:ext cx="2880360" cy="2103120"/>
-          </a:xfrm>
-          <a:prstGeom prst="rect">
-            <a:avLst/>
-          </a:prstGeom>
-          <a:noFill/>
-          <a:ln/>
-        </p:spPr>
-        <p:txBody>
-          <a:bodyPr wrap="square" lIns="0" tIns="0" rIns="0" bIns="0" rtlCol="0" anchor="ctr"/>
-          <a:lstStyle/>
-          <a:p>
-            <a:pPr indent="0" marL="0">
-              <a:lnSpc>
-                <a:spcPct val="130000"/>
-              </a:lnSpc>
-              <a:buNone/>
-            </a:pPr>
-            <a:r>
-              <a:rPr lang="en-US" sz="1250" dirty="0">
-                <a:solidFill>
-                  <a:srgbClr val="C7D6EE"/>
-                </a:solidFill>
-                <a:latin typeface="Microsoft JhengHei" pitchFamily="34" charset="0"/>
-                <a:ea typeface="Microsoft JhengHei" pitchFamily="34" charset="-122"/>
-                <a:cs typeface="Microsoft JhengHei" pitchFamily="34" charset="-120"/>
-              </a:rPr>
-              <a:t>圖文全面改用反直覺鉤子;配圖改走縮圖風格;剪輯資源重壓 TikTok。落後型式直接淘汰。</a:t>
-            </a:r>
-            <a:endParaRPr lang="en-US" sz="1250" dirty="0"/>
-          </a:p>
-        </p:txBody>
-      </p:sp>
-      <p:sp>
-        <p:nvSpPr>
-          <p:cNvPr id="19" name="Text 15"/>
-          <p:cNvSpPr/>
-          <p:nvPr/>
-        </p:nvSpPr>
-        <p:spPr>
-          <a:xfrm>
-            <a:off x="822960" y="5440680"/>
-            <a:ext cx="10543032" cy="914400"/>
+              <a:t>Yuna Kim</a:t>
+            </a:r>
+            <a:endParaRPr lang="en-US" sz="1300" dirty="0"/>
+          </a:p>
+        </p:txBody>
+      </p:sp>
+      <p:sp>
+        <p:nvSpPr>
+          <p:cNvPr id="9" name="Text 5"/>
+          <p:cNvSpPr/>
+          <p:nvPr/>
+        </p:nvSpPr>
+        <p:spPr>
+          <a:xfrm>
+            <a:off x="3657600" y="3584448"/>
+            <a:ext cx="2103120" cy="274320"/>
           </a:xfrm>
           <a:prstGeom prst="rect">
             <a:avLst/>
@@ -13784,13 +12990,73 @@
           <a:lstStyle/>
           <a:p>
             <a:pPr algn="ctr" indent="0" marL="0">
-              <a:lnSpc>
-                <a:spcPct val="135000"/>
-              </a:lnSpc>
-              <a:buNone/>
-            </a:pPr>
-            <a:r>
-              <a:rPr lang="en-US" sz="1350" b="1" dirty="0">
+              <a:buNone/>
+            </a:pPr>
+            <a:r>
+              <a:rPr lang="en-US" sz="1050" dirty="0">
+                <a:solidFill>
+                  <a:srgbClr val="8FA0BE"/>
+                </a:solidFill>
+                <a:latin typeface="Microsoft JhengHei" pitchFamily="34" charset="0"/>
+                <a:ea typeface="Microsoft JhengHei" pitchFamily="34" charset="-122"/>
+                <a:cs typeface="Microsoft JhengHei" pitchFamily="34" charset="-120"/>
+              </a:rPr>
+              <a:t>首爾・K-beauty</a:t>
+            </a:r>
+            <a:endParaRPr lang="en-US" sz="1050" dirty="0"/>
+          </a:p>
+        </p:txBody>
+      </p:sp>
+      <p:pic>
+        <p:nvPicPr>
+          <p:cNvPr id="10" name="Image 2" descr="preencoded.png">    </p:cNvPr>
+          <p:cNvPicPr>
+            <a:picLocks noChangeAspect="1"/>
+          </p:cNvPicPr>
+          <p:nvPr/>
+        </p:nvPicPr>
+        <p:blipFill>
+          <a:blip r:embed="rId3"/>
+          <a:stretch>
+            <a:fillRect/>
+          </a:stretch>
+        </p:blipFill>
+        <p:spPr>
+          <a:xfrm>
+            <a:off x="6263640" y="1463040"/>
+            <a:ext cx="2103120" cy="1783080"/>
+          </a:xfrm>
+          <a:prstGeom prst="rect">
+            <a:avLst/>
+          </a:prstGeom>
+        </p:spPr>
+      </p:pic>
+      <p:sp>
+        <p:nvSpPr>
+          <p:cNvPr id="11" name="Text 6"/>
+          <p:cNvSpPr/>
+          <p:nvPr/>
+        </p:nvSpPr>
+        <p:spPr>
+          <a:xfrm>
+            <a:off x="6263640" y="3291840"/>
+            <a:ext cx="2103120" cy="292608"/>
+          </a:xfrm>
+          <a:prstGeom prst="rect">
+            <a:avLst/>
+          </a:prstGeom>
+          <a:noFill/>
+          <a:ln/>
+        </p:spPr>
+        <p:txBody>
+          <a:bodyPr wrap="square" lIns="0" tIns="0" rIns="0" bIns="0" rtlCol="0" anchor="ctr"/>
+          <a:lstStyle/>
+          <a:p>
+            <a:pPr algn="ctr" indent="0" marL="0">
+              <a:buNone/>
+            </a:pPr>
+            <a:r>
+              <a:rPr lang="en-US" sz="1300" b="1" dirty="0">
                 <a:solidFill>
                   <a:srgbClr val="FFFFFF"/>
                 </a:solidFill>
@@ -13798,29 +13064,597 @@
                 <a:ea typeface="Microsoft JhengHei" pitchFamily="34" charset="-122"/>
                 <a:cs typeface="Microsoft JhengHei" pitchFamily="34" charset="-120"/>
               </a:rPr>
-              <a:t>我們賣的不是「保證流量」,是這套 測試 → 訊號 → 放大 的系統。</a:t>
-            </a:r>
-            <a:endParaRPr lang="en-US" sz="1350" dirty="0"/>
-          </a:p>
+              <a:t>黃米亞</a:t>
+            </a:r>
+            <a:endParaRPr lang="en-US" sz="1300" dirty="0"/>
+          </a:p>
+        </p:txBody>
+      </p:sp>
+      <p:sp>
+        <p:nvSpPr>
+          <p:cNvPr id="12" name="Text 7"/>
+          <p:cNvSpPr/>
+          <p:nvPr/>
+        </p:nvSpPr>
+        <p:spPr>
+          <a:xfrm>
+            <a:off x="6263640" y="3584448"/>
+            <a:ext cx="2103120" cy="274320"/>
+          </a:xfrm>
+          <a:prstGeom prst="rect">
+            <a:avLst/>
+          </a:prstGeom>
+          <a:noFill/>
+          <a:ln/>
+        </p:spPr>
+        <p:txBody>
+          <a:bodyPr wrap="square" lIns="0" tIns="0" rIns="0" bIns="0" rtlCol="0" anchor="ctr"/>
+          <a:lstStyle/>
           <a:p>
             <a:pPr algn="ctr" indent="0" marL="0">
-              <a:lnSpc>
-                <a:spcPct val="135000"/>
-              </a:lnSpc>
-              <a:buNone/>
-            </a:pPr>
-            <a:r>
-              <a:rPr lang="en-US" sz="1350" dirty="0">
-                <a:solidFill>
-                  <a:srgbClr val="BFE8E0"/>
-                </a:solidFill>
-                <a:latin typeface="Microsoft JhengHei" pitchFamily="34" charset="0"/>
-                <a:ea typeface="Microsoft JhengHei" pitchFamily="34" charset="-122"/>
-                <a:cs typeface="Microsoft JhengHei" pitchFamily="34" charset="-120"/>
-              </a:rPr>
-              <a:t>它已在真實帳號上運轉,您每週的報告就是這個循環的輸出。</a:t>
-            </a:r>
-            <a:endParaRPr lang="en-US" sz="1350" dirty="0"/>
+              <a:buNone/>
+            </a:pPr>
+            <a:r>
+              <a:rPr lang="en-US" sz="1050" dirty="0">
+                <a:solidFill>
+                  <a:srgbClr val="8FA0BE"/>
+                </a:solidFill>
+                <a:latin typeface="Microsoft JhengHei" pitchFamily="34" charset="0"/>
+                <a:ea typeface="Microsoft JhengHei" pitchFamily="34" charset="-122"/>
+                <a:cs typeface="Microsoft JhengHei" pitchFamily="34" charset="-120"/>
+              </a:rPr>
+              <a:t>台灣・電競主播</a:t>
+            </a:r>
+            <a:endParaRPr lang="en-US" sz="1050" dirty="0"/>
+          </a:p>
+        </p:txBody>
+      </p:sp>
+      <p:pic>
+        <p:nvPicPr>
+          <p:cNvPr id="13" name="Image 3" descr="preencoded.png">    </p:cNvPr>
+          <p:cNvPicPr>
+            <a:picLocks noChangeAspect="1"/>
+          </p:cNvPicPr>
+          <p:nvPr/>
+        </p:nvPicPr>
+        <p:blipFill>
+          <a:blip r:embed="rId4"/>
+          <a:stretch>
+            <a:fillRect/>
+          </a:stretch>
+        </p:blipFill>
+        <p:spPr>
+          <a:xfrm>
+            <a:off x="8869680" y="1463040"/>
+            <a:ext cx="2103120" cy="1783080"/>
+          </a:xfrm>
+          <a:prstGeom prst="rect">
+            <a:avLst/>
+          </a:prstGeom>
+        </p:spPr>
+      </p:pic>
+      <p:sp>
+        <p:nvSpPr>
+          <p:cNvPr id="14" name="Text 8"/>
+          <p:cNvSpPr/>
+          <p:nvPr/>
+        </p:nvSpPr>
+        <p:spPr>
+          <a:xfrm>
+            <a:off x="8869680" y="3291840"/>
+            <a:ext cx="2103120" cy="292608"/>
+          </a:xfrm>
+          <a:prstGeom prst="rect">
+            <a:avLst/>
+          </a:prstGeom>
+          <a:noFill/>
+          <a:ln/>
+        </p:spPr>
+        <p:txBody>
+          <a:bodyPr wrap="square" lIns="0" tIns="0" rIns="0" bIns="0" rtlCol="0" anchor="ctr"/>
+          <a:lstStyle/>
+          <a:p>
+            <a:pPr algn="ctr" indent="0" marL="0">
+              <a:buNone/>
+            </a:pPr>
+            <a:r>
+              <a:rPr lang="en-US" sz="1300" b="1" dirty="0">
+                <a:solidFill>
+                  <a:srgbClr val="FFFFFF"/>
+                </a:solidFill>
+                <a:latin typeface="Microsoft JhengHei" pitchFamily="34" charset="0"/>
+                <a:ea typeface="Microsoft JhengHei" pitchFamily="34" charset="-122"/>
+                <a:cs typeface="Microsoft JhengHei" pitchFamily="34" charset="-120"/>
+              </a:rPr>
+              <a:t>Rainie Hsu</a:t>
+            </a:r>
+            <a:endParaRPr lang="en-US" sz="1300" dirty="0"/>
+          </a:p>
+        </p:txBody>
+      </p:sp>
+      <p:sp>
+        <p:nvSpPr>
+          <p:cNvPr id="15" name="Text 9"/>
+          <p:cNvSpPr/>
+          <p:nvPr/>
+        </p:nvSpPr>
+        <p:spPr>
+          <a:xfrm>
+            <a:off x="8869680" y="3584448"/>
+            <a:ext cx="2103120" cy="274320"/>
+          </a:xfrm>
+          <a:prstGeom prst="rect">
+            <a:avLst/>
+          </a:prstGeom>
+          <a:noFill/>
+          <a:ln/>
+        </p:spPr>
+        <p:txBody>
+          <a:bodyPr wrap="square" lIns="0" tIns="0" rIns="0" bIns="0" rtlCol="0" anchor="ctr"/>
+          <a:lstStyle/>
+          <a:p>
+            <a:pPr algn="ctr" indent="0" marL="0">
+              <a:buNone/>
+            </a:pPr>
+            <a:r>
+              <a:rPr lang="en-US" sz="1050" dirty="0">
+                <a:solidFill>
+                  <a:srgbClr val="8FA0BE"/>
+                </a:solidFill>
+                <a:latin typeface="Microsoft JhengHei" pitchFamily="34" charset="0"/>
+                <a:ea typeface="Microsoft JhengHei" pitchFamily="34" charset="-122"/>
+                <a:cs typeface="Microsoft JhengHei" pitchFamily="34" charset="-120"/>
+              </a:rPr>
+              <a:t>台北・派對女王</a:t>
+            </a:r>
+            <a:endParaRPr lang="en-US" sz="1050" dirty="0"/>
+          </a:p>
+        </p:txBody>
+      </p:sp>
+      <p:pic>
+        <p:nvPicPr>
+          <p:cNvPr id="16" name="Image 4" descr="preencoded.png">    </p:cNvPr>
+          <p:cNvPicPr>
+            <a:picLocks noChangeAspect="1"/>
+          </p:cNvPicPr>
+          <p:nvPr/>
+        </p:nvPicPr>
+        <p:blipFill>
+          <a:blip r:embed="rId5"/>
+          <a:stretch>
+            <a:fillRect/>
+          </a:stretch>
+        </p:blipFill>
+        <p:spPr>
+          <a:xfrm>
+            <a:off x="1051560" y="3977640"/>
+            <a:ext cx="2103120" cy="1783080"/>
+          </a:xfrm>
+          <a:prstGeom prst="rect">
+            <a:avLst/>
+          </a:prstGeom>
+        </p:spPr>
+      </p:pic>
+      <p:sp>
+        <p:nvSpPr>
+          <p:cNvPr id="17" name="Text 10"/>
+          <p:cNvSpPr/>
+          <p:nvPr/>
+        </p:nvSpPr>
+        <p:spPr>
+          <a:xfrm>
+            <a:off x="1051560" y="5806440"/>
+            <a:ext cx="2103120" cy="292608"/>
+          </a:xfrm>
+          <a:prstGeom prst="rect">
+            <a:avLst/>
+          </a:prstGeom>
+          <a:noFill/>
+          <a:ln/>
+        </p:spPr>
+        <p:txBody>
+          <a:bodyPr wrap="square" lIns="0" tIns="0" rIns="0" bIns="0" rtlCol="0" anchor="ctr"/>
+          <a:lstStyle/>
+          <a:p>
+            <a:pPr algn="ctr" indent="0" marL="0">
+              <a:buNone/>
+            </a:pPr>
+            <a:r>
+              <a:rPr lang="en-US" sz="1300" b="1" dirty="0">
+                <a:solidFill>
+                  <a:srgbClr val="FFFFFF"/>
+                </a:solidFill>
+                <a:latin typeface="Microsoft JhengHei" pitchFamily="34" charset="0"/>
+                <a:ea typeface="Microsoft JhengHei" pitchFamily="34" charset="-122"/>
+                <a:cs typeface="Microsoft JhengHei" pitchFamily="34" charset="-120"/>
+              </a:rPr>
+              <a:t>Aaliya Rivera</a:t>
+            </a:r>
+            <a:endParaRPr lang="en-US" sz="1300" dirty="0"/>
+          </a:p>
+        </p:txBody>
+      </p:sp>
+      <p:sp>
+        <p:nvSpPr>
+          <p:cNvPr id="18" name="Text 11"/>
+          <p:cNvSpPr/>
+          <p:nvPr/>
+        </p:nvSpPr>
+        <p:spPr>
+          <a:xfrm>
+            <a:off x="1051560" y="6099048"/>
+            <a:ext cx="2103120" cy="274320"/>
+          </a:xfrm>
+          <a:prstGeom prst="rect">
+            <a:avLst/>
+          </a:prstGeom>
+          <a:noFill/>
+          <a:ln/>
+        </p:spPr>
+        <p:txBody>
+          <a:bodyPr wrap="square" lIns="0" tIns="0" rIns="0" bIns="0" rtlCol="0" anchor="ctr"/>
+          <a:lstStyle/>
+          <a:p>
+            <a:pPr algn="ctr" indent="0" marL="0">
+              <a:buNone/>
+            </a:pPr>
+            <a:r>
+              <a:rPr lang="en-US" sz="1050" dirty="0">
+                <a:solidFill>
+                  <a:srgbClr val="8FA0BE"/>
+                </a:solidFill>
+                <a:latin typeface="Microsoft JhengHei" pitchFamily="34" charset="0"/>
+                <a:ea typeface="Microsoft JhengHei" pitchFamily="34" charset="-122"/>
+                <a:cs typeface="Microsoft JhengHei" pitchFamily="34" charset="-120"/>
+              </a:rPr>
+              <a:t>洛杉磯・拉丁生活</a:t>
+            </a:r>
+            <a:endParaRPr lang="en-US" sz="1050" dirty="0"/>
+          </a:p>
+        </p:txBody>
+      </p:sp>
+      <p:pic>
+        <p:nvPicPr>
+          <p:cNvPr id="19" name="Image 5" descr="preencoded.png">    </p:cNvPr>
+          <p:cNvPicPr>
+            <a:picLocks noChangeAspect="1"/>
+          </p:cNvPicPr>
+          <p:nvPr/>
+        </p:nvPicPr>
+        <p:blipFill>
+          <a:blip r:embed="rId6"/>
+          <a:stretch>
+            <a:fillRect/>
+          </a:stretch>
+        </p:blipFill>
+        <p:spPr>
+          <a:xfrm>
+            <a:off x="3657600" y="3977640"/>
+            <a:ext cx="2103120" cy="1783080"/>
+          </a:xfrm>
+          <a:prstGeom prst="rect">
+            <a:avLst/>
+          </a:prstGeom>
+        </p:spPr>
+      </p:pic>
+      <p:sp>
+        <p:nvSpPr>
+          <p:cNvPr id="20" name="Text 12"/>
+          <p:cNvSpPr/>
+          <p:nvPr/>
+        </p:nvSpPr>
+        <p:spPr>
+          <a:xfrm>
+            <a:off x="3657600" y="5806440"/>
+            <a:ext cx="2103120" cy="292608"/>
+          </a:xfrm>
+          <a:prstGeom prst="rect">
+            <a:avLst/>
+          </a:prstGeom>
+          <a:noFill/>
+          <a:ln/>
+        </p:spPr>
+        <p:txBody>
+          <a:bodyPr wrap="square" lIns="0" tIns="0" rIns="0" bIns="0" rtlCol="0" anchor="ctr"/>
+          <a:lstStyle/>
+          <a:p>
+            <a:pPr algn="ctr" indent="0" marL="0">
+              <a:buNone/>
+            </a:pPr>
+            <a:r>
+              <a:rPr lang="en-US" sz="1300" b="1" dirty="0">
+                <a:solidFill>
+                  <a:srgbClr val="FFFFFF"/>
+                </a:solidFill>
+                <a:latin typeface="Microsoft JhengHei" pitchFamily="34" charset="0"/>
+                <a:ea typeface="Microsoft JhengHei" pitchFamily="34" charset="-122"/>
+                <a:cs typeface="Microsoft JhengHei" pitchFamily="34" charset="-120"/>
+              </a:rPr>
+              <a:t>Coco</a:t>
+            </a:r>
+            <a:endParaRPr lang="en-US" sz="1300" dirty="0"/>
+          </a:p>
+        </p:txBody>
+      </p:sp>
+      <p:sp>
+        <p:nvSpPr>
+          <p:cNvPr id="21" name="Text 13"/>
+          <p:cNvSpPr/>
+          <p:nvPr/>
+        </p:nvSpPr>
+        <p:spPr>
+          <a:xfrm>
+            <a:off x="3657600" y="6099048"/>
+            <a:ext cx="2103120" cy="274320"/>
+          </a:xfrm>
+          <a:prstGeom prst="rect">
+            <a:avLst/>
+          </a:prstGeom>
+          <a:noFill/>
+          <a:ln/>
+        </p:spPr>
+        <p:txBody>
+          <a:bodyPr wrap="square" lIns="0" tIns="0" rIns="0" bIns="0" rtlCol="0" anchor="ctr"/>
+          <a:lstStyle/>
+          <a:p>
+            <a:pPr algn="ctr" indent="0" marL="0">
+              <a:buNone/>
+            </a:pPr>
+            <a:r>
+              <a:rPr lang="en-US" sz="1050" dirty="0">
+                <a:solidFill>
+                  <a:srgbClr val="8FA0BE"/>
+                </a:solidFill>
+                <a:latin typeface="Microsoft JhengHei" pitchFamily="34" charset="0"/>
+                <a:ea typeface="Microsoft JhengHei" pitchFamily="34" charset="-122"/>
+                <a:cs typeface="Microsoft JhengHei" pitchFamily="34" charset="-120"/>
+              </a:rPr>
+              <a:t>台灣・校園甜心</a:t>
+            </a:r>
+            <a:endParaRPr lang="en-US" sz="1050" dirty="0"/>
+          </a:p>
+        </p:txBody>
+      </p:sp>
+      <p:pic>
+        <p:nvPicPr>
+          <p:cNvPr id="22" name="Image 6" descr="preencoded.png">    </p:cNvPr>
+          <p:cNvPicPr>
+            <a:picLocks noChangeAspect="1"/>
+          </p:cNvPicPr>
+          <p:nvPr/>
+        </p:nvPicPr>
+        <p:blipFill>
+          <a:blip r:embed="rId7"/>
+          <a:stretch>
+            <a:fillRect/>
+          </a:stretch>
+        </p:blipFill>
+        <p:spPr>
+          <a:xfrm>
+            <a:off x="6263640" y="3977640"/>
+            <a:ext cx="2103120" cy="1783080"/>
+          </a:xfrm>
+          <a:prstGeom prst="rect">
+            <a:avLst/>
+          </a:prstGeom>
+        </p:spPr>
+      </p:pic>
+      <p:sp>
+        <p:nvSpPr>
+          <p:cNvPr id="23" name="Text 14"/>
+          <p:cNvSpPr/>
+          <p:nvPr/>
+        </p:nvSpPr>
+        <p:spPr>
+          <a:xfrm>
+            <a:off x="6263640" y="5806440"/>
+            <a:ext cx="2103120" cy="292608"/>
+          </a:xfrm>
+          <a:prstGeom prst="rect">
+            <a:avLst/>
+          </a:prstGeom>
+          <a:noFill/>
+          <a:ln/>
+        </p:spPr>
+        <p:txBody>
+          <a:bodyPr wrap="square" lIns="0" tIns="0" rIns="0" bIns="0" rtlCol="0" anchor="ctr"/>
+          <a:lstStyle/>
+          <a:p>
+            <a:pPr algn="ctr" indent="0" marL="0">
+              <a:buNone/>
+            </a:pPr>
+            <a:r>
+              <a:rPr lang="en-US" sz="1300" b="1" dirty="0">
+                <a:solidFill>
+                  <a:srgbClr val="FFFFFF"/>
+                </a:solidFill>
+                <a:latin typeface="Microsoft JhengHei" pitchFamily="34" charset="0"/>
+                <a:ea typeface="Microsoft JhengHei" pitchFamily="34" charset="-122"/>
+                <a:cs typeface="Microsoft JhengHei" pitchFamily="34" charset="-120"/>
+              </a:rPr>
+              <a:t>Faye Tan 陳曉菲</a:t>
+            </a:r>
+            <a:endParaRPr lang="en-US" sz="1300" dirty="0"/>
+          </a:p>
+        </p:txBody>
+      </p:sp>
+      <p:sp>
+        <p:nvSpPr>
+          <p:cNvPr id="24" name="Text 15"/>
+          <p:cNvSpPr/>
+          <p:nvPr/>
+        </p:nvSpPr>
+        <p:spPr>
+          <a:xfrm>
+            <a:off x="6263640" y="6099048"/>
+            <a:ext cx="2103120" cy="274320"/>
+          </a:xfrm>
+          <a:prstGeom prst="rect">
+            <a:avLst/>
+          </a:prstGeom>
+          <a:noFill/>
+          <a:ln/>
+        </p:spPr>
+        <p:txBody>
+          <a:bodyPr wrap="square" lIns="0" tIns="0" rIns="0" bIns="0" rtlCol="0" anchor="ctr"/>
+          <a:lstStyle/>
+          <a:p>
+            <a:pPr algn="ctr" indent="0" marL="0">
+              <a:buNone/>
+            </a:pPr>
+            <a:r>
+              <a:rPr lang="en-US" sz="1050" dirty="0">
+                <a:solidFill>
+                  <a:srgbClr val="8FA0BE"/>
+                </a:solidFill>
+                <a:latin typeface="Microsoft JhengHei" pitchFamily="34" charset="0"/>
+                <a:ea typeface="Microsoft JhengHei" pitchFamily="34" charset="-122"/>
+                <a:cs typeface="Microsoft JhengHei" pitchFamily="34" charset="-120"/>
+              </a:rPr>
+              <a:t>世界城市觀察者</a:t>
+            </a:r>
+            <a:endParaRPr lang="en-US" sz="1050" dirty="0"/>
+          </a:p>
+        </p:txBody>
+      </p:sp>
+      <p:pic>
+        <p:nvPicPr>
+          <p:cNvPr id="25" name="Image 7" descr="preencoded.png">    </p:cNvPr>
+          <p:cNvPicPr>
+            <a:picLocks noChangeAspect="1"/>
+          </p:cNvPicPr>
+          <p:nvPr/>
+        </p:nvPicPr>
+        <p:blipFill>
+          <a:blip r:embed="rId8"/>
+          <a:stretch>
+            <a:fillRect/>
+          </a:stretch>
+        </p:blipFill>
+        <p:spPr>
+          <a:xfrm>
+            <a:off x="8869680" y="3977640"/>
+            <a:ext cx="2103120" cy="1783080"/>
+          </a:xfrm>
+          <a:prstGeom prst="rect">
+            <a:avLst/>
+          </a:prstGeom>
+        </p:spPr>
+      </p:pic>
+      <p:sp>
+        <p:nvSpPr>
+          <p:cNvPr id="26" name="Text 16"/>
+          <p:cNvSpPr/>
+          <p:nvPr/>
+        </p:nvSpPr>
+        <p:spPr>
+          <a:xfrm>
+            <a:off x="8869680" y="5806440"/>
+            <a:ext cx="2103120" cy="292608"/>
+          </a:xfrm>
+          <a:prstGeom prst="rect">
+            <a:avLst/>
+          </a:prstGeom>
+          <a:noFill/>
+          <a:ln/>
+        </p:spPr>
+        <p:txBody>
+          <a:bodyPr wrap="square" lIns="0" tIns="0" rIns="0" bIns="0" rtlCol="0" anchor="ctr"/>
+          <a:lstStyle/>
+          <a:p>
+            <a:pPr algn="ctr" indent="0" marL="0">
+              <a:buNone/>
+            </a:pPr>
+            <a:r>
+              <a:rPr lang="en-US" sz="1300" b="1" dirty="0">
+                <a:solidFill>
+                  <a:srgbClr val="FFFFFF"/>
+                </a:solidFill>
+                <a:latin typeface="Microsoft JhengHei" pitchFamily="34" charset="0"/>
+                <a:ea typeface="Microsoft JhengHei" pitchFamily="34" charset="-122"/>
+                <a:cs typeface="Microsoft JhengHei" pitchFamily="34" charset="-120"/>
+              </a:rPr>
+              <a:t>Zhang Qinfeng</a:t>
+            </a:r>
+            <a:endParaRPr lang="en-US" sz="1300" dirty="0"/>
+          </a:p>
+        </p:txBody>
+      </p:sp>
+      <p:sp>
+        <p:nvSpPr>
+          <p:cNvPr id="27" name="Text 17"/>
+          <p:cNvSpPr/>
+          <p:nvPr/>
+        </p:nvSpPr>
+        <p:spPr>
+          <a:xfrm>
+            <a:off x="8869680" y="6099048"/>
+            <a:ext cx="2103120" cy="274320"/>
+          </a:xfrm>
+          <a:prstGeom prst="rect">
+            <a:avLst/>
+          </a:prstGeom>
+          <a:noFill/>
+          <a:ln/>
+        </p:spPr>
+        <p:txBody>
+          <a:bodyPr wrap="square" lIns="0" tIns="0" rIns="0" bIns="0" rtlCol="0" anchor="ctr"/>
+          <a:lstStyle/>
+          <a:p>
+            <a:pPr algn="ctr" indent="0" marL="0">
+              <a:buNone/>
+            </a:pPr>
+            <a:r>
+              <a:rPr lang="en-US" sz="1050" dirty="0">
+                <a:solidFill>
+                  <a:srgbClr val="8FA0BE"/>
+                </a:solidFill>
+                <a:latin typeface="Microsoft JhengHei" pitchFamily="34" charset="0"/>
+                <a:ea typeface="Microsoft JhengHei" pitchFamily="34" charset="-122"/>
+                <a:cs typeface="Microsoft JhengHei" pitchFamily="34" charset="-120"/>
+              </a:rPr>
+              <a:t>數字體驗觀察者</a:t>
+            </a:r>
+            <a:endParaRPr lang="en-US" sz="1050" dirty="0"/>
+          </a:p>
+        </p:txBody>
+      </p:sp>
+      <p:sp>
+        <p:nvSpPr>
+          <p:cNvPr id="28" name="Text 18"/>
+          <p:cNvSpPr/>
+          <p:nvPr/>
+        </p:nvSpPr>
+        <p:spPr>
+          <a:xfrm>
+            <a:off x="822960" y="6446520"/>
+            <a:ext cx="10515600" cy="320040"/>
+          </a:xfrm>
+          <a:prstGeom prst="rect">
+            <a:avLst/>
+          </a:prstGeom>
+          <a:noFill/>
+          <a:ln/>
+        </p:spPr>
+        <p:txBody>
+          <a:bodyPr wrap="square" lIns="0" tIns="0" rIns="0" bIns="0" rtlCol="0" anchor="ctr"/>
+          <a:lstStyle/>
+          <a:p>
+            <a:pPr algn="ctr" indent="0" marL="0">
+              <a:buNone/>
+            </a:pPr>
+            <a:r>
+              <a:rPr lang="en-US" sz="1050" dirty="0">
+                <a:solidFill>
+                  <a:srgbClr val="8FA0BE"/>
+                </a:solidFill>
+                <a:latin typeface="Microsoft JhengHei" pitchFamily="34" charset="0"/>
+                <a:ea typeface="Microsoft JhengHei" pitchFamily="34" charset="-122"/>
+                <a:cs typeface="Microsoft JhengHei" pitchFamily="34" charset="-120"/>
+              </a:rPr>
+              <a:t>以上皆為 AI 生成之虛擬人物示意；實際人設依品牌調性量身設計</a:t>
+            </a:r>
+            <a:endParaRPr lang="en-US" sz="1050" dirty="0"/>
           </a:p>
         </p:txBody>
       </p:sp>

--- a/business/數位人KOL-對外提案簡報.pptx
+++ b/business/數位人KOL-對外提案簡報.pptx
@@ -3000,7 +3000,7 @@
                 <a:ea typeface="Microsoft JhengHei" pitchFamily="34" charset="-122"/>
                 <a:cs typeface="Microsoft JhengHei" pitchFamily="34" charset="-120"/>
               </a:rPr>
-              <a:t>我們就是在製造爆款</a:t>
+              <a:t>爆款素材 × 流量保證</a:t>
             </a:r>
             <a:endParaRPr lang="en-US" sz="3000" dirty="0"/>
           </a:p>
@@ -4715,7 +4715,7 @@
                 <a:ea typeface="Microsoft JhengHei" pitchFamily="34" charset="-122"/>
                 <a:cs typeface="Microsoft JhengHei" pitchFamily="34" charset="-120"/>
               </a:rPr>
-              <a:t>用實時爆款方法論持續產出；未達驗收標準我們自費重做，不占您的修改次數。</a:t>
+              <a:t>以實時爆款方法論持續產出——每一篇素材，都以成為爆款為目標製作。</a:t>
             </a:r>
             <a:endParaRPr lang="en-US" sz="1250" dirty="0"/>
           </a:p>
@@ -6783,7 +6783,7 @@
                 <a:ea typeface="Microsoft JhengHei" pitchFamily="34" charset="-122"/>
                 <a:cs typeface="Microsoft JhengHei" pitchFamily="34" charset="-120"/>
               </a:rPr>
-              <a:t>一季一約，簽約一次收齊｜每 30 天檢核點，退未執行月份｜每素材內含 1 次修改｜第 2 位數位人 85 折｜半年約 95 折・年約 9 折</a:t>
+              <a:t>一季一約｜每 30 天檢核點，退未執行月份｜每素材內含 1 次修改</a:t>
             </a:r>
             <a:endParaRPr lang="en-US" sz="1150" dirty="0"/>
           </a:p>
@@ -8205,7 +8205,7 @@
                 <a:ea typeface="Microsoft JhengHei" pitchFamily="34" charset="-122"/>
                 <a:cs typeface="Microsoft JhengHei" pitchFamily="34" charset="-120"/>
               </a:rPr>
-              <a:t>買下 IP，就是永續規劃</a:t>
+              <a:t>品牌永續，從擁有一個 IP 開始</a:t>
             </a:r>
             <a:endParaRPr lang="en-US" sz="3000" dirty="0"/>
           </a:p>
@@ -9647,7 +9647,7 @@
                 <a:ea typeface="Microsoft JhengHei" pitchFamily="34" charset="-122"/>
                 <a:cs typeface="Microsoft JhengHei" pitchFamily="34" charset="-120"/>
               </a:rPr>
-              <a:t>真人藝人合作（2025.10-2026.01）</a:t>
+              <a:t>真人藝人合作</a:t>
             </a:r>
             <a:endParaRPr lang="en-US" sz="1500" dirty="0"/>
           </a:p>
@@ -10262,9 +10262,9 @@
               <a:buNone/>
             </a:pPr>
             <a:r>
-              <a:rPr lang="en-US" sz="1350" b="1" dirty="0">
-                <a:solidFill>
-                  <a:srgbClr val="FFFFFF"/>
+              <a:rPr lang="en-US" sz="1600" b="1" dirty="0">
+                <a:solidFill>
+                  <a:srgbClr val="E8B45F"/>
                 </a:solidFill>
                 <a:latin typeface="Microsoft JhengHei" pitchFamily="34" charset="0"/>
                 <a:ea typeface="Microsoft JhengHei" pitchFamily="34" charset="-122"/>
